--- a/reference/QCATC777-Hazard Curve.pptx
+++ b/reference/QCATC777-Hazard Curve.pptx
@@ -2250,9 +2250,9 @@
         <p:grpSpPr>
           <a:xfrm>
             <a:off x="914400" y="914400"/>
-            <a:ext cx="5486400" cy="3657600"/>
+            <a:ext cx="5303520" cy="4206240"/>
             <a:chOff x="914400" y="914400"/>
-            <a:chExt cx="5486400" cy="3657600"/>
+            <a:chExt cx="5303520" cy="4206240"/>
           </a:xfrm>
         </p:grpSpPr>
         <p:sp>
@@ -2264,7 +2264,7 @@
           <p:spPr>
             <a:xfrm>
               <a:off x="914400" y="914400"/>
-              <a:ext cx="5486400" cy="3657600"/>
+              <a:ext cx="5303520" cy="4206240"/>
             </a:xfrm>
             <a:prstGeom prst="rect">
               <a:avLst/>
@@ -2299,7 +2299,7 @@
           <p:spPr>
             <a:xfrm>
               <a:off x="914400" y="914400"/>
-              <a:ext cx="5486400" cy="3657600"/>
+              <a:ext cx="5303520" cy="4206239"/>
             </a:xfrm>
             <a:prstGeom prst="rect">
               <a:avLst/>
@@ -2324,17 +2324,13 @@
           </p:nvSpPr>
           <p:spPr>
             <a:xfrm>
-              <a:off x="1648227" y="1315914"/>
-              <a:ext cx="1889138" cy="1171063"/>
+              <a:off x="1650832" y="1315770"/>
+              <a:ext cx="1804787" cy="1447380"/>
             </a:xfrm>
             <a:prstGeom prst="rect">
               <a:avLst/>
             </a:prstGeom>
-            <a:solidFill>
-              <a:srgbClr val="FFFFFF">
-                <a:alpha val="100000"/>
-              </a:srgbClr>
-            </a:solidFill>
+            <a:noFill/>
           </p:spPr>
           <p:txBody>
             <a:bodyPr/>
@@ -2350,72 +2346,72 @@
           </p:nvSpPr>
           <p:spPr>
             <a:xfrm>
-              <a:off x="2575622" y="1800738"/>
-              <a:ext cx="927395" cy="661799"/>
+              <a:off x="2536819" y="1914991"/>
+              <a:ext cx="885986" cy="817954"/>
             </a:xfrm>
             <a:custGeom>
               <a:avLst/>
               <a:pathLst>
-                <a:path w="927395" h="661799">
+                <a:path w="885986" h="817954">
                   <a:moveTo>
-                    <a:pt x="0" y="661799"/>
+                    <a:pt x="0" y="817954"/>
                   </a:moveTo>
                   <a:lnTo>
-                    <a:pt x="103043" y="604242"/>
-                  </a:lnTo>
-                  <a:lnTo>
-                    <a:pt x="137391" y="561808"/>
-                  </a:lnTo>
-                  <a:lnTo>
-                    <a:pt x="171739" y="502282"/>
-                  </a:lnTo>
-                  <a:lnTo>
-                    <a:pt x="206087" y="424158"/>
-                  </a:lnTo>
-                  <a:lnTo>
-                    <a:pt x="240435" y="328561"/>
-                  </a:lnTo>
-                  <a:lnTo>
-                    <a:pt x="274783" y="220979"/>
-                  </a:lnTo>
-                  <a:lnTo>
-                    <a:pt x="309131" y="114302"/>
-                  </a:lnTo>
-                  <a:lnTo>
-                    <a:pt x="343479" y="37090"/>
-                  </a:lnTo>
-                  <a:lnTo>
-                    <a:pt x="377827" y="0"/>
-                  </a:lnTo>
-                  <a:lnTo>
-                    <a:pt x="412175" y="265"/>
-                  </a:lnTo>
-                  <a:lnTo>
-                    <a:pt x="446523" y="28671"/>
-                  </a:lnTo>
-                  <a:lnTo>
-                    <a:pt x="480871" y="72098"/>
-                  </a:lnTo>
-                  <a:lnTo>
-                    <a:pt x="549567" y="160610"/>
-                  </a:lnTo>
-                  <a:lnTo>
-                    <a:pt x="618263" y="221559"/>
-                  </a:lnTo>
-                  <a:lnTo>
-                    <a:pt x="686959" y="292344"/>
-                  </a:lnTo>
-                  <a:lnTo>
-                    <a:pt x="721307" y="340859"/>
-                  </a:lnTo>
-                  <a:lnTo>
-                    <a:pt x="755655" y="395851"/>
-                  </a:lnTo>
-                  <a:lnTo>
-                    <a:pt x="790003" y="451566"/>
-                  </a:lnTo>
-                  <a:lnTo>
-                    <a:pt x="927395" y="606790"/>
+                    <a:pt x="98442" y="746815"/>
+                  </a:lnTo>
+                  <a:lnTo>
+                    <a:pt x="131257" y="694369"/>
+                  </a:lnTo>
+                  <a:lnTo>
+                    <a:pt x="164071" y="620798"/>
+                  </a:lnTo>
+                  <a:lnTo>
+                    <a:pt x="196885" y="524240"/>
+                  </a:lnTo>
+                  <a:lnTo>
+                    <a:pt x="229700" y="406087"/>
+                  </a:lnTo>
+                  <a:lnTo>
+                    <a:pt x="262514" y="273120"/>
+                  </a:lnTo>
+                  <a:lnTo>
+                    <a:pt x="295328" y="141272"/>
+                  </a:lnTo>
+                  <a:lnTo>
+                    <a:pt x="328143" y="45842"/>
+                  </a:lnTo>
+                  <a:lnTo>
+                    <a:pt x="360957" y="0"/>
+                  </a:lnTo>
+                  <a:lnTo>
+                    <a:pt x="393771" y="327"/>
+                  </a:lnTo>
+                  <a:lnTo>
+                    <a:pt x="426586" y="35436"/>
+                  </a:lnTo>
+                  <a:lnTo>
+                    <a:pt x="459400" y="89110"/>
+                  </a:lnTo>
+                  <a:lnTo>
+                    <a:pt x="525029" y="198507"/>
+                  </a:lnTo>
+                  <a:lnTo>
+                    <a:pt x="590657" y="273837"/>
+                  </a:lnTo>
+                  <a:lnTo>
+                    <a:pt x="656286" y="361324"/>
+                  </a:lnTo>
+                  <a:lnTo>
+                    <a:pt x="689100" y="421287"/>
+                  </a:lnTo>
+                  <a:lnTo>
+                    <a:pt x="721914" y="489254"/>
+                  </a:lnTo>
+                  <a:lnTo>
+                    <a:pt x="754729" y="558115"/>
+                  </a:lnTo>
+                  <a:lnTo>
+                    <a:pt x="885986" y="749965"/>
                   </a:lnTo>
                 </a:path>
               </a:pathLst>
@@ -2444,60 +2440,60 @@
           </p:nvSpPr>
           <p:spPr>
             <a:xfrm>
-              <a:off x="2541274" y="1327395"/>
-              <a:ext cx="961743" cy="1125714"/>
+              <a:off x="2504004" y="1329960"/>
+              <a:ext cx="918800" cy="1391332"/>
             </a:xfrm>
             <a:custGeom>
               <a:avLst/>
               <a:pathLst>
-                <a:path w="961743" h="1125714">
+                <a:path w="918800" h="1391332">
                   <a:moveTo>
-                    <a:pt x="0" y="1125714"/>
+                    <a:pt x="0" y="1391332"/>
                   </a:moveTo>
                   <a:lnTo>
-                    <a:pt x="34347" y="1100435"/>
-                  </a:lnTo>
-                  <a:lnTo>
-                    <a:pt x="137391" y="843204"/>
-                  </a:lnTo>
-                  <a:lnTo>
-                    <a:pt x="171739" y="647080"/>
-                  </a:lnTo>
-                  <a:lnTo>
-                    <a:pt x="206087" y="402927"/>
-                  </a:lnTo>
-                  <a:lnTo>
-                    <a:pt x="240435" y="175318"/>
-                  </a:lnTo>
-                  <a:lnTo>
-                    <a:pt x="274783" y="30014"/>
-                  </a:lnTo>
-                  <a:lnTo>
-                    <a:pt x="309131" y="0"/>
-                  </a:lnTo>
-                  <a:lnTo>
-                    <a:pt x="343479" y="86898"/>
-                  </a:lnTo>
-                  <a:lnTo>
-                    <a:pt x="377827" y="248114"/>
-                  </a:lnTo>
-                  <a:lnTo>
-                    <a:pt x="412175" y="419034"/>
-                  </a:lnTo>
-                  <a:lnTo>
-                    <a:pt x="446523" y="564943"/>
-                  </a:lnTo>
-                  <a:lnTo>
-                    <a:pt x="480871" y="682657"/>
-                  </a:lnTo>
-                  <a:lnTo>
-                    <a:pt x="721307" y="1043644"/>
-                  </a:lnTo>
-                  <a:lnTo>
-                    <a:pt x="755655" y="1056990"/>
-                  </a:lnTo>
-                  <a:lnTo>
-                    <a:pt x="961743" y="1097120"/>
+                    <a:pt x="32814" y="1360088"/>
+                  </a:lnTo>
+                  <a:lnTo>
+                    <a:pt x="131257" y="1042162"/>
+                  </a:lnTo>
+                  <a:lnTo>
+                    <a:pt x="164071" y="799761"/>
+                  </a:lnTo>
+                  <a:lnTo>
+                    <a:pt x="196885" y="498000"/>
+                  </a:lnTo>
+                  <a:lnTo>
+                    <a:pt x="229700" y="216685"/>
+                  </a:lnTo>
+                  <a:lnTo>
+                    <a:pt x="262514" y="37096"/>
+                  </a:lnTo>
+                  <a:lnTo>
+                    <a:pt x="295328" y="0"/>
+                  </a:lnTo>
+                  <a:lnTo>
+                    <a:pt x="328143" y="107402"/>
+                  </a:lnTo>
+                  <a:lnTo>
+                    <a:pt x="360957" y="306657"/>
+                  </a:lnTo>
+                  <a:lnTo>
+                    <a:pt x="393771" y="517907"/>
+                  </a:lnTo>
+                  <a:lnTo>
+                    <a:pt x="426586" y="698244"/>
+                  </a:lnTo>
+                  <a:lnTo>
+                    <a:pt x="459400" y="843732"/>
+                  </a:lnTo>
+                  <a:lnTo>
+                    <a:pt x="689100" y="1289897"/>
+                  </a:lnTo>
+                  <a:lnTo>
+                    <a:pt x="721914" y="1306391"/>
+                  </a:lnTo>
+                  <a:lnTo>
+                    <a:pt x="918800" y="1355990"/>
                   </a:lnTo>
                 </a:path>
               </a:pathLst>
@@ -2526,72 +2522,72 @@
           </p:nvSpPr>
           <p:spPr>
             <a:xfrm>
-              <a:off x="2438230" y="2102660"/>
-              <a:ext cx="1064787" cy="341203"/>
+              <a:off x="2405561" y="2288152"/>
+              <a:ext cx="1017243" cy="421712"/>
             </a:xfrm>
             <a:custGeom>
               <a:avLst/>
               <a:pathLst>
-                <a:path w="1064787" h="341203">
+                <a:path w="1017243" h="421712">
                   <a:moveTo>
-                    <a:pt x="0" y="341203"/>
+                    <a:pt x="0" y="421712"/>
                   </a:moveTo>
                   <a:lnTo>
-                    <a:pt x="103043" y="290221"/>
-                  </a:lnTo>
-                  <a:lnTo>
-                    <a:pt x="137391" y="265568"/>
-                  </a:lnTo>
-                  <a:lnTo>
-                    <a:pt x="206087" y="207836"/>
-                  </a:lnTo>
-                  <a:lnTo>
-                    <a:pt x="274783" y="142335"/>
-                  </a:lnTo>
-                  <a:lnTo>
-                    <a:pt x="309131" y="108525"/>
-                  </a:lnTo>
-                  <a:lnTo>
-                    <a:pt x="343479" y="75960"/>
-                  </a:lnTo>
-                  <a:lnTo>
-                    <a:pt x="377827" y="46892"/>
-                  </a:lnTo>
-                  <a:lnTo>
-                    <a:pt x="412175" y="23720"/>
-                  </a:lnTo>
-                  <a:lnTo>
-                    <a:pt x="446523" y="8039"/>
-                  </a:lnTo>
-                  <a:lnTo>
-                    <a:pt x="480871" y="0"/>
-                  </a:lnTo>
-                  <a:lnTo>
-                    <a:pt x="583915" y="3202"/>
-                  </a:lnTo>
-                  <a:lnTo>
-                    <a:pt x="686959" y="4531"/>
-                  </a:lnTo>
-                  <a:lnTo>
-                    <a:pt x="721307" y="3669"/>
-                  </a:lnTo>
-                  <a:lnTo>
-                    <a:pt x="755655" y="6264"/>
-                  </a:lnTo>
-                  <a:lnTo>
-                    <a:pt x="790003" y="15509"/>
-                  </a:lnTo>
-                  <a:lnTo>
-                    <a:pt x="858699" y="56907"/>
-                  </a:lnTo>
-                  <a:lnTo>
-                    <a:pt x="893047" y="88070"/>
-                  </a:lnTo>
-                  <a:lnTo>
-                    <a:pt x="927395" y="123475"/>
-                  </a:lnTo>
-                  <a:lnTo>
-                    <a:pt x="1064787" y="251353"/>
+                    <a:pt x="98442" y="358700"/>
+                  </a:lnTo>
+                  <a:lnTo>
+                    <a:pt x="131257" y="328230"/>
+                  </a:lnTo>
+                  <a:lnTo>
+                    <a:pt x="196885" y="256876"/>
+                  </a:lnTo>
+                  <a:lnTo>
+                    <a:pt x="262514" y="175920"/>
+                  </a:lnTo>
+                  <a:lnTo>
+                    <a:pt x="295328" y="134133"/>
+                  </a:lnTo>
+                  <a:lnTo>
+                    <a:pt x="328143" y="93883"/>
+                  </a:lnTo>
+                  <a:lnTo>
+                    <a:pt x="360957" y="57956"/>
+                  </a:lnTo>
+                  <a:lnTo>
+                    <a:pt x="393771" y="29317"/>
+                  </a:lnTo>
+                  <a:lnTo>
+                    <a:pt x="426586" y="9936"/>
+                  </a:lnTo>
+                  <a:lnTo>
+                    <a:pt x="459400" y="0"/>
+                  </a:lnTo>
+                  <a:lnTo>
+                    <a:pt x="557843" y="3957"/>
+                  </a:lnTo>
+                  <a:lnTo>
+                    <a:pt x="656286" y="5600"/>
+                  </a:lnTo>
+                  <a:lnTo>
+                    <a:pt x="689100" y="4535"/>
+                  </a:lnTo>
+                  <a:lnTo>
+                    <a:pt x="721914" y="7743"/>
+                  </a:lnTo>
+                  <a:lnTo>
+                    <a:pt x="754729" y="19168"/>
+                  </a:lnTo>
+                  <a:lnTo>
+                    <a:pt x="820357" y="70335"/>
+                  </a:lnTo>
+                  <a:lnTo>
+                    <a:pt x="853172" y="108851"/>
+                  </a:lnTo>
+                  <a:lnTo>
+                    <a:pt x="885986" y="152609"/>
+                  </a:lnTo>
+                  <a:lnTo>
+                    <a:pt x="1017243" y="310661"/>
                   </a:lnTo>
                 </a:path>
               </a:pathLst>
@@ -2620,8 +2616,8 @@
           </p:nvSpPr>
           <p:spPr>
             <a:xfrm>
-              <a:off x="2413404" y="2419038"/>
-              <a:ext cx="49651" cy="49651"/>
+              <a:off x="2373965" y="2678267"/>
+              <a:ext cx="63193" cy="63193"/>
             </a:xfrm>
             <a:prstGeom prst="ellipse">
               <a:avLst/>
@@ -2631,7 +2627,7 @@
                 <a:alpha val="100000"/>
               </a:srgbClr>
             </a:solidFill>
-            <a:ln w="9000" cap="rnd">
+            <a:ln w="11454" cap="rnd">
               <a:solidFill>
                 <a:srgbClr val="FF64B0">
                   <a:alpha val="100000"/>
@@ -2655,8 +2651,8 @@
           </p:nvSpPr>
           <p:spPr>
             <a:xfrm>
-              <a:off x="2516448" y="2368055"/>
-              <a:ext cx="49651" cy="49651"/>
+              <a:off x="2472408" y="2615256"/>
+              <a:ext cx="63193" cy="63193"/>
             </a:xfrm>
             <a:prstGeom prst="ellipse">
               <a:avLst/>
@@ -2666,7 +2662,7 @@
                 <a:alpha val="100000"/>
               </a:srgbClr>
             </a:solidFill>
-            <a:ln w="9000" cap="rnd">
+            <a:ln w="11454" cap="rnd">
               <a:solidFill>
                 <a:srgbClr val="FF64B0">
                   <a:alpha val="100000"/>
@@ -2690,8 +2686,8 @@
           </p:nvSpPr>
           <p:spPr>
             <a:xfrm>
-              <a:off x="2550796" y="2343403"/>
-              <a:ext cx="49651" cy="49651"/>
+              <a:off x="2505222" y="2584786"/>
+              <a:ext cx="63193" cy="63193"/>
             </a:xfrm>
             <a:prstGeom prst="ellipse">
               <a:avLst/>
@@ -2701,7 +2697,7 @@
                 <a:alpha val="100000"/>
               </a:srgbClr>
             </a:solidFill>
-            <a:ln w="9000" cap="rnd">
+            <a:ln w="11454" cap="rnd">
               <a:solidFill>
                 <a:srgbClr val="FF64B0">
                   <a:alpha val="100000"/>
@@ -2725,8 +2721,8 @@
           </p:nvSpPr>
           <p:spPr>
             <a:xfrm>
-              <a:off x="2619492" y="2285671"/>
-              <a:ext cx="49651" cy="49651"/>
+              <a:off x="2570851" y="2513432"/>
+              <a:ext cx="63193" cy="63193"/>
             </a:xfrm>
             <a:prstGeom prst="ellipse">
               <a:avLst/>
@@ -2736,7 +2732,7 @@
                 <a:alpha val="100000"/>
               </a:srgbClr>
             </a:solidFill>
-            <a:ln w="9000" cap="rnd">
+            <a:ln w="11454" cap="rnd">
               <a:solidFill>
                 <a:srgbClr val="FF64B0">
                   <a:alpha val="100000"/>
@@ -2760,8 +2756,8 @@
           </p:nvSpPr>
           <p:spPr>
             <a:xfrm>
-              <a:off x="2688188" y="2220169"/>
-              <a:ext cx="49651" cy="49651"/>
+              <a:off x="2636479" y="2432476"/>
+              <a:ext cx="63193" cy="63193"/>
             </a:xfrm>
             <a:prstGeom prst="ellipse">
               <a:avLst/>
@@ -2771,7 +2767,7 @@
                 <a:alpha val="100000"/>
               </a:srgbClr>
             </a:solidFill>
-            <a:ln w="9000" cap="rnd">
+            <a:ln w="11454" cap="rnd">
               <a:solidFill>
                 <a:srgbClr val="FF64B0">
                   <a:alpha val="100000"/>
@@ -2795,8 +2791,8 @@
           </p:nvSpPr>
           <p:spPr>
             <a:xfrm>
-              <a:off x="2722536" y="2186360"/>
-              <a:ext cx="49651" cy="49651"/>
+              <a:off x="2669294" y="2390688"/>
+              <a:ext cx="63193" cy="63193"/>
             </a:xfrm>
             <a:prstGeom prst="ellipse">
               <a:avLst/>
@@ -2806,7 +2802,7 @@
                 <a:alpha val="100000"/>
               </a:srgbClr>
             </a:solidFill>
-            <a:ln w="9000" cap="rnd">
+            <a:ln w="11454" cap="rnd">
               <a:solidFill>
                 <a:srgbClr val="FF64B0">
                   <a:alpha val="100000"/>
@@ -2830,8 +2826,8 @@
           </p:nvSpPr>
           <p:spPr>
             <a:xfrm>
-              <a:off x="2756884" y="2153795"/>
-              <a:ext cx="49651" cy="49651"/>
+              <a:off x="2702108" y="2350439"/>
+              <a:ext cx="63193" cy="63193"/>
             </a:xfrm>
             <a:prstGeom prst="ellipse">
               <a:avLst/>
@@ -2841,7 +2837,7 @@
                 <a:alpha val="100000"/>
               </a:srgbClr>
             </a:solidFill>
-            <a:ln w="9000" cap="rnd">
+            <a:ln w="11454" cap="rnd">
               <a:solidFill>
                 <a:srgbClr val="FF64B0">
                   <a:alpha val="100000"/>
@@ -2865,8 +2861,8 @@
           </p:nvSpPr>
           <p:spPr>
             <a:xfrm>
-              <a:off x="2791232" y="2124726"/>
-              <a:ext cx="49651" cy="49651"/>
+              <a:off x="2734922" y="2314512"/>
+              <a:ext cx="63193" cy="63193"/>
             </a:xfrm>
             <a:prstGeom prst="ellipse">
               <a:avLst/>
@@ -2876,7 +2872,7 @@
                 <a:alpha val="100000"/>
               </a:srgbClr>
             </a:solidFill>
-            <a:ln w="9000" cap="rnd">
+            <a:ln w="11454" cap="rnd">
               <a:solidFill>
                 <a:srgbClr val="FF64B0">
                   <a:alpha val="100000"/>
@@ -2900,8 +2896,8 @@
           </p:nvSpPr>
           <p:spPr>
             <a:xfrm>
-              <a:off x="2825580" y="2101555"/>
-              <a:ext cx="49651" cy="49651"/>
+              <a:off x="2767737" y="2285873"/>
+              <a:ext cx="63193" cy="63193"/>
             </a:xfrm>
             <a:prstGeom prst="ellipse">
               <a:avLst/>
@@ -2911,7 +2907,7 @@
                 <a:alpha val="100000"/>
               </a:srgbClr>
             </a:solidFill>
-            <a:ln w="9000" cap="rnd">
+            <a:ln w="11454" cap="rnd">
               <a:solidFill>
                 <a:srgbClr val="FF64B0">
                   <a:alpha val="100000"/>
@@ -2935,8 +2931,8 @@
           </p:nvSpPr>
           <p:spPr>
             <a:xfrm>
-              <a:off x="2859928" y="2085873"/>
-              <a:ext cx="49651" cy="49651"/>
+              <a:off x="2800551" y="2266491"/>
+              <a:ext cx="63193" cy="63193"/>
             </a:xfrm>
             <a:prstGeom prst="ellipse">
               <a:avLst/>
@@ -2946,7 +2942,7 @@
                 <a:alpha val="100000"/>
               </a:srgbClr>
             </a:solidFill>
-            <a:ln w="9000" cap="rnd">
+            <a:ln w="11454" cap="rnd">
               <a:solidFill>
                 <a:srgbClr val="FF64B0">
                   <a:alpha val="100000"/>
@@ -2970,8 +2966,8 @@
           </p:nvSpPr>
           <p:spPr>
             <a:xfrm>
-              <a:off x="2894276" y="2077834"/>
-              <a:ext cx="49651" cy="49651"/>
+              <a:off x="2833365" y="2256555"/>
+              <a:ext cx="63193" cy="63193"/>
             </a:xfrm>
             <a:prstGeom prst="ellipse">
               <a:avLst/>
@@ -2981,7 +2977,7 @@
                 <a:alpha val="100000"/>
               </a:srgbClr>
             </a:solidFill>
-            <a:ln w="9000" cap="rnd">
+            <a:ln w="11454" cap="rnd">
               <a:solidFill>
                 <a:srgbClr val="FF64B0">
                   <a:alpha val="100000"/>
@@ -3005,8 +3001,8 @@
           </p:nvSpPr>
           <p:spPr>
             <a:xfrm>
-              <a:off x="2997320" y="2081036"/>
-              <a:ext cx="49651" cy="49651"/>
+              <a:off x="2931808" y="2260513"/>
+              <a:ext cx="63193" cy="63193"/>
             </a:xfrm>
             <a:prstGeom prst="ellipse">
               <a:avLst/>
@@ -3016,7 +3012,7 @@
                 <a:alpha val="100000"/>
               </a:srgbClr>
             </a:solidFill>
-            <a:ln w="9000" cap="rnd">
+            <a:ln w="11454" cap="rnd">
               <a:solidFill>
                 <a:srgbClr val="FF64B0">
                   <a:alpha val="100000"/>
@@ -3040,8 +3036,8 @@
           </p:nvSpPr>
           <p:spPr>
             <a:xfrm>
-              <a:off x="3100364" y="2082365"/>
-              <a:ext cx="49651" cy="49651"/>
+              <a:off x="3030251" y="2262156"/>
+              <a:ext cx="63193" cy="63193"/>
             </a:xfrm>
             <a:prstGeom prst="ellipse">
               <a:avLst/>
@@ -3051,7 +3047,7 @@
                 <a:alpha val="100000"/>
               </a:srgbClr>
             </a:solidFill>
-            <a:ln w="9000" cap="rnd">
+            <a:ln w="11454" cap="rnd">
               <a:solidFill>
                 <a:srgbClr val="FF64B0">
                   <a:alpha val="100000"/>
@@ -3075,8 +3071,8 @@
           </p:nvSpPr>
           <p:spPr>
             <a:xfrm>
-              <a:off x="3134712" y="2081503"/>
-              <a:ext cx="49651" cy="49651"/>
+              <a:off x="3063065" y="2261091"/>
+              <a:ext cx="63193" cy="63193"/>
             </a:xfrm>
             <a:prstGeom prst="ellipse">
               <a:avLst/>
@@ -3086,7 +3082,7 @@
                 <a:alpha val="100000"/>
               </a:srgbClr>
             </a:solidFill>
-            <a:ln w="9000" cap="rnd">
+            <a:ln w="11454" cap="rnd">
               <a:solidFill>
                 <a:srgbClr val="FF64B0">
                   <a:alpha val="100000"/>
@@ -3110,8 +3106,8 @@
           </p:nvSpPr>
           <p:spPr>
             <a:xfrm>
-              <a:off x="3169060" y="2084099"/>
-              <a:ext cx="49651" cy="49651"/>
+              <a:off x="3095880" y="2264298"/>
+              <a:ext cx="63193" cy="63193"/>
             </a:xfrm>
             <a:prstGeom prst="ellipse">
               <a:avLst/>
@@ -3121,7 +3117,7 @@
                 <a:alpha val="100000"/>
               </a:srgbClr>
             </a:solidFill>
-            <a:ln w="9000" cap="rnd">
+            <a:ln w="11454" cap="rnd">
               <a:solidFill>
                 <a:srgbClr val="FF64B0">
                   <a:alpha val="100000"/>
@@ -3145,8 +3141,8 @@
           </p:nvSpPr>
           <p:spPr>
             <a:xfrm>
-              <a:off x="3203408" y="2093343"/>
-              <a:ext cx="49651" cy="49651"/>
+              <a:off x="3128694" y="2275724"/>
+              <a:ext cx="63193" cy="63193"/>
             </a:xfrm>
             <a:prstGeom prst="ellipse">
               <a:avLst/>
@@ -3156,7 +3152,7 @@
                 <a:alpha val="100000"/>
               </a:srgbClr>
             </a:solidFill>
-            <a:ln w="9000" cap="rnd">
+            <a:ln w="11454" cap="rnd">
               <a:solidFill>
                 <a:srgbClr val="FF64B0">
                   <a:alpha val="100000"/>
@@ -3180,8 +3176,8 @@
           </p:nvSpPr>
           <p:spPr>
             <a:xfrm>
-              <a:off x="3272104" y="2134741"/>
-              <a:ext cx="49651" cy="49651"/>
+              <a:off x="3194323" y="2326890"/>
+              <a:ext cx="63193" cy="63193"/>
             </a:xfrm>
             <a:prstGeom prst="ellipse">
               <a:avLst/>
@@ -3191,7 +3187,7 @@
                 <a:alpha val="100000"/>
               </a:srgbClr>
             </a:solidFill>
-            <a:ln w="9000" cap="rnd">
+            <a:ln w="11454" cap="rnd">
               <a:solidFill>
                 <a:srgbClr val="FF64B0">
                   <a:alpha val="100000"/>
@@ -3215,8 +3211,8 @@
           </p:nvSpPr>
           <p:spPr>
             <a:xfrm>
-              <a:off x="3306452" y="2165905"/>
-              <a:ext cx="49651" cy="49651"/>
+              <a:off x="3227137" y="2365407"/>
+              <a:ext cx="63193" cy="63193"/>
             </a:xfrm>
             <a:prstGeom prst="ellipse">
               <a:avLst/>
@@ -3226,7 +3222,7 @@
                 <a:alpha val="100000"/>
               </a:srgbClr>
             </a:solidFill>
-            <a:ln w="9000" cap="rnd">
+            <a:ln w="11454" cap="rnd">
               <a:solidFill>
                 <a:srgbClr val="FF64B0">
                   <a:alpha val="100000"/>
@@ -3250,8 +3246,8 @@
           </p:nvSpPr>
           <p:spPr>
             <a:xfrm>
-              <a:off x="3340799" y="2201309"/>
-              <a:ext cx="49651" cy="49651"/>
+              <a:off x="3259951" y="2409165"/>
+              <a:ext cx="63193" cy="63193"/>
             </a:xfrm>
             <a:prstGeom prst="ellipse">
               <a:avLst/>
@@ -3261,7 +3257,7 @@
                 <a:alpha val="100000"/>
               </a:srgbClr>
             </a:solidFill>
-            <a:ln w="9000" cap="rnd">
+            <a:ln w="11454" cap="rnd">
               <a:solidFill>
                 <a:srgbClr val="FF64B0">
                   <a:alpha val="100000"/>
@@ -3285,8 +3281,8 @@
           </p:nvSpPr>
           <p:spPr>
             <a:xfrm>
-              <a:off x="3478191" y="2329187"/>
-              <a:ext cx="49651" cy="49651"/>
+              <a:off x="3391209" y="2567217"/>
+              <a:ext cx="63193" cy="63193"/>
             </a:xfrm>
             <a:prstGeom prst="ellipse">
               <a:avLst/>
@@ -3296,7 +3292,7 @@
                 <a:alpha val="100000"/>
               </a:srgbClr>
             </a:solidFill>
-            <a:ln w="9000" cap="rnd">
+            <a:ln w="11454" cap="rnd">
               <a:solidFill>
                 <a:srgbClr val="FF64B0">
                   <a:alpha val="100000"/>
@@ -3320,8 +3316,8 @@
           </p:nvSpPr>
           <p:spPr>
             <a:xfrm>
-              <a:off x="2516448" y="2428284"/>
-              <a:ext cx="49651" cy="49651"/>
+              <a:off x="2472408" y="2689696"/>
+              <a:ext cx="63193" cy="63193"/>
             </a:xfrm>
             <a:prstGeom prst="ellipse">
               <a:avLst/>
@@ -3331,7 +3327,7 @@
                 <a:alpha val="100000"/>
               </a:srgbClr>
             </a:solidFill>
-            <a:ln w="9000" cap="rnd">
+            <a:ln w="11454" cap="rnd">
               <a:solidFill>
                 <a:srgbClr val="00C08B">
                   <a:alpha val="100000"/>
@@ -3355,8 +3351,8 @@
           </p:nvSpPr>
           <p:spPr>
             <a:xfrm>
-              <a:off x="2550796" y="2403005"/>
-              <a:ext cx="49651" cy="49651"/>
+              <a:off x="2505222" y="2658452"/>
+              <a:ext cx="63193" cy="63193"/>
             </a:xfrm>
             <a:prstGeom prst="ellipse">
               <a:avLst/>
@@ -3366,7 +3362,7 @@
                 <a:alpha val="100000"/>
               </a:srgbClr>
             </a:solidFill>
-            <a:ln w="9000" cap="rnd">
+            <a:ln w="11454" cap="rnd">
               <a:solidFill>
                 <a:srgbClr val="00C08B">
                   <a:alpha val="100000"/>
@@ -3390,8 +3386,8 @@
           </p:nvSpPr>
           <p:spPr>
             <a:xfrm>
-              <a:off x="2653840" y="2145774"/>
-              <a:ext cx="49651" cy="49651"/>
+              <a:off x="2603665" y="2340526"/>
+              <a:ext cx="63193" cy="63193"/>
             </a:xfrm>
             <a:prstGeom prst="ellipse">
               <a:avLst/>
@@ -3401,7 +3397,7 @@
                 <a:alpha val="100000"/>
               </a:srgbClr>
             </a:solidFill>
-            <a:ln w="9000" cap="rnd">
+            <a:ln w="11454" cap="rnd">
               <a:solidFill>
                 <a:srgbClr val="00C08B">
                   <a:alpha val="100000"/>
@@ -3425,8 +3421,8 @@
           </p:nvSpPr>
           <p:spPr>
             <a:xfrm>
-              <a:off x="2688188" y="1949650"/>
-              <a:ext cx="49651" cy="49651"/>
+              <a:off x="2636479" y="2098125"/>
+              <a:ext cx="63193" cy="63193"/>
             </a:xfrm>
             <a:prstGeom prst="ellipse">
               <a:avLst/>
@@ -3436,7 +3432,7 @@
                 <a:alpha val="100000"/>
               </a:srgbClr>
             </a:solidFill>
-            <a:ln w="9000" cap="rnd">
+            <a:ln w="11454" cap="rnd">
               <a:solidFill>
                 <a:srgbClr val="00C08B">
                   <a:alpha val="100000"/>
@@ -3460,8 +3456,8 @@
           </p:nvSpPr>
           <p:spPr>
             <a:xfrm>
-              <a:off x="2722536" y="1705497"/>
-              <a:ext cx="49651" cy="49651"/>
+              <a:off x="2669294" y="1796364"/>
+              <a:ext cx="63193" cy="63193"/>
             </a:xfrm>
             <a:prstGeom prst="ellipse">
               <a:avLst/>
@@ -3471,7 +3467,7 @@
                 <a:alpha val="100000"/>
               </a:srgbClr>
             </a:solidFill>
-            <a:ln w="9000" cap="rnd">
+            <a:ln w="11454" cap="rnd">
               <a:solidFill>
                 <a:srgbClr val="00C08B">
                   <a:alpha val="100000"/>
@@ -3495,8 +3491,8 @@
           </p:nvSpPr>
           <p:spPr>
             <a:xfrm>
-              <a:off x="2756884" y="1477887"/>
-              <a:ext cx="49651" cy="49651"/>
+              <a:off x="2702108" y="1515049"/>
+              <a:ext cx="63193" cy="63193"/>
             </a:xfrm>
             <a:prstGeom prst="ellipse">
               <a:avLst/>
@@ -3506,7 +3502,7 @@
                 <a:alpha val="100000"/>
               </a:srgbClr>
             </a:solidFill>
-            <a:ln w="9000" cap="rnd">
+            <a:ln w="11454" cap="rnd">
               <a:solidFill>
                 <a:srgbClr val="00C08B">
                   <a:alpha val="100000"/>
@@ -3530,8 +3526,8 @@
           </p:nvSpPr>
           <p:spPr>
             <a:xfrm>
-              <a:off x="2791232" y="1332584"/>
-              <a:ext cx="49651" cy="49651"/>
+              <a:off x="2734922" y="1335460"/>
+              <a:ext cx="63193" cy="63193"/>
             </a:xfrm>
             <a:prstGeom prst="ellipse">
               <a:avLst/>
@@ -3541,7 +3537,7 @@
                 <a:alpha val="100000"/>
               </a:srgbClr>
             </a:solidFill>
-            <a:ln w="9000" cap="rnd">
+            <a:ln w="11454" cap="rnd">
               <a:solidFill>
                 <a:srgbClr val="00C08B">
                   <a:alpha val="100000"/>
@@ -3565,8 +3561,8 @@
           </p:nvSpPr>
           <p:spPr>
             <a:xfrm>
-              <a:off x="2825580" y="1302569"/>
-              <a:ext cx="49651" cy="49651"/>
+              <a:off x="2767737" y="1298364"/>
+              <a:ext cx="63193" cy="63193"/>
             </a:xfrm>
             <a:prstGeom prst="ellipse">
               <a:avLst/>
@@ -3576,7 +3572,7 @@
                 <a:alpha val="100000"/>
               </a:srgbClr>
             </a:solidFill>
-            <a:ln w="9000" cap="rnd">
+            <a:ln w="11454" cap="rnd">
               <a:solidFill>
                 <a:srgbClr val="00C08B">
                   <a:alpha val="100000"/>
@@ -3600,8 +3596,8 @@
           </p:nvSpPr>
           <p:spPr>
             <a:xfrm>
-              <a:off x="2859928" y="1389468"/>
-              <a:ext cx="49651" cy="49651"/>
+              <a:off x="2800551" y="1405766"/>
+              <a:ext cx="63193" cy="63193"/>
             </a:xfrm>
             <a:prstGeom prst="ellipse">
               <a:avLst/>
@@ -3611,7 +3607,7 @@
                 <a:alpha val="100000"/>
               </a:srgbClr>
             </a:solidFill>
-            <a:ln w="9000" cap="rnd">
+            <a:ln w="11454" cap="rnd">
               <a:solidFill>
                 <a:srgbClr val="00C08B">
                   <a:alpha val="100000"/>
@@ -3635,8 +3631,8 @@
           </p:nvSpPr>
           <p:spPr>
             <a:xfrm>
-              <a:off x="2894276" y="1550684"/>
-              <a:ext cx="49651" cy="49651"/>
+              <a:off x="2833365" y="1605022"/>
+              <a:ext cx="63193" cy="63193"/>
             </a:xfrm>
             <a:prstGeom prst="ellipse">
               <a:avLst/>
@@ -3646,7 +3642,7 @@
                 <a:alpha val="100000"/>
               </a:srgbClr>
             </a:solidFill>
-            <a:ln w="9000" cap="rnd">
+            <a:ln w="11454" cap="rnd">
               <a:solidFill>
                 <a:srgbClr val="00C08B">
                   <a:alpha val="100000"/>
@@ -3670,8 +3666,8 @@
           </p:nvSpPr>
           <p:spPr>
             <a:xfrm>
-              <a:off x="2928624" y="1721604"/>
-              <a:ext cx="49651" cy="49651"/>
+              <a:off x="2866180" y="1816271"/>
+              <a:ext cx="63193" cy="63193"/>
             </a:xfrm>
             <a:prstGeom prst="ellipse">
               <a:avLst/>
@@ -3681,7 +3677,7 @@
                 <a:alpha val="100000"/>
               </a:srgbClr>
             </a:solidFill>
-            <a:ln w="9000" cap="rnd">
+            <a:ln w="11454" cap="rnd">
               <a:solidFill>
                 <a:srgbClr val="00C08B">
                   <a:alpha val="100000"/>
@@ -3705,8 +3701,8 @@
           </p:nvSpPr>
           <p:spPr>
             <a:xfrm>
-              <a:off x="2962972" y="1867512"/>
-              <a:ext cx="49651" cy="49651"/>
+              <a:off x="2898994" y="1996608"/>
+              <a:ext cx="63193" cy="63193"/>
             </a:xfrm>
             <a:prstGeom prst="ellipse">
               <a:avLst/>
@@ -3716,7 +3712,7 @@
                 <a:alpha val="100000"/>
               </a:srgbClr>
             </a:solidFill>
-            <a:ln w="9000" cap="rnd">
+            <a:ln w="11454" cap="rnd">
               <a:solidFill>
                 <a:srgbClr val="00C08B">
                   <a:alpha val="100000"/>
@@ -3740,8 +3736,8 @@
           </p:nvSpPr>
           <p:spPr>
             <a:xfrm>
-              <a:off x="2997320" y="1985226"/>
-              <a:ext cx="49651" cy="49651"/>
+              <a:off x="2931808" y="2142096"/>
+              <a:ext cx="63193" cy="63193"/>
             </a:xfrm>
             <a:prstGeom prst="ellipse">
               <a:avLst/>
@@ -3751,7 +3747,7 @@
                 <a:alpha val="100000"/>
               </a:srgbClr>
             </a:solidFill>
-            <a:ln w="9000" cap="rnd">
+            <a:ln w="11454" cap="rnd">
               <a:solidFill>
                 <a:srgbClr val="00C08B">
                   <a:alpha val="100000"/>
@@ -3775,8 +3771,8 @@
           </p:nvSpPr>
           <p:spPr>
             <a:xfrm>
-              <a:off x="3237756" y="2346214"/>
-              <a:ext cx="49651" cy="49651"/>
+              <a:off x="3161508" y="2588261"/>
+              <a:ext cx="63193" cy="63193"/>
             </a:xfrm>
             <a:prstGeom prst="ellipse">
               <a:avLst/>
@@ -3786,7 +3782,7 @@
                 <a:alpha val="100000"/>
               </a:srgbClr>
             </a:solidFill>
-            <a:ln w="9000" cap="rnd">
+            <a:ln w="11454" cap="rnd">
               <a:solidFill>
                 <a:srgbClr val="00C08B">
                   <a:alpha val="100000"/>
@@ -3810,8 +3806,8 @@
           </p:nvSpPr>
           <p:spPr>
             <a:xfrm>
-              <a:off x="3272104" y="2359560"/>
-              <a:ext cx="49651" cy="49651"/>
+              <a:off x="3194323" y="2604755"/>
+              <a:ext cx="63193" cy="63193"/>
             </a:xfrm>
             <a:prstGeom prst="ellipse">
               <a:avLst/>
@@ -3821,7 +3817,7 @@
                 <a:alpha val="100000"/>
               </a:srgbClr>
             </a:solidFill>
-            <a:ln w="9000" cap="rnd">
+            <a:ln w="11454" cap="rnd">
               <a:solidFill>
                 <a:srgbClr val="00C08B">
                   <a:alpha val="100000"/>
@@ -3845,8 +3841,8 @@
           </p:nvSpPr>
           <p:spPr>
             <a:xfrm>
-              <a:off x="3478191" y="2399689"/>
-              <a:ext cx="49651" cy="49651"/>
+              <a:off x="3391209" y="2654354"/>
+              <a:ext cx="63193" cy="63193"/>
             </a:xfrm>
             <a:prstGeom prst="ellipse">
               <a:avLst/>
@@ -3856,7 +3852,7 @@
                 <a:alpha val="100000"/>
               </a:srgbClr>
             </a:solidFill>
-            <a:ln w="9000" cap="rnd">
+            <a:ln w="11454" cap="rnd">
               <a:solidFill>
                 <a:srgbClr val="00C08B">
                   <a:alpha val="100000"/>
@@ -3880,8 +3876,8 @@
           </p:nvSpPr>
           <p:spPr>
             <a:xfrm>
-              <a:off x="2550796" y="2437712"/>
-              <a:ext cx="49651" cy="49651"/>
+              <a:off x="2505222" y="2701348"/>
+              <a:ext cx="63193" cy="63193"/>
             </a:xfrm>
             <a:prstGeom prst="ellipse">
               <a:avLst/>
@@ -3891,7 +3887,7 @@
                 <a:alpha val="100000"/>
               </a:srgbClr>
             </a:solidFill>
-            <a:ln w="9000" cap="rnd">
+            <a:ln w="11454" cap="rnd">
               <a:solidFill>
                 <a:srgbClr val="7CAE00">
                   <a:alpha val="100000"/>
@@ -3915,8 +3911,8 @@
           </p:nvSpPr>
           <p:spPr>
             <a:xfrm>
-              <a:off x="2653840" y="2380155"/>
-              <a:ext cx="49651" cy="49651"/>
+              <a:off x="2603665" y="2630210"/>
+              <a:ext cx="63193" cy="63193"/>
             </a:xfrm>
             <a:prstGeom prst="ellipse">
               <a:avLst/>
@@ -3926,7 +3922,7 @@
                 <a:alpha val="100000"/>
               </a:srgbClr>
             </a:solidFill>
-            <a:ln w="9000" cap="rnd">
+            <a:ln w="11454" cap="rnd">
               <a:solidFill>
                 <a:srgbClr val="7CAE00">
                   <a:alpha val="100000"/>
@@ -3950,8 +3946,8 @@
           </p:nvSpPr>
           <p:spPr>
             <a:xfrm>
-              <a:off x="2688188" y="2337721"/>
-              <a:ext cx="49651" cy="49651"/>
+              <a:off x="2636479" y="2577763"/>
+              <a:ext cx="63193" cy="63193"/>
             </a:xfrm>
             <a:prstGeom prst="ellipse">
               <a:avLst/>
@@ -3961,7 +3957,7 @@
                 <a:alpha val="100000"/>
               </a:srgbClr>
             </a:solidFill>
-            <a:ln w="9000" cap="rnd">
+            <a:ln w="11454" cap="rnd">
               <a:solidFill>
                 <a:srgbClr val="7CAE00">
                   <a:alpha val="100000"/>
@@ -3985,8 +3981,8 @@
           </p:nvSpPr>
           <p:spPr>
             <a:xfrm>
-              <a:off x="2722536" y="2278195"/>
-              <a:ext cx="49651" cy="49651"/>
+              <a:off x="2669294" y="2504192"/>
+              <a:ext cx="63193" cy="63193"/>
             </a:xfrm>
             <a:prstGeom prst="ellipse">
               <a:avLst/>
@@ -3996,7 +3992,7 @@
                 <a:alpha val="100000"/>
               </a:srgbClr>
             </a:solidFill>
-            <a:ln w="9000" cap="rnd">
+            <a:ln w="11454" cap="rnd">
               <a:solidFill>
                 <a:srgbClr val="7CAE00">
                   <a:alpha val="100000"/>
@@ -4020,8 +4016,8 @@
           </p:nvSpPr>
           <p:spPr>
             <a:xfrm>
-              <a:off x="2756884" y="2200071"/>
-              <a:ext cx="49651" cy="49651"/>
+              <a:off x="2702108" y="2407635"/>
+              <a:ext cx="63193" cy="63193"/>
             </a:xfrm>
             <a:prstGeom prst="ellipse">
               <a:avLst/>
@@ -4031,7 +4027,7 @@
                 <a:alpha val="100000"/>
               </a:srgbClr>
             </a:solidFill>
-            <a:ln w="9000" cap="rnd">
+            <a:ln w="11454" cap="rnd">
               <a:solidFill>
                 <a:srgbClr val="7CAE00">
                   <a:alpha val="100000"/>
@@ -4055,8 +4051,8 @@
           </p:nvSpPr>
           <p:spPr>
             <a:xfrm>
-              <a:off x="2791232" y="2104474"/>
-              <a:ext cx="49651" cy="49651"/>
+              <a:off x="2734922" y="2289481"/>
+              <a:ext cx="63193" cy="63193"/>
             </a:xfrm>
             <a:prstGeom prst="ellipse">
               <a:avLst/>
@@ -4066,7 +4062,7 @@
                 <a:alpha val="100000"/>
               </a:srgbClr>
             </a:solidFill>
-            <a:ln w="9000" cap="rnd">
+            <a:ln w="11454" cap="rnd">
               <a:solidFill>
                 <a:srgbClr val="7CAE00">
                   <a:alpha val="100000"/>
@@ -4090,8 +4086,8 @@
           </p:nvSpPr>
           <p:spPr>
             <a:xfrm>
-              <a:off x="2825580" y="1996892"/>
-              <a:ext cx="49651" cy="49651"/>
+              <a:off x="2767737" y="2156515"/>
+              <a:ext cx="63193" cy="63193"/>
             </a:xfrm>
             <a:prstGeom prst="ellipse">
               <a:avLst/>
@@ -4101,7 +4097,7 @@
                 <a:alpha val="100000"/>
               </a:srgbClr>
             </a:solidFill>
-            <a:ln w="9000" cap="rnd">
+            <a:ln w="11454" cap="rnd">
               <a:solidFill>
                 <a:srgbClr val="7CAE00">
                   <a:alpha val="100000"/>
@@ -4125,8 +4121,8 @@
           </p:nvSpPr>
           <p:spPr>
             <a:xfrm>
-              <a:off x="2859928" y="1890214"/>
-              <a:ext cx="49651" cy="49651"/>
+              <a:off x="2800551" y="2024666"/>
+              <a:ext cx="63193" cy="63193"/>
             </a:xfrm>
             <a:prstGeom prst="ellipse">
               <a:avLst/>
@@ -4136,7 +4132,7 @@
                 <a:alpha val="100000"/>
               </a:srgbClr>
             </a:solidFill>
-            <a:ln w="9000" cap="rnd">
+            <a:ln w="11454" cap="rnd">
               <a:solidFill>
                 <a:srgbClr val="7CAE00">
                   <a:alpha val="100000"/>
@@ -4160,8 +4156,8 @@
           </p:nvSpPr>
           <p:spPr>
             <a:xfrm>
-              <a:off x="2894276" y="1813003"/>
-              <a:ext cx="49651" cy="49651"/>
+              <a:off x="2833365" y="1929237"/>
+              <a:ext cx="63193" cy="63193"/>
             </a:xfrm>
             <a:prstGeom prst="ellipse">
               <a:avLst/>
@@ -4171,7 +4167,7 @@
                 <a:alpha val="100000"/>
               </a:srgbClr>
             </a:solidFill>
-            <a:ln w="9000" cap="rnd">
+            <a:ln w="11454" cap="rnd">
               <a:solidFill>
                 <a:srgbClr val="7CAE00">
                   <a:alpha val="100000"/>
@@ -4195,8 +4191,8 @@
           </p:nvSpPr>
           <p:spPr>
             <a:xfrm>
-              <a:off x="2928624" y="1775912"/>
-              <a:ext cx="49651" cy="49651"/>
+              <a:off x="2866180" y="1883394"/>
+              <a:ext cx="63193" cy="63193"/>
             </a:xfrm>
             <a:prstGeom prst="ellipse">
               <a:avLst/>
@@ -4206,7 +4202,7 @@
                 <a:alpha val="100000"/>
               </a:srgbClr>
             </a:solidFill>
-            <a:ln w="9000" cap="rnd">
+            <a:ln w="11454" cap="rnd">
               <a:solidFill>
                 <a:srgbClr val="7CAE00">
                   <a:alpha val="100000"/>
@@ -4230,8 +4226,8 @@
           </p:nvSpPr>
           <p:spPr>
             <a:xfrm>
-              <a:off x="2962972" y="1776178"/>
-              <a:ext cx="49651" cy="49651"/>
+              <a:off x="2898994" y="1883722"/>
+              <a:ext cx="63193" cy="63193"/>
             </a:xfrm>
             <a:prstGeom prst="ellipse">
               <a:avLst/>
@@ -4241,7 +4237,7 @@
                 <a:alpha val="100000"/>
               </a:srgbClr>
             </a:solidFill>
-            <a:ln w="9000" cap="rnd">
+            <a:ln w="11454" cap="rnd">
               <a:solidFill>
                 <a:srgbClr val="7CAE00">
                   <a:alpha val="100000"/>
@@ -4265,8 +4261,8 @@
           </p:nvSpPr>
           <p:spPr>
             <a:xfrm>
-              <a:off x="2997320" y="1804584"/>
-              <a:ext cx="49651" cy="49651"/>
+              <a:off x="2931808" y="1918831"/>
+              <a:ext cx="63193" cy="63193"/>
             </a:xfrm>
             <a:prstGeom prst="ellipse">
               <a:avLst/>
@@ -4276,7 +4272,7 @@
                 <a:alpha val="100000"/>
               </a:srgbClr>
             </a:solidFill>
-            <a:ln w="9000" cap="rnd">
+            <a:ln w="11454" cap="rnd">
               <a:solidFill>
                 <a:srgbClr val="7CAE00">
                   <a:alpha val="100000"/>
@@ -4300,8 +4296,8 @@
           </p:nvSpPr>
           <p:spPr>
             <a:xfrm>
-              <a:off x="3031668" y="1848011"/>
-              <a:ext cx="49651" cy="49651"/>
+              <a:off x="2964622" y="1972505"/>
+              <a:ext cx="63193" cy="63193"/>
             </a:xfrm>
             <a:prstGeom prst="ellipse">
               <a:avLst/>
@@ -4311,7 +4307,7 @@
                 <a:alpha val="100000"/>
               </a:srgbClr>
             </a:solidFill>
-            <a:ln w="9000" cap="rnd">
+            <a:ln w="11454" cap="rnd">
               <a:solidFill>
                 <a:srgbClr val="7CAE00">
                   <a:alpha val="100000"/>
@@ -4335,8 +4331,8 @@
           </p:nvSpPr>
           <p:spPr>
             <a:xfrm>
-              <a:off x="3100364" y="1936523"/>
-              <a:ext cx="49651" cy="49651"/>
+              <a:off x="3030251" y="2081902"/>
+              <a:ext cx="63193" cy="63193"/>
             </a:xfrm>
             <a:prstGeom prst="ellipse">
               <a:avLst/>
@@ -4346,7 +4342,7 @@
                 <a:alpha val="100000"/>
               </a:srgbClr>
             </a:solidFill>
-            <a:ln w="9000" cap="rnd">
+            <a:ln w="11454" cap="rnd">
               <a:solidFill>
                 <a:srgbClr val="7CAE00">
                   <a:alpha val="100000"/>
@@ -4370,8 +4366,8 @@
           </p:nvSpPr>
           <p:spPr>
             <a:xfrm>
-              <a:off x="3169060" y="1997472"/>
-              <a:ext cx="49651" cy="49651"/>
+              <a:off x="3095880" y="2157231"/>
+              <a:ext cx="63193" cy="63193"/>
             </a:xfrm>
             <a:prstGeom prst="ellipse">
               <a:avLst/>
@@ -4381,7 +4377,7 @@
                 <a:alpha val="100000"/>
               </a:srgbClr>
             </a:solidFill>
-            <a:ln w="9000" cap="rnd">
+            <a:ln w="11454" cap="rnd">
               <a:solidFill>
                 <a:srgbClr val="7CAE00">
                   <a:alpha val="100000"/>
@@ -4405,8 +4401,8 @@
           </p:nvSpPr>
           <p:spPr>
             <a:xfrm>
-              <a:off x="3237756" y="2068257"/>
-              <a:ext cx="49651" cy="49651"/>
+              <a:off x="3161508" y="2244719"/>
+              <a:ext cx="63193" cy="63193"/>
             </a:xfrm>
             <a:prstGeom prst="ellipse">
               <a:avLst/>
@@ -4416,7 +4412,7 @@
                 <a:alpha val="100000"/>
               </a:srgbClr>
             </a:solidFill>
-            <a:ln w="9000" cap="rnd">
+            <a:ln w="11454" cap="rnd">
               <a:solidFill>
                 <a:srgbClr val="7CAE00">
                   <a:alpha val="100000"/>
@@ -4440,8 +4436,8 @@
           </p:nvSpPr>
           <p:spPr>
             <a:xfrm>
-              <a:off x="3272104" y="2116772"/>
-              <a:ext cx="49651" cy="49651"/>
+              <a:off x="3194323" y="2304681"/>
+              <a:ext cx="63193" cy="63193"/>
             </a:xfrm>
             <a:prstGeom prst="ellipse">
               <a:avLst/>
@@ -4451,7 +4447,7 @@
                 <a:alpha val="100000"/>
               </a:srgbClr>
             </a:solidFill>
-            <a:ln w="9000" cap="rnd">
+            <a:ln w="11454" cap="rnd">
               <a:solidFill>
                 <a:srgbClr val="7CAE00">
                   <a:alpha val="100000"/>
@@ -4475,8 +4471,8 @@
           </p:nvSpPr>
           <p:spPr>
             <a:xfrm>
-              <a:off x="3306452" y="2171764"/>
-              <a:ext cx="49651" cy="49651"/>
+              <a:off x="3227137" y="2372649"/>
+              <a:ext cx="63193" cy="63193"/>
             </a:xfrm>
             <a:prstGeom prst="ellipse">
               <a:avLst/>
@@ -4486,7 +4482,7 @@
                 <a:alpha val="100000"/>
               </a:srgbClr>
             </a:solidFill>
-            <a:ln w="9000" cap="rnd">
+            <a:ln w="11454" cap="rnd">
               <a:solidFill>
                 <a:srgbClr val="7CAE00">
                   <a:alpha val="100000"/>
@@ -4510,8 +4506,8 @@
           </p:nvSpPr>
           <p:spPr>
             <a:xfrm>
-              <a:off x="3340799" y="2227479"/>
-              <a:ext cx="49651" cy="49651"/>
+              <a:off x="3259951" y="2441510"/>
+              <a:ext cx="63193" cy="63193"/>
             </a:xfrm>
             <a:prstGeom prst="ellipse">
               <a:avLst/>
@@ -4521,7 +4517,7 @@
                 <a:alpha val="100000"/>
               </a:srgbClr>
             </a:solidFill>
-            <a:ln w="9000" cap="rnd">
+            <a:ln w="11454" cap="rnd">
               <a:solidFill>
                 <a:srgbClr val="7CAE00">
                   <a:alpha val="100000"/>
@@ -4545,8 +4541,8 @@
           </p:nvSpPr>
           <p:spPr>
             <a:xfrm>
-              <a:off x="3478191" y="2382703"/>
-              <a:ext cx="49651" cy="49651"/>
+              <a:off x="3391209" y="2633360"/>
+              <a:ext cx="63193" cy="63193"/>
             </a:xfrm>
             <a:prstGeom prst="ellipse">
               <a:avLst/>
@@ -4556,7 +4552,7 @@
                 <a:alpha val="100000"/>
               </a:srgbClr>
             </a:solidFill>
-            <a:ln w="9000" cap="rnd">
+            <a:ln w="11454" cap="rnd">
               <a:solidFill>
                 <a:srgbClr val="7CAE00">
                   <a:alpha val="100000"/>
@@ -4580,12 +4576,13 @@
           </p:nvSpPr>
           <p:spPr>
             <a:xfrm>
-              <a:off x="1648227" y="1315914"/>
-              <a:ext cx="1889138" cy="1171063"/>
+              <a:off x="1650832" y="1315770"/>
+              <a:ext cx="1804787" cy="1447380"/>
             </a:xfrm>
             <a:prstGeom prst="rect">
               <a:avLst/>
             </a:prstGeom>
+            <a:noFill/>
           </p:spPr>
           <p:txBody>
             <a:bodyPr/>
@@ -4601,17 +4598,13 @@
           </p:nvSpPr>
           <p:spPr>
             <a:xfrm>
-              <a:off x="1648227" y="2850534"/>
-              <a:ext cx="1889138" cy="1171063"/>
+              <a:off x="1650832" y="3126564"/>
+              <a:ext cx="1804787" cy="1447380"/>
             </a:xfrm>
             <a:prstGeom prst="rect">
               <a:avLst/>
             </a:prstGeom>
-            <a:solidFill>
-              <a:srgbClr val="FFFFFF">
-                <a:alpha val="100000"/>
-              </a:srgbClr>
-            </a:solidFill>
+            <a:noFill/>
           </p:spPr>
           <p:txBody>
             <a:bodyPr/>
@@ -4627,60 +4620,60 @@
           </p:nvSpPr>
           <p:spPr>
             <a:xfrm>
-              <a:off x="2335186" y="3408562"/>
-              <a:ext cx="1167830" cy="600457"/>
+              <a:off x="2307119" y="3816260"/>
+              <a:ext cx="1115686" cy="742138"/>
             </a:xfrm>
             <a:custGeom>
               <a:avLst/>
               <a:pathLst>
-                <a:path w="1167830" h="600457">
+                <a:path w="1115686" h="742138">
                   <a:moveTo>
-                    <a:pt x="0" y="594243"/>
+                    <a:pt x="0" y="734457"/>
                   </a:moveTo>
                   <a:lnTo>
-                    <a:pt x="206087" y="512615"/>
-                  </a:lnTo>
-                  <a:lnTo>
-                    <a:pt x="274783" y="413977"/>
-                  </a:lnTo>
-                  <a:lnTo>
-                    <a:pt x="309131" y="337511"/>
-                  </a:lnTo>
-                  <a:lnTo>
-                    <a:pt x="343479" y="247224"/>
-                  </a:lnTo>
-                  <a:lnTo>
-                    <a:pt x="377827" y="154976"/>
-                  </a:lnTo>
-                  <a:lnTo>
-                    <a:pt x="412175" y="74853"/>
-                  </a:lnTo>
-                  <a:lnTo>
-                    <a:pt x="446523" y="20267"/>
-                  </a:lnTo>
-                  <a:lnTo>
-                    <a:pt x="480871" y="0"/>
-                  </a:lnTo>
-                  <a:lnTo>
-                    <a:pt x="515219" y="14754"/>
-                  </a:lnTo>
-                  <a:lnTo>
-                    <a:pt x="549567" y="57348"/>
-                  </a:lnTo>
-                  <a:lnTo>
-                    <a:pt x="583915" y="118373"/>
-                  </a:lnTo>
-                  <a:lnTo>
-                    <a:pt x="652611" y="258656"/>
-                  </a:lnTo>
-                  <a:lnTo>
-                    <a:pt x="721307" y="375706"/>
-                  </a:lnTo>
-                  <a:lnTo>
-                    <a:pt x="824351" y="496553"/>
-                  </a:lnTo>
-                  <a:lnTo>
-                    <a:pt x="1167830" y="600457"/>
+                    <a:pt x="196885" y="633569"/>
+                  </a:lnTo>
+                  <a:lnTo>
+                    <a:pt x="262514" y="511657"/>
+                  </a:lnTo>
+                  <a:lnTo>
+                    <a:pt x="295328" y="417148"/>
+                  </a:lnTo>
+                  <a:lnTo>
+                    <a:pt x="328143" y="305558"/>
+                  </a:lnTo>
+                  <a:lnTo>
+                    <a:pt x="360957" y="191544"/>
+                  </a:lnTo>
+                  <a:lnTo>
+                    <a:pt x="393771" y="92515"/>
+                  </a:lnTo>
+                  <a:lnTo>
+                    <a:pt x="426586" y="25049"/>
+                  </a:lnTo>
+                  <a:lnTo>
+                    <a:pt x="459400" y="0"/>
+                  </a:lnTo>
+                  <a:lnTo>
+                    <a:pt x="492214" y="18235"/>
+                  </a:lnTo>
+                  <a:lnTo>
+                    <a:pt x="525029" y="70879"/>
+                  </a:lnTo>
+                  <a:lnTo>
+                    <a:pt x="557843" y="146304"/>
+                  </a:lnTo>
+                  <a:lnTo>
+                    <a:pt x="623471" y="319688"/>
+                  </a:lnTo>
+                  <a:lnTo>
+                    <a:pt x="689100" y="464355"/>
+                  </a:lnTo>
+                  <a:lnTo>
+                    <a:pt x="787543" y="613717"/>
+                  </a:lnTo>
+                  <a:lnTo>
+                    <a:pt x="1115686" y="742138"/>
                   </a:lnTo>
                 </a:path>
               </a:pathLst>
@@ -4709,69 +4702,69 @@
           </p:nvSpPr>
           <p:spPr>
             <a:xfrm>
-              <a:off x="2575622" y="3440004"/>
-              <a:ext cx="927395" cy="546489"/>
+              <a:off x="2536819" y="3855122"/>
+              <a:ext cx="885986" cy="675435"/>
             </a:xfrm>
             <a:custGeom>
               <a:avLst/>
               <a:pathLst>
-                <a:path w="927395" h="546489">
+                <a:path w="885986" h="675435">
                   <a:moveTo>
-                    <a:pt x="0" y="546489"/>
+                    <a:pt x="0" y="675435"/>
                   </a:moveTo>
                   <a:lnTo>
-                    <a:pt x="34347" y="527766"/>
-                  </a:lnTo>
-                  <a:lnTo>
-                    <a:pt x="68695" y="498099"/>
-                  </a:lnTo>
-                  <a:lnTo>
-                    <a:pt x="103043" y="454393"/>
-                  </a:lnTo>
-                  <a:lnTo>
-                    <a:pt x="137391" y="394792"/>
-                  </a:lnTo>
-                  <a:lnTo>
-                    <a:pt x="206087" y="232311"/>
-                  </a:lnTo>
-                  <a:lnTo>
-                    <a:pt x="240435" y="140349"/>
-                  </a:lnTo>
-                  <a:lnTo>
-                    <a:pt x="274783" y="58815"/>
-                  </a:lnTo>
-                  <a:lnTo>
-                    <a:pt x="309131" y="9360"/>
-                  </a:lnTo>
-                  <a:lnTo>
-                    <a:pt x="343479" y="0"/>
-                  </a:lnTo>
-                  <a:lnTo>
-                    <a:pt x="377827" y="21213"/>
-                  </a:lnTo>
-                  <a:lnTo>
-                    <a:pt x="412175" y="62294"/>
-                  </a:lnTo>
-                  <a:lnTo>
-                    <a:pt x="446523" y="109494"/>
-                  </a:lnTo>
-                  <a:lnTo>
-                    <a:pt x="480871" y="154474"/>
-                  </a:lnTo>
-                  <a:lnTo>
-                    <a:pt x="549567" y="228319"/>
-                  </a:lnTo>
-                  <a:lnTo>
-                    <a:pt x="618263" y="286786"/>
-                  </a:lnTo>
-                  <a:lnTo>
-                    <a:pt x="721307" y="386593"/>
-                  </a:lnTo>
-                  <a:lnTo>
-                    <a:pt x="755655" y="419683"/>
-                  </a:lnTo>
-                  <a:lnTo>
-                    <a:pt x="927395" y="534078"/>
+                    <a:pt x="32814" y="652295"/>
+                  </a:lnTo>
+                  <a:lnTo>
+                    <a:pt x="65628" y="615627"/>
+                  </a:lnTo>
+                  <a:lnTo>
+                    <a:pt x="98442" y="561609"/>
+                  </a:lnTo>
+                  <a:lnTo>
+                    <a:pt x="131257" y="487946"/>
+                  </a:lnTo>
+                  <a:lnTo>
+                    <a:pt x="196885" y="287126"/>
+                  </a:lnTo>
+                  <a:lnTo>
+                    <a:pt x="229700" y="173465"/>
+                  </a:lnTo>
+                  <a:lnTo>
+                    <a:pt x="262514" y="72693"/>
+                  </a:lnTo>
+                  <a:lnTo>
+                    <a:pt x="295328" y="11569"/>
+                  </a:lnTo>
+                  <a:lnTo>
+                    <a:pt x="328143" y="0"/>
+                  </a:lnTo>
+                  <a:lnTo>
+                    <a:pt x="360957" y="26218"/>
+                  </a:lnTo>
+                  <a:lnTo>
+                    <a:pt x="393771" y="76993"/>
+                  </a:lnTo>
+                  <a:lnTo>
+                    <a:pt x="426586" y="135330"/>
+                  </a:lnTo>
+                  <a:lnTo>
+                    <a:pt x="459400" y="190923"/>
+                  </a:lnTo>
+                  <a:lnTo>
+                    <a:pt x="525029" y="282192"/>
+                  </a:lnTo>
+                  <a:lnTo>
+                    <a:pt x="590657" y="354455"/>
+                  </a:lnTo>
+                  <a:lnTo>
+                    <a:pt x="689100" y="477812"/>
+                  </a:lnTo>
+                  <a:lnTo>
+                    <a:pt x="721914" y="518710"/>
+                  </a:lnTo>
+                  <a:lnTo>
+                    <a:pt x="885986" y="660096"/>
                   </a:lnTo>
                 </a:path>
               </a:pathLst>
@@ -4800,63 +4793,63 @@
           </p:nvSpPr>
           <p:spPr>
             <a:xfrm>
-              <a:off x="2403882" y="3217383"/>
-              <a:ext cx="1099135" cy="784696"/>
+              <a:off x="2372747" y="3579972"/>
+              <a:ext cx="1050058" cy="969848"/>
             </a:xfrm>
             <a:custGeom>
               <a:avLst/>
               <a:pathLst>
-                <a:path w="1099135" h="784696">
+                <a:path w="1050058" h="969848">
                   <a:moveTo>
-                    <a:pt x="0" y="774374"/>
+                    <a:pt x="0" y="957091"/>
                   </a:moveTo>
                   <a:lnTo>
-                    <a:pt x="68695" y="742371"/>
-                  </a:lnTo>
-                  <a:lnTo>
-                    <a:pt x="137391" y="674097"/>
-                  </a:lnTo>
-                  <a:lnTo>
-                    <a:pt x="171739" y="621045"/>
-                  </a:lnTo>
-                  <a:lnTo>
-                    <a:pt x="206087" y="554248"/>
-                  </a:lnTo>
-                  <a:lnTo>
-                    <a:pt x="274783" y="376576"/>
-                  </a:lnTo>
-                  <a:lnTo>
-                    <a:pt x="309131" y="266163"/>
-                  </a:lnTo>
-                  <a:lnTo>
-                    <a:pt x="343479" y="151535"/>
-                  </a:lnTo>
-                  <a:lnTo>
-                    <a:pt x="377827" y="53546"/>
-                  </a:lnTo>
-                  <a:lnTo>
-                    <a:pt x="412175" y="0"/>
-                  </a:lnTo>
-                  <a:lnTo>
-                    <a:pt x="446523" y="6777"/>
-                  </a:lnTo>
-                  <a:lnTo>
-                    <a:pt x="480871" y="63461"/>
-                  </a:lnTo>
-                  <a:lnTo>
-                    <a:pt x="515219" y="147781"/>
-                  </a:lnTo>
-                  <a:lnTo>
-                    <a:pt x="549567" y="240900"/>
-                  </a:lnTo>
-                  <a:lnTo>
-                    <a:pt x="583915" y="329944"/>
-                  </a:lnTo>
-                  <a:lnTo>
-                    <a:pt x="996091" y="769658"/>
-                  </a:lnTo>
-                  <a:lnTo>
-                    <a:pt x="1099135" y="784696"/>
+                    <a:pt x="65628" y="917537"/>
+                  </a:lnTo>
+                  <a:lnTo>
+                    <a:pt x="131257" y="833153"/>
+                  </a:lnTo>
+                  <a:lnTo>
+                    <a:pt x="164071" y="767584"/>
+                  </a:lnTo>
+                  <a:lnTo>
+                    <a:pt x="196885" y="685025"/>
+                  </a:lnTo>
+                  <a:lnTo>
+                    <a:pt x="262514" y="465431"/>
+                  </a:lnTo>
+                  <a:lnTo>
+                    <a:pt x="295328" y="328965"/>
+                  </a:lnTo>
+                  <a:lnTo>
+                    <a:pt x="328143" y="187290"/>
+                  </a:lnTo>
+                  <a:lnTo>
+                    <a:pt x="360957" y="66181"/>
+                  </a:lnTo>
+                  <a:lnTo>
+                    <a:pt x="393771" y="0"/>
+                  </a:lnTo>
+                  <a:lnTo>
+                    <a:pt x="426586" y="8377"/>
+                  </a:lnTo>
+                  <a:lnTo>
+                    <a:pt x="459400" y="78435"/>
+                  </a:lnTo>
+                  <a:lnTo>
+                    <a:pt x="492214" y="182650"/>
+                  </a:lnTo>
+                  <a:lnTo>
+                    <a:pt x="525029" y="297742"/>
+                  </a:lnTo>
+                  <a:lnTo>
+                    <a:pt x="557843" y="407795"/>
+                  </a:lnTo>
+                  <a:lnTo>
+                    <a:pt x="951615" y="951262"/>
+                  </a:lnTo>
+                  <a:lnTo>
+                    <a:pt x="1050058" y="969848"/>
                   </a:lnTo>
                 </a:path>
               </a:pathLst>
@@ -4885,8 +4878,8 @@
           </p:nvSpPr>
           <p:spPr>
             <a:xfrm>
-              <a:off x="2310360" y="3977979"/>
-              <a:ext cx="49651" cy="49651"/>
+              <a:off x="2275522" y="4519121"/>
+              <a:ext cx="63193" cy="63193"/>
             </a:xfrm>
             <a:prstGeom prst="ellipse">
               <a:avLst/>
@@ -4896,7 +4889,7 @@
                 <a:alpha val="100000"/>
               </a:srgbClr>
             </a:solidFill>
-            <a:ln w="9000" cap="rnd">
+            <a:ln w="11454" cap="rnd">
               <a:solidFill>
                 <a:srgbClr val="B79F00">
                   <a:alpha val="100000"/>
@@ -4920,8 +4913,8 @@
           </p:nvSpPr>
           <p:spPr>
             <a:xfrm>
-              <a:off x="2516448" y="3896351"/>
-              <a:ext cx="49651" cy="49651"/>
+              <a:off x="2472408" y="4418233"/>
+              <a:ext cx="63193" cy="63193"/>
             </a:xfrm>
             <a:prstGeom prst="ellipse">
               <a:avLst/>
@@ -4931,7 +4924,7 @@
                 <a:alpha val="100000"/>
               </a:srgbClr>
             </a:solidFill>
-            <a:ln w="9000" cap="rnd">
+            <a:ln w="11454" cap="rnd">
               <a:solidFill>
                 <a:srgbClr val="B79F00">
                   <a:alpha val="100000"/>
@@ -4955,8 +4948,8 @@
           </p:nvSpPr>
           <p:spPr>
             <a:xfrm>
-              <a:off x="2585144" y="3797713"/>
-              <a:ext cx="49651" cy="49651"/>
+              <a:off x="2538036" y="4296320"/>
+              <a:ext cx="63193" cy="63193"/>
             </a:xfrm>
             <a:prstGeom prst="ellipse">
               <a:avLst/>
@@ -4966,7 +4959,7 @@
                 <a:alpha val="100000"/>
               </a:srgbClr>
             </a:solidFill>
-            <a:ln w="9000" cap="rnd">
+            <a:ln w="11454" cap="rnd">
               <a:solidFill>
                 <a:srgbClr val="B79F00">
                   <a:alpha val="100000"/>
@@ -4990,8 +4983,8 @@
           </p:nvSpPr>
           <p:spPr>
             <a:xfrm>
-              <a:off x="2619492" y="3721247"/>
-              <a:ext cx="49651" cy="49651"/>
+              <a:off x="2570851" y="4201812"/>
+              <a:ext cx="63193" cy="63193"/>
             </a:xfrm>
             <a:prstGeom prst="ellipse">
               <a:avLst/>
@@ -5001,7 +4994,7 @@
                 <a:alpha val="100000"/>
               </a:srgbClr>
             </a:solidFill>
-            <a:ln w="9000" cap="rnd">
+            <a:ln w="11454" cap="rnd">
               <a:solidFill>
                 <a:srgbClr val="B79F00">
                   <a:alpha val="100000"/>
@@ -5025,8 +5018,8 @@
           </p:nvSpPr>
           <p:spPr>
             <a:xfrm>
-              <a:off x="2653840" y="3630960"/>
-              <a:ext cx="49651" cy="49651"/>
+              <a:off x="2603665" y="4090221"/>
+              <a:ext cx="63193" cy="63193"/>
             </a:xfrm>
             <a:prstGeom prst="ellipse">
               <a:avLst/>
@@ -5036,7 +5029,7 @@
                 <a:alpha val="100000"/>
               </a:srgbClr>
             </a:solidFill>
-            <a:ln w="9000" cap="rnd">
+            <a:ln w="11454" cap="rnd">
               <a:solidFill>
                 <a:srgbClr val="B79F00">
                   <a:alpha val="100000"/>
@@ -5060,8 +5053,8 @@
           </p:nvSpPr>
           <p:spPr>
             <a:xfrm>
-              <a:off x="2688188" y="3538712"/>
-              <a:ext cx="49651" cy="49651"/>
+              <a:off x="2636479" y="3976208"/>
+              <a:ext cx="63193" cy="63193"/>
             </a:xfrm>
             <a:prstGeom prst="ellipse">
               <a:avLst/>
@@ -5071,7 +5064,7 @@
                 <a:alpha val="100000"/>
               </a:srgbClr>
             </a:solidFill>
-            <a:ln w="9000" cap="rnd">
+            <a:ln w="11454" cap="rnd">
               <a:solidFill>
                 <a:srgbClr val="B79F00">
                   <a:alpha val="100000"/>
@@ -5095,8 +5088,8 @@
           </p:nvSpPr>
           <p:spPr>
             <a:xfrm>
-              <a:off x="2722536" y="3458589"/>
-              <a:ext cx="49651" cy="49651"/>
+              <a:off x="2669294" y="3877179"/>
+              <a:ext cx="63193" cy="63193"/>
             </a:xfrm>
             <a:prstGeom prst="ellipse">
               <a:avLst/>
@@ -5106,7 +5099,7 @@
                 <a:alpha val="100000"/>
               </a:srgbClr>
             </a:solidFill>
-            <a:ln w="9000" cap="rnd">
+            <a:ln w="11454" cap="rnd">
               <a:solidFill>
                 <a:srgbClr val="B79F00">
                   <a:alpha val="100000"/>
@@ -5130,8 +5123,8 @@
           </p:nvSpPr>
           <p:spPr>
             <a:xfrm>
-              <a:off x="2756884" y="3404003"/>
-              <a:ext cx="49651" cy="49651"/>
+              <a:off x="2702108" y="3809713"/>
+              <a:ext cx="63193" cy="63193"/>
             </a:xfrm>
             <a:prstGeom prst="ellipse">
               <a:avLst/>
@@ -5141,7 +5134,7 @@
                 <a:alpha val="100000"/>
               </a:srgbClr>
             </a:solidFill>
-            <a:ln w="9000" cap="rnd">
+            <a:ln w="11454" cap="rnd">
               <a:solidFill>
                 <a:srgbClr val="B79F00">
                   <a:alpha val="100000"/>
@@ -5165,8 +5158,8 @@
           </p:nvSpPr>
           <p:spPr>
             <a:xfrm>
-              <a:off x="2791232" y="3383736"/>
-              <a:ext cx="49651" cy="49651"/>
+              <a:off x="2734922" y="3784663"/>
+              <a:ext cx="63193" cy="63193"/>
             </a:xfrm>
             <a:prstGeom prst="ellipse">
               <a:avLst/>
@@ -5176,7 +5169,7 @@
                 <a:alpha val="100000"/>
               </a:srgbClr>
             </a:solidFill>
-            <a:ln w="9000" cap="rnd">
+            <a:ln w="11454" cap="rnd">
               <a:solidFill>
                 <a:srgbClr val="B79F00">
                   <a:alpha val="100000"/>
@@ -5200,8 +5193,8 @@
           </p:nvSpPr>
           <p:spPr>
             <a:xfrm>
-              <a:off x="2825580" y="3398490"/>
-              <a:ext cx="49651" cy="49651"/>
+              <a:off x="2767737" y="3802899"/>
+              <a:ext cx="63193" cy="63193"/>
             </a:xfrm>
             <a:prstGeom prst="ellipse">
               <a:avLst/>
@@ -5211,7 +5204,7 @@
                 <a:alpha val="100000"/>
               </a:srgbClr>
             </a:solidFill>
-            <a:ln w="9000" cap="rnd">
+            <a:ln w="11454" cap="rnd">
               <a:solidFill>
                 <a:srgbClr val="B79F00">
                   <a:alpha val="100000"/>
@@ -5235,8 +5228,8 @@
           </p:nvSpPr>
           <p:spPr>
             <a:xfrm>
-              <a:off x="2859928" y="3441084"/>
-              <a:ext cx="49651" cy="49651"/>
+              <a:off x="2800551" y="3855543"/>
+              <a:ext cx="63193" cy="63193"/>
             </a:xfrm>
             <a:prstGeom prst="ellipse">
               <a:avLst/>
@@ -5246,7 +5239,7 @@
                 <a:alpha val="100000"/>
               </a:srgbClr>
             </a:solidFill>
-            <a:ln w="9000" cap="rnd">
+            <a:ln w="11454" cap="rnd">
               <a:solidFill>
                 <a:srgbClr val="B79F00">
                   <a:alpha val="100000"/>
@@ -5270,8 +5263,8 @@
           </p:nvSpPr>
           <p:spPr>
             <a:xfrm>
-              <a:off x="2894276" y="3502109"/>
-              <a:ext cx="49651" cy="49651"/>
+              <a:off x="2833365" y="3930968"/>
+              <a:ext cx="63193" cy="63193"/>
             </a:xfrm>
             <a:prstGeom prst="ellipse">
               <a:avLst/>
@@ -5281,7 +5274,7 @@
                 <a:alpha val="100000"/>
               </a:srgbClr>
             </a:solidFill>
-            <a:ln w="9000" cap="rnd">
+            <a:ln w="11454" cap="rnd">
               <a:solidFill>
                 <a:srgbClr val="B79F00">
                   <a:alpha val="100000"/>
@@ -5305,8 +5298,8 @@
           </p:nvSpPr>
           <p:spPr>
             <a:xfrm>
-              <a:off x="2962972" y="3642393"/>
-              <a:ext cx="49651" cy="49651"/>
+              <a:off x="2898994" y="4104352"/>
+              <a:ext cx="63193" cy="63193"/>
             </a:xfrm>
             <a:prstGeom prst="ellipse">
               <a:avLst/>
@@ -5316,7 +5309,7 @@
                 <a:alpha val="100000"/>
               </a:srgbClr>
             </a:solidFill>
-            <a:ln w="9000" cap="rnd">
+            <a:ln w="11454" cap="rnd">
               <a:solidFill>
                 <a:srgbClr val="B79F00">
                   <a:alpha val="100000"/>
@@ -5340,8 +5333,8 @@
           </p:nvSpPr>
           <p:spPr>
             <a:xfrm>
-              <a:off x="3031668" y="3759442"/>
-              <a:ext cx="49651" cy="49651"/>
+              <a:off x="2964622" y="4249019"/>
+              <a:ext cx="63193" cy="63193"/>
             </a:xfrm>
             <a:prstGeom prst="ellipse">
               <a:avLst/>
@@ -5351,7 +5344,7 @@
                 <a:alpha val="100000"/>
               </a:srgbClr>
             </a:solidFill>
-            <a:ln w="9000" cap="rnd">
+            <a:ln w="11454" cap="rnd">
               <a:solidFill>
                 <a:srgbClr val="B79F00">
                   <a:alpha val="100000"/>
@@ -5375,8 +5368,8 @@
           </p:nvSpPr>
           <p:spPr>
             <a:xfrm>
-              <a:off x="3134712" y="3880289"/>
-              <a:ext cx="49651" cy="49651"/>
+              <a:off x="3063065" y="4398381"/>
+              <a:ext cx="63193" cy="63193"/>
             </a:xfrm>
             <a:prstGeom prst="ellipse">
               <a:avLst/>
@@ -5386,7 +5379,7 @@
                 <a:alpha val="100000"/>
               </a:srgbClr>
             </a:solidFill>
-            <a:ln w="9000" cap="rnd">
+            <a:ln w="11454" cap="rnd">
               <a:solidFill>
                 <a:srgbClr val="B79F00">
                   <a:alpha val="100000"/>
@@ -5410,8 +5403,8 @@
           </p:nvSpPr>
           <p:spPr>
             <a:xfrm>
-              <a:off x="3478191" y="3984193"/>
-              <a:ext cx="49651" cy="49651"/>
+              <a:off x="3391209" y="4526802"/>
+              <a:ext cx="63193" cy="63193"/>
             </a:xfrm>
             <a:prstGeom prst="ellipse">
               <a:avLst/>
@@ -5421,7 +5414,7 @@
                 <a:alpha val="100000"/>
               </a:srgbClr>
             </a:solidFill>
-            <a:ln w="9000" cap="rnd">
+            <a:ln w="11454" cap="rnd">
               <a:solidFill>
                 <a:srgbClr val="B79F00">
                   <a:alpha val="100000"/>
@@ -5445,8 +5438,8 @@
           </p:nvSpPr>
           <p:spPr>
             <a:xfrm>
-              <a:off x="2379056" y="3966931"/>
-              <a:ext cx="49651" cy="49651"/>
+              <a:off x="2341150" y="4505467"/>
+              <a:ext cx="63193" cy="63193"/>
             </a:xfrm>
             <a:prstGeom prst="ellipse">
               <a:avLst/>
@@ -5456,7 +5449,7 @@
                 <a:alpha val="100000"/>
               </a:srgbClr>
             </a:solidFill>
-            <a:ln w="9000" cap="rnd">
+            <a:ln w="11454" cap="rnd">
               <a:solidFill>
                 <a:srgbClr val="00BFC4">
                   <a:alpha val="100000"/>
@@ -5480,8 +5473,8 @@
           </p:nvSpPr>
           <p:spPr>
             <a:xfrm>
-              <a:off x="2447752" y="3934929"/>
-              <a:ext cx="49651" cy="49651"/>
+              <a:off x="2406779" y="4465913"/>
+              <a:ext cx="63193" cy="63193"/>
             </a:xfrm>
             <a:prstGeom prst="ellipse">
               <a:avLst/>
@@ -5491,7 +5484,7 @@
                 <a:alpha val="100000"/>
               </a:srgbClr>
             </a:solidFill>
-            <a:ln w="9000" cap="rnd">
+            <a:ln w="11454" cap="rnd">
               <a:solidFill>
                 <a:srgbClr val="00BFC4">
                   <a:alpha val="100000"/>
@@ -5515,8 +5508,8 @@
           </p:nvSpPr>
           <p:spPr>
             <a:xfrm>
-              <a:off x="2516448" y="3866654"/>
-              <a:ext cx="49651" cy="49651"/>
+              <a:off x="2472408" y="4381529"/>
+              <a:ext cx="63193" cy="63193"/>
             </a:xfrm>
             <a:prstGeom prst="ellipse">
               <a:avLst/>
@@ -5526,7 +5519,7 @@
                 <a:alpha val="100000"/>
               </a:srgbClr>
             </a:solidFill>
-            <a:ln w="9000" cap="rnd">
+            <a:ln w="11454" cap="rnd">
               <a:solidFill>
                 <a:srgbClr val="00BFC4">
                   <a:alpha val="100000"/>
@@ -5550,8 +5543,8 @@
           </p:nvSpPr>
           <p:spPr>
             <a:xfrm>
-              <a:off x="2550796" y="3813603"/>
-              <a:ext cx="49651" cy="49651"/>
+              <a:off x="2505222" y="4315960"/>
+              <a:ext cx="63193" cy="63193"/>
             </a:xfrm>
             <a:prstGeom prst="ellipse">
               <a:avLst/>
@@ -5561,7 +5554,7 @@
                 <a:alpha val="100000"/>
               </a:srgbClr>
             </a:solidFill>
-            <a:ln w="9000" cap="rnd">
+            <a:ln w="11454" cap="rnd">
               <a:solidFill>
                 <a:srgbClr val="00BFC4">
                   <a:alpha val="100000"/>
@@ -5585,8 +5578,8 @@
           </p:nvSpPr>
           <p:spPr>
             <a:xfrm>
-              <a:off x="2585144" y="3746805"/>
-              <a:ext cx="49651" cy="49651"/>
+              <a:off x="2538036" y="4233401"/>
+              <a:ext cx="63193" cy="63193"/>
             </a:xfrm>
             <a:prstGeom prst="ellipse">
               <a:avLst/>
@@ -5596,7 +5589,7 @@
                 <a:alpha val="100000"/>
               </a:srgbClr>
             </a:solidFill>
-            <a:ln w="9000" cap="rnd">
+            <a:ln w="11454" cap="rnd">
               <a:solidFill>
                 <a:srgbClr val="00BFC4">
                   <a:alpha val="100000"/>
@@ -5620,8 +5613,8 @@
           </p:nvSpPr>
           <p:spPr>
             <a:xfrm>
-              <a:off x="2653840" y="3569134"/>
-              <a:ext cx="49651" cy="49651"/>
+              <a:off x="2603665" y="4013807"/>
+              <a:ext cx="63193" cy="63193"/>
             </a:xfrm>
             <a:prstGeom prst="ellipse">
               <a:avLst/>
@@ -5631,7 +5624,7 @@
                 <a:alpha val="100000"/>
               </a:srgbClr>
             </a:solidFill>
-            <a:ln w="9000" cap="rnd">
+            <a:ln w="11454" cap="rnd">
               <a:solidFill>
                 <a:srgbClr val="00BFC4">
                   <a:alpha val="100000"/>
@@ -5655,8 +5648,8 @@
           </p:nvSpPr>
           <p:spPr>
             <a:xfrm>
-              <a:off x="2688188" y="3458720"/>
-              <a:ext cx="49651" cy="49651"/>
+              <a:off x="2636479" y="3877341"/>
+              <a:ext cx="63193" cy="63193"/>
             </a:xfrm>
             <a:prstGeom prst="ellipse">
               <a:avLst/>
@@ -5666,7 +5659,7 @@
                 <a:alpha val="100000"/>
               </a:srgbClr>
             </a:solidFill>
-            <a:ln w="9000" cap="rnd">
+            <a:ln w="11454" cap="rnd">
               <a:solidFill>
                 <a:srgbClr val="00BFC4">
                   <a:alpha val="100000"/>
@@ -5690,8 +5683,8 @@
           </p:nvSpPr>
           <p:spPr>
             <a:xfrm>
-              <a:off x="2722536" y="3344092"/>
-              <a:ext cx="49651" cy="49651"/>
+              <a:off x="2669294" y="3735666"/>
+              <a:ext cx="63193" cy="63193"/>
             </a:xfrm>
             <a:prstGeom prst="ellipse">
               <a:avLst/>
@@ -5701,7 +5694,7 @@
                 <a:alpha val="100000"/>
               </a:srgbClr>
             </a:solidFill>
-            <a:ln w="9000" cap="rnd">
+            <a:ln w="11454" cap="rnd">
               <a:solidFill>
                 <a:srgbClr val="00BFC4">
                   <a:alpha val="100000"/>
@@ -5725,8 +5718,8 @@
           </p:nvSpPr>
           <p:spPr>
             <a:xfrm>
-              <a:off x="2756884" y="3246104"/>
-              <a:ext cx="49651" cy="49651"/>
+              <a:off x="2702108" y="3614557"/>
+              <a:ext cx="63193" cy="63193"/>
             </a:xfrm>
             <a:prstGeom prst="ellipse">
               <a:avLst/>
@@ -5736,7 +5729,7 @@
                 <a:alpha val="100000"/>
               </a:srgbClr>
             </a:solidFill>
-            <a:ln w="9000" cap="rnd">
+            <a:ln w="11454" cap="rnd">
               <a:solidFill>
                 <a:srgbClr val="00BFC4">
                   <a:alpha val="100000"/>
@@ -5760,8 +5753,8 @@
           </p:nvSpPr>
           <p:spPr>
             <a:xfrm>
-              <a:off x="2791232" y="3192557"/>
-              <a:ext cx="49651" cy="49651"/>
+              <a:off x="2734922" y="3548375"/>
+              <a:ext cx="63193" cy="63193"/>
             </a:xfrm>
             <a:prstGeom prst="ellipse">
               <a:avLst/>
@@ -5771,7 +5764,7 @@
                 <a:alpha val="100000"/>
               </a:srgbClr>
             </a:solidFill>
-            <a:ln w="9000" cap="rnd">
+            <a:ln w="11454" cap="rnd">
               <a:solidFill>
                 <a:srgbClr val="00BFC4">
                   <a:alpha val="100000"/>
@@ -5795,8 +5788,8 @@
           </p:nvSpPr>
           <p:spPr>
             <a:xfrm>
-              <a:off x="2825580" y="3199335"/>
-              <a:ext cx="49651" cy="49651"/>
+              <a:off x="2767737" y="3556753"/>
+              <a:ext cx="63193" cy="63193"/>
             </a:xfrm>
             <a:prstGeom prst="ellipse">
               <a:avLst/>
@@ -5806,7 +5799,7 @@
                 <a:alpha val="100000"/>
               </a:srgbClr>
             </a:solidFill>
-            <a:ln w="9000" cap="rnd">
+            <a:ln w="11454" cap="rnd">
               <a:solidFill>
                 <a:srgbClr val="00BFC4">
                   <a:alpha val="100000"/>
@@ -5830,8 +5823,8 @@
           </p:nvSpPr>
           <p:spPr>
             <a:xfrm>
-              <a:off x="2859928" y="3256019"/>
-              <a:ext cx="49651" cy="49651"/>
+              <a:off x="2800551" y="3626811"/>
+              <a:ext cx="63193" cy="63193"/>
             </a:xfrm>
             <a:prstGeom prst="ellipse">
               <a:avLst/>
@@ -5841,7 +5834,7 @@
                 <a:alpha val="100000"/>
               </a:srgbClr>
             </a:solidFill>
-            <a:ln w="9000" cap="rnd">
+            <a:ln w="11454" cap="rnd">
               <a:solidFill>
                 <a:srgbClr val="00BFC4">
                   <a:alpha val="100000"/>
@@ -5865,8 +5858,8 @@
           </p:nvSpPr>
           <p:spPr>
             <a:xfrm>
-              <a:off x="2894276" y="3340338"/>
-              <a:ext cx="49651" cy="49651"/>
+              <a:off x="2833365" y="3731026"/>
+              <a:ext cx="63193" cy="63193"/>
             </a:xfrm>
             <a:prstGeom prst="ellipse">
               <a:avLst/>
@@ -5876,7 +5869,7 @@
                 <a:alpha val="100000"/>
               </a:srgbClr>
             </a:solidFill>
-            <a:ln w="9000" cap="rnd">
+            <a:ln w="11454" cap="rnd">
               <a:solidFill>
                 <a:srgbClr val="00BFC4">
                   <a:alpha val="100000"/>
@@ -5900,8 +5893,8 @@
           </p:nvSpPr>
           <p:spPr>
             <a:xfrm>
-              <a:off x="2928624" y="3433458"/>
-              <a:ext cx="49651" cy="49651"/>
+              <a:off x="2866180" y="3846118"/>
+              <a:ext cx="63193" cy="63193"/>
             </a:xfrm>
             <a:prstGeom prst="ellipse">
               <a:avLst/>
@@ -5911,7 +5904,7 @@
                 <a:alpha val="100000"/>
               </a:srgbClr>
             </a:solidFill>
-            <a:ln w="9000" cap="rnd">
+            <a:ln w="11454" cap="rnd">
               <a:solidFill>
                 <a:srgbClr val="00BFC4">
                   <a:alpha val="100000"/>
@@ -5935,8 +5928,8 @@
           </p:nvSpPr>
           <p:spPr>
             <a:xfrm>
-              <a:off x="2962972" y="3522501"/>
-              <a:ext cx="49651" cy="49651"/>
+              <a:off x="2898994" y="3956171"/>
+              <a:ext cx="63193" cy="63193"/>
             </a:xfrm>
             <a:prstGeom prst="ellipse">
               <a:avLst/>
@@ -5946,7 +5939,7 @@
                 <a:alpha val="100000"/>
               </a:srgbClr>
             </a:solidFill>
-            <a:ln w="9000" cap="rnd">
+            <a:ln w="11454" cap="rnd">
               <a:solidFill>
                 <a:srgbClr val="00BFC4">
                   <a:alpha val="100000"/>
@@ -5970,8 +5963,8 @@
           </p:nvSpPr>
           <p:spPr>
             <a:xfrm>
-              <a:off x="3375147" y="3962215"/>
-              <a:ext cx="49651" cy="49651"/>
+              <a:off x="3292766" y="4499638"/>
+              <a:ext cx="63193" cy="63193"/>
             </a:xfrm>
             <a:prstGeom prst="ellipse">
               <a:avLst/>
@@ -5981,7 +5974,7 @@
                 <a:alpha val="100000"/>
               </a:srgbClr>
             </a:solidFill>
-            <a:ln w="9000" cap="rnd">
+            <a:ln w="11454" cap="rnd">
               <a:solidFill>
                 <a:srgbClr val="00BFC4">
                   <a:alpha val="100000"/>
@@ -6005,8 +5998,8 @@
           </p:nvSpPr>
           <p:spPr>
             <a:xfrm>
-              <a:off x="3478191" y="3977253"/>
-              <a:ext cx="49651" cy="49651"/>
+              <a:off x="3391209" y="4518224"/>
+              <a:ext cx="63193" cy="63193"/>
             </a:xfrm>
             <a:prstGeom prst="ellipse">
               <a:avLst/>
@@ -6016,7 +6009,7 @@
                 <a:alpha val="100000"/>
               </a:srgbClr>
             </a:solidFill>
-            <a:ln w="9000" cap="rnd">
+            <a:ln w="11454" cap="rnd">
               <a:solidFill>
                 <a:srgbClr val="00BFC4">
                   <a:alpha val="100000"/>
@@ -6040,8 +6033,8 @@
           </p:nvSpPr>
           <p:spPr>
             <a:xfrm>
-              <a:off x="2550796" y="3961667"/>
-              <a:ext cx="49651" cy="49651"/>
+              <a:off x="2505222" y="4498961"/>
+              <a:ext cx="63193" cy="63193"/>
             </a:xfrm>
             <a:prstGeom prst="ellipse">
               <a:avLst/>
@@ -6051,7 +6044,7 @@
                 <a:alpha val="100000"/>
               </a:srgbClr>
             </a:solidFill>
-            <a:ln w="9000" cap="rnd">
+            <a:ln w="11454" cap="rnd">
               <a:solidFill>
                 <a:srgbClr val="00BA38">
                   <a:alpha val="100000"/>
@@ -6075,8 +6068,8 @@
           </p:nvSpPr>
           <p:spPr>
             <a:xfrm>
-              <a:off x="2585144" y="3942945"/>
-              <a:ext cx="49651" cy="49651"/>
+              <a:off x="2538036" y="4475821"/>
+              <a:ext cx="63193" cy="63193"/>
             </a:xfrm>
             <a:prstGeom prst="ellipse">
               <a:avLst/>
@@ -6086,7 +6079,7 @@
                 <a:alpha val="100000"/>
               </a:srgbClr>
             </a:solidFill>
-            <a:ln w="9000" cap="rnd">
+            <a:ln w="11454" cap="rnd">
               <a:solidFill>
                 <a:srgbClr val="00BA38">
                   <a:alpha val="100000"/>
@@ -6110,8 +6103,8 @@
           </p:nvSpPr>
           <p:spPr>
             <a:xfrm>
-              <a:off x="2619492" y="3913278"/>
-              <a:ext cx="49651" cy="49651"/>
+              <a:off x="2570851" y="4439153"/>
+              <a:ext cx="63193" cy="63193"/>
             </a:xfrm>
             <a:prstGeom prst="ellipse">
               <a:avLst/>
@@ -6121,7 +6114,7 @@
                 <a:alpha val="100000"/>
               </a:srgbClr>
             </a:solidFill>
-            <a:ln w="9000" cap="rnd">
+            <a:ln w="11454" cap="rnd">
               <a:solidFill>
                 <a:srgbClr val="00BA38">
                   <a:alpha val="100000"/>
@@ -6145,8 +6138,8 @@
           </p:nvSpPr>
           <p:spPr>
             <a:xfrm>
-              <a:off x="2653840" y="3869572"/>
-              <a:ext cx="49651" cy="49651"/>
+              <a:off x="2603665" y="4385135"/>
+              <a:ext cx="63193" cy="63193"/>
             </a:xfrm>
             <a:prstGeom prst="ellipse">
               <a:avLst/>
@@ -6156,7 +6149,7 @@
                 <a:alpha val="100000"/>
               </a:srgbClr>
             </a:solidFill>
-            <a:ln w="9000" cap="rnd">
+            <a:ln w="11454" cap="rnd">
               <a:solidFill>
                 <a:srgbClr val="00BA38">
                   <a:alpha val="100000"/>
@@ -6180,8 +6173,8 @@
           </p:nvSpPr>
           <p:spPr>
             <a:xfrm>
-              <a:off x="2688188" y="3809971"/>
-              <a:ext cx="49651" cy="49651"/>
+              <a:off x="2636479" y="4311471"/>
+              <a:ext cx="63193" cy="63193"/>
             </a:xfrm>
             <a:prstGeom prst="ellipse">
               <a:avLst/>
@@ -6191,7 +6184,7 @@
                 <a:alpha val="100000"/>
               </a:srgbClr>
             </a:solidFill>
-            <a:ln w="9000" cap="rnd">
+            <a:ln w="11454" cap="rnd">
               <a:solidFill>
                 <a:srgbClr val="00BA38">
                   <a:alpha val="100000"/>
@@ -6215,8 +6208,8 @@
           </p:nvSpPr>
           <p:spPr>
             <a:xfrm>
-              <a:off x="2756884" y="3647490"/>
-              <a:ext cx="49651" cy="49651"/>
+              <a:off x="2702108" y="4110652"/>
+              <a:ext cx="63193" cy="63193"/>
             </a:xfrm>
             <a:prstGeom prst="ellipse">
               <a:avLst/>
@@ -6226,7 +6219,7 @@
                 <a:alpha val="100000"/>
               </a:srgbClr>
             </a:solidFill>
-            <a:ln w="9000" cap="rnd">
+            <a:ln w="11454" cap="rnd">
               <a:solidFill>
                 <a:srgbClr val="00BA38">
                   <a:alpha val="100000"/>
@@ -6250,8 +6243,8 @@
           </p:nvSpPr>
           <p:spPr>
             <a:xfrm>
-              <a:off x="2791232" y="3555528"/>
-              <a:ext cx="49651" cy="49651"/>
+              <a:off x="2734922" y="3996991"/>
+              <a:ext cx="63193" cy="63193"/>
             </a:xfrm>
             <a:prstGeom prst="ellipse">
               <a:avLst/>
@@ -6261,7 +6254,7 @@
                 <a:alpha val="100000"/>
               </a:srgbClr>
             </a:solidFill>
-            <a:ln w="9000" cap="rnd">
+            <a:ln w="11454" cap="rnd">
               <a:solidFill>
                 <a:srgbClr val="00BA38">
                   <a:alpha val="100000"/>
@@ -6285,8 +6278,8 @@
           </p:nvSpPr>
           <p:spPr>
             <a:xfrm>
-              <a:off x="2825580" y="3473994"/>
-              <a:ext cx="49651" cy="49651"/>
+              <a:off x="2767737" y="3896218"/>
+              <a:ext cx="63193" cy="63193"/>
             </a:xfrm>
             <a:prstGeom prst="ellipse">
               <a:avLst/>
@@ -6296,7 +6289,7 @@
                 <a:alpha val="100000"/>
               </a:srgbClr>
             </a:solidFill>
-            <a:ln w="9000" cap="rnd">
+            <a:ln w="11454" cap="rnd">
               <a:solidFill>
                 <a:srgbClr val="00BA38">
                   <a:alpha val="100000"/>
@@ -6320,8 +6313,8 @@
           </p:nvSpPr>
           <p:spPr>
             <a:xfrm>
-              <a:off x="2859928" y="3424539"/>
-              <a:ext cx="49651" cy="49651"/>
+              <a:off x="2800551" y="3835095"/>
+              <a:ext cx="63193" cy="63193"/>
             </a:xfrm>
             <a:prstGeom prst="ellipse">
               <a:avLst/>
@@ -6331,7 +6324,7 @@
                 <a:alpha val="100000"/>
               </a:srgbClr>
             </a:solidFill>
-            <a:ln w="9000" cap="rnd">
+            <a:ln w="11454" cap="rnd">
               <a:solidFill>
                 <a:srgbClr val="00BA38">
                   <a:alpha val="100000"/>
@@ -6355,8 +6348,8 @@
           </p:nvSpPr>
           <p:spPr>
             <a:xfrm>
-              <a:off x="2894276" y="3415178"/>
-              <a:ext cx="49651" cy="49651"/>
+              <a:off x="2833365" y="3823525"/>
+              <a:ext cx="63193" cy="63193"/>
             </a:xfrm>
             <a:prstGeom prst="ellipse">
               <a:avLst/>
@@ -6366,7 +6359,7 @@
                 <a:alpha val="100000"/>
               </a:srgbClr>
             </a:solidFill>
-            <a:ln w="9000" cap="rnd">
+            <a:ln w="11454" cap="rnd">
               <a:solidFill>
                 <a:srgbClr val="00BA38">
                   <a:alpha val="100000"/>
@@ -6390,8 +6383,8 @@
           </p:nvSpPr>
           <p:spPr>
             <a:xfrm>
-              <a:off x="2928624" y="3436391"/>
-              <a:ext cx="49651" cy="49651"/>
+              <a:off x="2866180" y="3849744"/>
+              <a:ext cx="63193" cy="63193"/>
             </a:xfrm>
             <a:prstGeom prst="ellipse">
               <a:avLst/>
@@ -6401,7 +6394,7 @@
                 <a:alpha val="100000"/>
               </a:srgbClr>
             </a:solidFill>
-            <a:ln w="9000" cap="rnd">
+            <a:ln w="11454" cap="rnd">
               <a:solidFill>
                 <a:srgbClr val="00BA38">
                   <a:alpha val="100000"/>
@@ -6425,8 +6418,8 @@
           </p:nvSpPr>
           <p:spPr>
             <a:xfrm>
-              <a:off x="2962972" y="3477473"/>
-              <a:ext cx="49651" cy="49651"/>
+              <a:off x="2898994" y="3900518"/>
+              <a:ext cx="63193" cy="63193"/>
             </a:xfrm>
             <a:prstGeom prst="ellipse">
               <a:avLst/>
@@ -6436,7 +6429,7 @@
                 <a:alpha val="100000"/>
               </a:srgbClr>
             </a:solidFill>
-            <a:ln w="9000" cap="rnd">
+            <a:ln w="11454" cap="rnd">
               <a:solidFill>
                 <a:srgbClr val="00BA38">
                   <a:alpha val="100000"/>
@@ -6460,8 +6453,8 @@
           </p:nvSpPr>
           <p:spPr>
             <a:xfrm>
-              <a:off x="2997320" y="3524673"/>
-              <a:ext cx="49651" cy="49651"/>
+              <a:off x="2931808" y="3958856"/>
+              <a:ext cx="63193" cy="63193"/>
             </a:xfrm>
             <a:prstGeom prst="ellipse">
               <a:avLst/>
@@ -6471,7 +6464,7 @@
                 <a:alpha val="100000"/>
               </a:srgbClr>
             </a:solidFill>
-            <a:ln w="9000" cap="rnd">
+            <a:ln w="11454" cap="rnd">
               <a:solidFill>
                 <a:srgbClr val="00BA38">
                   <a:alpha val="100000"/>
@@ -6495,8 +6488,8 @@
           </p:nvSpPr>
           <p:spPr>
             <a:xfrm>
-              <a:off x="3031668" y="3569653"/>
-              <a:ext cx="49651" cy="49651"/>
+              <a:off x="2964622" y="4014449"/>
+              <a:ext cx="63193" cy="63193"/>
             </a:xfrm>
             <a:prstGeom prst="ellipse">
               <a:avLst/>
@@ -6506,7 +6499,7 @@
                 <a:alpha val="100000"/>
               </a:srgbClr>
             </a:solidFill>
-            <a:ln w="9000" cap="rnd">
+            <a:ln w="11454" cap="rnd">
               <a:solidFill>
                 <a:srgbClr val="00BA38">
                   <a:alpha val="100000"/>
@@ -6530,8 +6523,8 @@
           </p:nvSpPr>
           <p:spPr>
             <a:xfrm>
-              <a:off x="3100364" y="3643498"/>
-              <a:ext cx="49651" cy="49651"/>
+              <a:off x="3030251" y="4105717"/>
+              <a:ext cx="63193" cy="63193"/>
             </a:xfrm>
             <a:prstGeom prst="ellipse">
               <a:avLst/>
@@ -6541,7 +6534,7 @@
                 <a:alpha val="100000"/>
               </a:srgbClr>
             </a:solidFill>
-            <a:ln w="9000" cap="rnd">
+            <a:ln w="11454" cap="rnd">
               <a:solidFill>
                 <a:srgbClr val="00BA38">
                   <a:alpha val="100000"/>
@@ -6565,8 +6558,8 @@
           </p:nvSpPr>
           <p:spPr>
             <a:xfrm>
-              <a:off x="3169060" y="3701965"/>
-              <a:ext cx="49651" cy="49651"/>
+              <a:off x="3095880" y="4177980"/>
+              <a:ext cx="63193" cy="63193"/>
             </a:xfrm>
             <a:prstGeom prst="ellipse">
               <a:avLst/>
@@ -6576,7 +6569,7 @@
                 <a:alpha val="100000"/>
               </a:srgbClr>
             </a:solidFill>
-            <a:ln w="9000" cap="rnd">
+            <a:ln w="11454" cap="rnd">
               <a:solidFill>
                 <a:srgbClr val="00BA38">
                   <a:alpha val="100000"/>
@@ -6600,8 +6593,8 @@
           </p:nvSpPr>
           <p:spPr>
             <a:xfrm>
-              <a:off x="3272104" y="3801772"/>
-              <a:ext cx="49651" cy="49651"/>
+              <a:off x="3194323" y="4301337"/>
+              <a:ext cx="63193" cy="63193"/>
             </a:xfrm>
             <a:prstGeom prst="ellipse">
               <a:avLst/>
@@ -6611,7 +6604,7 @@
                 <a:alpha val="100000"/>
               </a:srgbClr>
             </a:solidFill>
-            <a:ln w="9000" cap="rnd">
+            <a:ln w="11454" cap="rnd">
               <a:solidFill>
                 <a:srgbClr val="00BA38">
                   <a:alpha val="100000"/>
@@ -6635,8 +6628,8 @@
           </p:nvSpPr>
           <p:spPr>
             <a:xfrm>
-              <a:off x="3306452" y="3834862"/>
-              <a:ext cx="49651" cy="49651"/>
+              <a:off x="3227137" y="4342235"/>
+              <a:ext cx="63193" cy="63193"/>
             </a:xfrm>
             <a:prstGeom prst="ellipse">
               <a:avLst/>
@@ -6646,7 +6639,7 @@
                 <a:alpha val="100000"/>
               </a:srgbClr>
             </a:solidFill>
-            <a:ln w="9000" cap="rnd">
+            <a:ln w="11454" cap="rnd">
               <a:solidFill>
                 <a:srgbClr val="00BA38">
                   <a:alpha val="100000"/>
@@ -6670,8 +6663,8 @@
           </p:nvSpPr>
           <p:spPr>
             <a:xfrm>
-              <a:off x="3478191" y="3949256"/>
-              <a:ext cx="49651" cy="49651"/>
+              <a:off x="3391209" y="4483621"/>
+              <a:ext cx="63193" cy="63193"/>
             </a:xfrm>
             <a:prstGeom prst="ellipse">
               <a:avLst/>
@@ -6681,7 +6674,7 @@
                 <a:alpha val="100000"/>
               </a:srgbClr>
             </a:solidFill>
-            <a:ln w="9000" cap="rnd">
+            <a:ln w="11454" cap="rnd">
               <a:solidFill>
                 <a:srgbClr val="00BA38">
                   <a:alpha val="100000"/>
@@ -6705,12 +6698,13 @@
           </p:nvSpPr>
           <p:spPr>
             <a:xfrm>
-              <a:off x="1648227" y="2850534"/>
-              <a:ext cx="1889138" cy="1171063"/>
+              <a:off x="1650832" y="3126564"/>
+              <a:ext cx="1804787" cy="1447380"/>
             </a:xfrm>
             <a:prstGeom prst="rect">
               <a:avLst/>
             </a:prstGeom>
+            <a:noFill/>
           </p:spPr>
           <p:txBody>
             <a:bodyPr/>
@@ -6726,17 +6720,13 @@
           </p:nvSpPr>
           <p:spPr>
             <a:xfrm>
-              <a:off x="3625933" y="1315914"/>
-              <a:ext cx="1889138" cy="1171063"/>
+              <a:off x="3544187" y="1315770"/>
+              <a:ext cx="1804787" cy="1447380"/>
             </a:xfrm>
             <a:prstGeom prst="rect">
               <a:avLst/>
             </a:prstGeom>
-            <a:solidFill>
-              <a:srgbClr val="FFFFFF">
-                <a:alpha val="100000"/>
-              </a:srgbClr>
-            </a:solidFill>
+            <a:noFill/>
           </p:spPr>
           <p:txBody>
             <a:bodyPr/>
@@ -6752,72 +6742,72 @@
           </p:nvSpPr>
           <p:spPr>
             <a:xfrm>
-              <a:off x="4278545" y="1848785"/>
-              <a:ext cx="1202178" cy="608220"/>
+              <a:off x="4167659" y="1974374"/>
+              <a:ext cx="1148501" cy="751733"/>
             </a:xfrm>
             <a:custGeom>
               <a:avLst/>
               <a:pathLst>
-                <a:path w="1202178" h="608220">
+                <a:path w="1148501" h="751733">
                   <a:moveTo>
-                    <a:pt x="0" y="602568"/>
+                    <a:pt x="0" y="744746"/>
                   </a:moveTo>
                   <a:lnTo>
-                    <a:pt x="68695" y="579948"/>
-                  </a:lnTo>
-                  <a:lnTo>
-                    <a:pt x="103043" y="563274"/>
-                  </a:lnTo>
-                  <a:lnTo>
-                    <a:pt x="171739" y="515779"/>
-                  </a:lnTo>
-                  <a:lnTo>
-                    <a:pt x="274783" y="398241"/>
-                  </a:lnTo>
-                  <a:lnTo>
-                    <a:pt x="343479" y="283847"/>
-                  </a:lnTo>
-                  <a:lnTo>
-                    <a:pt x="377827" y="219296"/>
-                  </a:lnTo>
-                  <a:lnTo>
-                    <a:pt x="412175" y="155251"/>
-                  </a:lnTo>
-                  <a:lnTo>
-                    <a:pt x="480871" y="46982"/>
-                  </a:lnTo>
-                  <a:lnTo>
-                    <a:pt x="515219" y="14496"/>
-                  </a:lnTo>
-                  <a:lnTo>
-                    <a:pt x="549567" y="0"/>
-                  </a:lnTo>
-                  <a:lnTo>
-                    <a:pt x="583915" y="3798"/>
-                  </a:lnTo>
-                  <a:lnTo>
-                    <a:pt x="618263" y="23666"/>
-                  </a:lnTo>
-                  <a:lnTo>
-                    <a:pt x="652611" y="56038"/>
-                  </a:lnTo>
-                  <a:lnTo>
-                    <a:pt x="721307" y="144506"/>
-                  </a:lnTo>
-                  <a:lnTo>
-                    <a:pt x="755655" y="196870"/>
-                  </a:lnTo>
-                  <a:lnTo>
-                    <a:pt x="790003" y="251806"/>
-                  </a:lnTo>
-                  <a:lnTo>
-                    <a:pt x="824351" y="307106"/>
-                  </a:lnTo>
-                  <a:lnTo>
-                    <a:pt x="1030439" y="545581"/>
-                  </a:lnTo>
-                  <a:lnTo>
-                    <a:pt x="1202178" y="608220"/>
+                    <a:pt x="65628" y="716790"/>
+                  </a:lnTo>
+                  <a:lnTo>
+                    <a:pt x="98442" y="696181"/>
+                  </a:lnTo>
+                  <a:lnTo>
+                    <a:pt x="164071" y="637479"/>
+                  </a:lnTo>
+                  <a:lnTo>
+                    <a:pt x="262514" y="492208"/>
+                  </a:lnTo>
+                  <a:lnTo>
+                    <a:pt x="328143" y="350822"/>
+                  </a:lnTo>
+                  <a:lnTo>
+                    <a:pt x="360957" y="271040"/>
+                  </a:lnTo>
+                  <a:lnTo>
+                    <a:pt x="393771" y="191884"/>
+                  </a:lnTo>
+                  <a:lnTo>
+                    <a:pt x="459400" y="58068"/>
+                  </a:lnTo>
+                  <a:lnTo>
+                    <a:pt x="492214" y="17916"/>
+                  </a:lnTo>
+                  <a:lnTo>
+                    <a:pt x="525029" y="0"/>
+                  </a:lnTo>
+                  <a:lnTo>
+                    <a:pt x="557843" y="4694"/>
+                  </a:lnTo>
+                  <a:lnTo>
+                    <a:pt x="590657" y="29250"/>
+                  </a:lnTo>
+                  <a:lnTo>
+                    <a:pt x="623471" y="69261"/>
+                  </a:lnTo>
+                  <a:lnTo>
+                    <a:pt x="689100" y="178603"/>
+                  </a:lnTo>
+                  <a:lnTo>
+                    <a:pt x="721914" y="243322"/>
+                  </a:lnTo>
+                  <a:lnTo>
+                    <a:pt x="754729" y="311221"/>
+                  </a:lnTo>
+                  <a:lnTo>
+                    <a:pt x="787543" y="379569"/>
+                  </a:lnTo>
+                  <a:lnTo>
+                    <a:pt x="984429" y="674313"/>
+                  </a:lnTo>
+                  <a:lnTo>
+                    <a:pt x="1148501" y="751733"/>
                   </a:lnTo>
                 </a:path>
               </a:pathLst>
@@ -6846,69 +6836,69 @@
           </p:nvSpPr>
           <p:spPr>
             <a:xfrm>
-              <a:off x="4312893" y="1633104"/>
-              <a:ext cx="1167830" cy="842392"/>
+              <a:off x="4200474" y="1707802"/>
+              <a:ext cx="1115686" cy="1041158"/>
             </a:xfrm>
             <a:custGeom>
               <a:avLst/>
               <a:pathLst>
-                <a:path w="1167830" h="842392">
+                <a:path w="1115686" h="1041158">
                   <a:moveTo>
-                    <a:pt x="0" y="818562"/>
+                    <a:pt x="0" y="1011705"/>
                   </a:moveTo>
                   <a:lnTo>
-                    <a:pt x="137391" y="656441"/>
-                  </a:lnTo>
-                  <a:lnTo>
-                    <a:pt x="171739" y="551609"/>
-                  </a:lnTo>
-                  <a:lnTo>
-                    <a:pt x="206087" y="411858"/>
-                  </a:lnTo>
-                  <a:lnTo>
-                    <a:pt x="240435" y="255332"/>
-                  </a:lnTo>
-                  <a:lnTo>
-                    <a:pt x="274783" y="115124"/>
-                  </a:lnTo>
-                  <a:lnTo>
-                    <a:pt x="309131" y="22750"/>
-                  </a:lnTo>
-                  <a:lnTo>
-                    <a:pt x="343479" y="0"/>
-                  </a:lnTo>
-                  <a:lnTo>
-                    <a:pt x="377827" y="36117"/>
-                  </a:lnTo>
-                  <a:lnTo>
-                    <a:pt x="412175" y="107463"/>
-                  </a:lnTo>
-                  <a:lnTo>
-                    <a:pt x="446523" y="191855"/>
-                  </a:lnTo>
-                  <a:lnTo>
-                    <a:pt x="480871" y="276371"/>
-                  </a:lnTo>
-                  <a:lnTo>
-                    <a:pt x="515219" y="356044"/>
-                  </a:lnTo>
-                  <a:lnTo>
-                    <a:pt x="549567" y="429552"/>
-                  </a:lnTo>
-                  <a:lnTo>
-                    <a:pt x="583915" y="495796"/>
-                  </a:lnTo>
-                  <a:lnTo>
-                    <a:pt x="618263" y="555215"/>
-                  </a:lnTo>
-                  <a:lnTo>
-                    <a:pt x="686959" y="652578"/>
-                  </a:lnTo>
-                  <a:lnTo>
-                    <a:pt x="790003" y="749957"/>
-                  </a:lnTo>
-                  <a:lnTo>
-                    <a:pt x="1167830" y="842392"/>
+                    <a:pt x="131257" y="811331"/>
+                  </a:lnTo>
+                  <a:lnTo>
+                    <a:pt x="164071" y="681764"/>
+                  </a:lnTo>
+                  <a:lnTo>
+                    <a:pt x="196885" y="509038"/>
+                  </a:lnTo>
+                  <a:lnTo>
+                    <a:pt x="229700" y="315579"/>
+                  </a:lnTo>
+                  <a:lnTo>
+                    <a:pt x="262514" y="142288"/>
+                  </a:lnTo>
+                  <a:lnTo>
+                    <a:pt x="295328" y="28119"/>
+                  </a:lnTo>
+                  <a:lnTo>
+                    <a:pt x="328143" y="0"/>
+                  </a:lnTo>
+                  <a:lnTo>
+                    <a:pt x="360957" y="44640"/>
+                  </a:lnTo>
+                  <a:lnTo>
+                    <a:pt x="393771" y="132819"/>
+                  </a:lnTo>
+                  <a:lnTo>
+                    <a:pt x="426586" y="237125"/>
+                  </a:lnTo>
+                  <a:lnTo>
+                    <a:pt x="459400" y="341582"/>
+                  </a:lnTo>
+                  <a:lnTo>
+                    <a:pt x="492214" y="440054"/>
+                  </a:lnTo>
+                  <a:lnTo>
+                    <a:pt x="525029" y="530907"/>
+                  </a:lnTo>
+                  <a:lnTo>
+                    <a:pt x="557843" y="612782"/>
+                  </a:lnTo>
+                  <a:lnTo>
+                    <a:pt x="590657" y="686220"/>
+                  </a:lnTo>
+                  <a:lnTo>
+                    <a:pt x="656286" y="806557"/>
+                  </a:lnTo>
+                  <a:lnTo>
+                    <a:pt x="754729" y="926913"/>
+                  </a:lnTo>
+                  <a:lnTo>
+                    <a:pt x="1115686" y="1041158"/>
                   </a:lnTo>
                 </a:path>
               </a:pathLst>
@@ -6937,66 +6927,66 @@
           </p:nvSpPr>
           <p:spPr>
             <a:xfrm>
-              <a:off x="3763325" y="1655938"/>
-              <a:ext cx="1717398" cy="818026"/>
+              <a:off x="3675445" y="1736025"/>
+              <a:ext cx="1640715" cy="1011043"/>
             </a:xfrm>
             <a:custGeom>
               <a:avLst/>
               <a:pathLst>
-                <a:path w="1717398" h="818026">
+                <a:path w="1640715" h="1011043">
                   <a:moveTo>
-                    <a:pt x="0" y="760266"/>
+                    <a:pt x="0" y="939654"/>
                   </a:moveTo>
                   <a:lnTo>
-                    <a:pt x="103043" y="780834"/>
-                  </a:lnTo>
-                  <a:lnTo>
-                    <a:pt x="618263" y="781821"/>
-                  </a:lnTo>
-                  <a:lnTo>
-                    <a:pt x="721307" y="699868"/>
-                  </a:lnTo>
-                  <a:lnTo>
-                    <a:pt x="790003" y="546117"/>
-                  </a:lnTo>
-                  <a:lnTo>
-                    <a:pt x="824351" y="427832"/>
-                  </a:lnTo>
-                  <a:lnTo>
-                    <a:pt x="858699" y="272380"/>
-                  </a:lnTo>
-                  <a:lnTo>
-                    <a:pt x="893047" y="156802"/>
-                  </a:lnTo>
-                  <a:lnTo>
-                    <a:pt x="927395" y="51525"/>
-                  </a:lnTo>
-                  <a:lnTo>
-                    <a:pt x="961743" y="4592"/>
-                  </a:lnTo>
-                  <a:lnTo>
-                    <a:pt x="996091" y="0"/>
-                  </a:lnTo>
-                  <a:lnTo>
-                    <a:pt x="1030439" y="17211"/>
-                  </a:lnTo>
-                  <a:lnTo>
-                    <a:pt x="1064787" y="77766"/>
-                  </a:lnTo>
-                  <a:lnTo>
-                    <a:pt x="1099135" y="144684"/>
-                  </a:lnTo>
-                  <a:lnTo>
-                    <a:pt x="1133482" y="224989"/>
-                  </a:lnTo>
-                  <a:lnTo>
-                    <a:pt x="1167830" y="312994"/>
-                  </a:lnTo>
-                  <a:lnTo>
-                    <a:pt x="1511310" y="786231"/>
-                  </a:lnTo>
-                  <a:lnTo>
-                    <a:pt x="1717398" y="818026"/>
+                    <a:pt x="98442" y="965076"/>
+                  </a:lnTo>
+                  <a:lnTo>
+                    <a:pt x="590657" y="966295"/>
+                  </a:lnTo>
+                  <a:lnTo>
+                    <a:pt x="689100" y="865005"/>
+                  </a:lnTo>
+                  <a:lnTo>
+                    <a:pt x="754729" y="674976"/>
+                  </a:lnTo>
+                  <a:lnTo>
+                    <a:pt x="787543" y="528781"/>
+                  </a:lnTo>
+                  <a:lnTo>
+                    <a:pt x="820357" y="336649"/>
+                  </a:lnTo>
+                  <a:lnTo>
+                    <a:pt x="853172" y="193800"/>
+                  </a:lnTo>
+                  <a:lnTo>
+                    <a:pt x="885986" y="63683"/>
+                  </a:lnTo>
+                  <a:lnTo>
+                    <a:pt x="918800" y="5676"/>
+                  </a:lnTo>
+                  <a:lnTo>
+                    <a:pt x="951615" y="0"/>
+                  </a:lnTo>
+                  <a:lnTo>
+                    <a:pt x="984429" y="21272"/>
+                  </a:lnTo>
+                  <a:lnTo>
+                    <a:pt x="1017243" y="96116"/>
+                  </a:lnTo>
+                  <a:lnTo>
+                    <a:pt x="1050058" y="178822"/>
+                  </a:lnTo>
+                  <a:lnTo>
+                    <a:pt x="1082872" y="278076"/>
+                  </a:lnTo>
+                  <a:lnTo>
+                    <a:pt x="1115686" y="386847"/>
+                  </a:lnTo>
+                  <a:lnTo>
+                    <a:pt x="1443829" y="971746"/>
+                  </a:lnTo>
+                  <a:lnTo>
+                    <a:pt x="1640715" y="1011043"/>
                   </a:lnTo>
                 </a:path>
               </a:pathLst>
@@ -7025,8 +7015,8 @@
           </p:nvSpPr>
           <p:spPr>
             <a:xfrm>
-              <a:off x="4253719" y="2426527"/>
-              <a:ext cx="49651" cy="49651"/>
+              <a:off x="4136063" y="2687524"/>
+              <a:ext cx="63193" cy="63193"/>
             </a:xfrm>
             <a:prstGeom prst="ellipse">
               <a:avLst/>
@@ -7036,7 +7026,7 @@
                 <a:alpha val="100000"/>
               </a:srgbClr>
             </a:solidFill>
-            <a:ln w="9000" cap="rnd">
+            <a:ln w="11454" cap="rnd">
               <a:solidFill>
                 <a:srgbClr val="F8766D">
                   <a:alpha val="100000"/>
@@ -7060,8 +7050,8 @@
           </p:nvSpPr>
           <p:spPr>
             <a:xfrm>
-              <a:off x="4322415" y="2403908"/>
-              <a:ext cx="49651" cy="49651"/>
+              <a:off x="4201691" y="2659568"/>
+              <a:ext cx="63193" cy="63193"/>
             </a:xfrm>
             <a:prstGeom prst="ellipse">
               <a:avLst/>
@@ -7071,7 +7061,7 @@
                 <a:alpha val="100000"/>
               </a:srgbClr>
             </a:solidFill>
-            <a:ln w="9000" cap="rnd">
+            <a:ln w="11454" cap="rnd">
               <a:solidFill>
                 <a:srgbClr val="F8766D">
                   <a:alpha val="100000"/>
@@ -7095,8 +7085,8 @@
           </p:nvSpPr>
           <p:spPr>
             <a:xfrm>
-              <a:off x="4356763" y="2387234"/>
-              <a:ext cx="49651" cy="49651"/>
+              <a:off x="4234506" y="2638959"/>
+              <a:ext cx="63193" cy="63193"/>
             </a:xfrm>
             <a:prstGeom prst="ellipse">
               <a:avLst/>
@@ -7106,7 +7096,7 @@
                 <a:alpha val="100000"/>
               </a:srgbClr>
             </a:solidFill>
-            <a:ln w="9000" cap="rnd">
+            <a:ln w="11454" cap="rnd">
               <a:solidFill>
                 <a:srgbClr val="F8766D">
                   <a:alpha val="100000"/>
@@ -7130,8 +7120,8 @@
           </p:nvSpPr>
           <p:spPr>
             <a:xfrm>
-              <a:off x="4425458" y="2339738"/>
-              <a:ext cx="49651" cy="49651"/>
+              <a:off x="4300134" y="2580257"/>
+              <a:ext cx="63193" cy="63193"/>
             </a:xfrm>
             <a:prstGeom prst="ellipse">
               <a:avLst/>
@@ -7141,7 +7131,7 @@
                 <a:alpha val="100000"/>
               </a:srgbClr>
             </a:solidFill>
-            <a:ln w="9000" cap="rnd">
+            <a:ln w="11454" cap="rnd">
               <a:solidFill>
                 <a:srgbClr val="F8766D">
                   <a:alpha val="100000"/>
@@ -7165,8 +7155,8 @@
           </p:nvSpPr>
           <p:spPr>
             <a:xfrm>
-              <a:off x="4528502" y="2222201"/>
-              <a:ext cx="49651" cy="49651"/>
+              <a:off x="4398577" y="2434986"/>
+              <a:ext cx="63193" cy="63193"/>
             </a:xfrm>
             <a:prstGeom prst="ellipse">
               <a:avLst/>
@@ -7176,7 +7166,7 @@
                 <a:alpha val="100000"/>
               </a:srgbClr>
             </a:solidFill>
-            <a:ln w="9000" cap="rnd">
+            <a:ln w="11454" cap="rnd">
               <a:solidFill>
                 <a:srgbClr val="F8766D">
                   <a:alpha val="100000"/>
@@ -7200,8 +7190,8 @@
           </p:nvSpPr>
           <p:spPr>
             <a:xfrm>
-              <a:off x="4597198" y="2107806"/>
-              <a:ext cx="49651" cy="49651"/>
+              <a:off x="4464206" y="2293600"/>
+              <a:ext cx="63193" cy="63193"/>
             </a:xfrm>
             <a:prstGeom prst="ellipse">
               <a:avLst/>
@@ -7211,7 +7201,7 @@
                 <a:alpha val="100000"/>
               </a:srgbClr>
             </a:solidFill>
-            <a:ln w="9000" cap="rnd">
+            <a:ln w="11454" cap="rnd">
               <a:solidFill>
                 <a:srgbClr val="F8766D">
                   <a:alpha val="100000"/>
@@ -7235,8 +7225,8 @@
           </p:nvSpPr>
           <p:spPr>
             <a:xfrm>
-              <a:off x="4631546" y="2043256"/>
-              <a:ext cx="49651" cy="49651"/>
+              <a:off x="4497020" y="2213818"/>
+              <a:ext cx="63193" cy="63193"/>
             </a:xfrm>
             <a:prstGeom prst="ellipse">
               <a:avLst/>
@@ -7246,7 +7236,7 @@
                 <a:alpha val="100000"/>
               </a:srgbClr>
             </a:solidFill>
-            <a:ln w="9000" cap="rnd">
+            <a:ln w="11454" cap="rnd">
               <a:solidFill>
                 <a:srgbClr val="F8766D">
                   <a:alpha val="100000"/>
@@ -7270,8 +7260,8 @@
           </p:nvSpPr>
           <p:spPr>
             <a:xfrm>
-              <a:off x="4665894" y="1979211"/>
-              <a:ext cx="49651" cy="49651"/>
+              <a:off x="4529835" y="2134662"/>
+              <a:ext cx="63193" cy="63193"/>
             </a:xfrm>
             <a:prstGeom prst="ellipse">
               <a:avLst/>
@@ -7281,7 +7271,7 @@
                 <a:alpha val="100000"/>
               </a:srgbClr>
             </a:solidFill>
-            <a:ln w="9000" cap="rnd">
+            <a:ln w="11454" cap="rnd">
               <a:solidFill>
                 <a:srgbClr val="F8766D">
                   <a:alpha val="100000"/>
@@ -7305,8 +7295,8 @@
           </p:nvSpPr>
           <p:spPr>
             <a:xfrm>
-              <a:off x="4734590" y="1870941"/>
-              <a:ext cx="49651" cy="49651"/>
+              <a:off x="4595463" y="2000846"/>
+              <a:ext cx="63193" cy="63193"/>
             </a:xfrm>
             <a:prstGeom prst="ellipse">
               <a:avLst/>
@@ -7316,7 +7306,7 @@
                 <a:alpha val="100000"/>
               </a:srgbClr>
             </a:solidFill>
-            <a:ln w="9000" cap="rnd">
+            <a:ln w="11454" cap="rnd">
               <a:solidFill>
                 <a:srgbClr val="F8766D">
                   <a:alpha val="100000"/>
@@ -7340,8 +7330,8 @@
           </p:nvSpPr>
           <p:spPr>
             <a:xfrm>
-              <a:off x="4768938" y="1838455"/>
-              <a:ext cx="49651" cy="49651"/>
+              <a:off x="4628277" y="1960694"/>
+              <a:ext cx="63193" cy="63193"/>
             </a:xfrm>
             <a:prstGeom prst="ellipse">
               <a:avLst/>
@@ -7351,7 +7341,7 @@
                 <a:alpha val="100000"/>
               </a:srgbClr>
             </a:solidFill>
-            <a:ln w="9000" cap="rnd">
+            <a:ln w="11454" cap="rnd">
               <a:solidFill>
                 <a:srgbClr val="F8766D">
                   <a:alpha val="100000"/>
@@ -7375,8 +7365,8 @@
           </p:nvSpPr>
           <p:spPr>
             <a:xfrm>
-              <a:off x="4803286" y="1823959"/>
-              <a:ext cx="49651" cy="49651"/>
+              <a:off x="4661092" y="1942777"/>
+              <a:ext cx="63193" cy="63193"/>
             </a:xfrm>
             <a:prstGeom prst="ellipse">
               <a:avLst/>
@@ -7386,7 +7376,7 @@
                 <a:alpha val="100000"/>
               </a:srgbClr>
             </a:solidFill>
-            <a:ln w="9000" cap="rnd">
+            <a:ln w="11454" cap="rnd">
               <a:solidFill>
                 <a:srgbClr val="F8766D">
                   <a:alpha val="100000"/>
@@ -7410,8 +7400,8 @@
           </p:nvSpPr>
           <p:spPr>
             <a:xfrm>
-              <a:off x="4837634" y="1827757"/>
-              <a:ext cx="49651" cy="49651"/>
+              <a:off x="4693906" y="1947472"/>
+              <a:ext cx="63193" cy="63193"/>
             </a:xfrm>
             <a:prstGeom prst="ellipse">
               <a:avLst/>
@@ -7421,7 +7411,7 @@
                 <a:alpha val="100000"/>
               </a:srgbClr>
             </a:solidFill>
-            <a:ln w="9000" cap="rnd">
+            <a:ln w="11454" cap="rnd">
               <a:solidFill>
                 <a:srgbClr val="F8766D">
                   <a:alpha val="100000"/>
@@ -7445,8 +7435,8 @@
           </p:nvSpPr>
           <p:spPr>
             <a:xfrm>
-              <a:off x="4871982" y="1847625"/>
-              <a:ext cx="49651" cy="49651"/>
+              <a:off x="4726720" y="1972028"/>
+              <a:ext cx="63193" cy="63193"/>
             </a:xfrm>
             <a:prstGeom prst="ellipse">
               <a:avLst/>
@@ -7456,7 +7446,7 @@
                 <a:alpha val="100000"/>
               </a:srgbClr>
             </a:solidFill>
-            <a:ln w="9000" cap="rnd">
+            <a:ln w="11454" cap="rnd">
               <a:solidFill>
                 <a:srgbClr val="F8766D">
                   <a:alpha val="100000"/>
@@ -7480,8 +7470,8 @@
           </p:nvSpPr>
           <p:spPr>
             <a:xfrm>
-              <a:off x="4906330" y="1879998"/>
-              <a:ext cx="49651" cy="49651"/>
+              <a:off x="4759535" y="2012039"/>
+              <a:ext cx="63193" cy="63193"/>
             </a:xfrm>
             <a:prstGeom prst="ellipse">
               <a:avLst/>
@@ -7491,7 +7481,7 @@
                 <a:alpha val="100000"/>
               </a:srgbClr>
             </a:solidFill>
-            <a:ln w="9000" cap="rnd">
+            <a:ln w="11454" cap="rnd">
               <a:solidFill>
                 <a:srgbClr val="F8766D">
                   <a:alpha val="100000"/>
@@ -7515,8 +7505,8 @@
           </p:nvSpPr>
           <p:spPr>
             <a:xfrm>
-              <a:off x="4975026" y="1968466"/>
-              <a:ext cx="49651" cy="49651"/>
+              <a:off x="4825163" y="2121381"/>
+              <a:ext cx="63193" cy="63193"/>
             </a:xfrm>
             <a:prstGeom prst="ellipse">
               <a:avLst/>
@@ -7526,7 +7516,7 @@
                 <a:alpha val="100000"/>
               </a:srgbClr>
             </a:solidFill>
-            <a:ln w="9000" cap="rnd">
+            <a:ln w="11454" cap="rnd">
               <a:solidFill>
                 <a:srgbClr val="F8766D">
                   <a:alpha val="100000"/>
@@ -7550,8 +7540,8 @@
           </p:nvSpPr>
           <p:spPr>
             <a:xfrm>
-              <a:off x="5009374" y="2020829"/>
-              <a:ext cx="49651" cy="49651"/>
+              <a:off x="4857978" y="2186100"/>
+              <a:ext cx="63193" cy="63193"/>
             </a:xfrm>
             <a:prstGeom prst="ellipse">
               <a:avLst/>
@@ -7561,7 +7551,7 @@
                 <a:alpha val="100000"/>
               </a:srgbClr>
             </a:solidFill>
-            <a:ln w="9000" cap="rnd">
+            <a:ln w="11454" cap="rnd">
               <a:solidFill>
                 <a:srgbClr val="F8766D">
                   <a:alpha val="100000"/>
@@ -7585,8 +7575,8 @@
           </p:nvSpPr>
           <p:spPr>
             <a:xfrm>
-              <a:off x="5043722" y="2075766"/>
-              <a:ext cx="49651" cy="49651"/>
+              <a:off x="4890792" y="2253999"/>
+              <a:ext cx="63193" cy="63193"/>
             </a:xfrm>
             <a:prstGeom prst="ellipse">
               <a:avLst/>
@@ -7596,7 +7586,7 @@
                 <a:alpha val="100000"/>
               </a:srgbClr>
             </a:solidFill>
-            <a:ln w="9000" cap="rnd">
+            <a:ln w="11454" cap="rnd">
               <a:solidFill>
                 <a:srgbClr val="F8766D">
                   <a:alpha val="100000"/>
@@ -7620,8 +7610,8 @@
           </p:nvSpPr>
           <p:spPr>
             <a:xfrm>
-              <a:off x="5078070" y="2131065"/>
-              <a:ext cx="49651" cy="49651"/>
+              <a:off x="4923606" y="2322347"/>
+              <a:ext cx="63193" cy="63193"/>
             </a:xfrm>
             <a:prstGeom prst="ellipse">
               <a:avLst/>
@@ -7631,7 +7621,7 @@
                 <a:alpha val="100000"/>
               </a:srgbClr>
             </a:solidFill>
-            <a:ln w="9000" cap="rnd">
+            <a:ln w="11454" cap="rnd">
               <a:solidFill>
                 <a:srgbClr val="F8766D">
                   <a:alpha val="100000"/>
@@ -7655,8 +7645,8 @@
           </p:nvSpPr>
           <p:spPr>
             <a:xfrm>
-              <a:off x="5284158" y="2369540"/>
-              <a:ext cx="49651" cy="49651"/>
+              <a:off x="5120492" y="2617091"/>
+              <a:ext cx="63193" cy="63193"/>
             </a:xfrm>
             <a:prstGeom prst="ellipse">
               <a:avLst/>
@@ -7666,7 +7656,7 @@
                 <a:alpha val="100000"/>
               </a:srgbClr>
             </a:solidFill>
-            <a:ln w="9000" cap="rnd">
+            <a:ln w="11454" cap="rnd">
               <a:solidFill>
                 <a:srgbClr val="F8766D">
                   <a:alpha val="100000"/>
@@ -7690,8 +7680,8 @@
           </p:nvSpPr>
           <p:spPr>
             <a:xfrm>
-              <a:off x="5455898" y="2432180"/>
-              <a:ext cx="49651" cy="49651"/>
+              <a:off x="5284564" y="2694511"/>
+              <a:ext cx="63193" cy="63193"/>
             </a:xfrm>
             <a:prstGeom prst="ellipse">
               <a:avLst/>
@@ -7701,7 +7691,7 @@
                 <a:alpha val="100000"/>
               </a:srgbClr>
             </a:solidFill>
-            <a:ln w="9000" cap="rnd">
+            <a:ln w="11454" cap="rnd">
               <a:solidFill>
                 <a:srgbClr val="F8766D">
                   <a:alpha val="100000"/>
@@ -7725,8 +7715,8 @@
           </p:nvSpPr>
           <p:spPr>
             <a:xfrm>
-              <a:off x="3738499" y="2391379"/>
-              <a:ext cx="49651" cy="49651"/>
+              <a:off x="3643848" y="2644082"/>
+              <a:ext cx="63193" cy="63193"/>
             </a:xfrm>
             <a:prstGeom prst="ellipse">
               <a:avLst/>
@@ -7736,7 +7726,7 @@
                 <a:alpha val="100000"/>
               </a:srgbClr>
             </a:solidFill>
-            <a:ln w="9000" cap="rnd">
+            <a:ln w="11454" cap="rnd">
               <a:solidFill>
                 <a:srgbClr val="C77CFF">
                   <a:alpha val="100000"/>
@@ -7760,8 +7750,8 @@
           </p:nvSpPr>
           <p:spPr>
             <a:xfrm>
-              <a:off x="3841543" y="2411947"/>
-              <a:ext cx="49651" cy="49651"/>
+              <a:off x="3742291" y="2669504"/>
+              <a:ext cx="63193" cy="63193"/>
             </a:xfrm>
             <a:prstGeom prst="ellipse">
               <a:avLst/>
@@ -7771,7 +7761,7 @@
                 <a:alpha val="100000"/>
               </a:srgbClr>
             </a:solidFill>
-            <a:ln w="9000" cap="rnd">
+            <a:ln w="11454" cap="rnd">
               <a:solidFill>
                 <a:srgbClr val="C77CFF">
                   <a:alpha val="100000"/>
@@ -7795,8 +7785,8 @@
           </p:nvSpPr>
           <p:spPr>
             <a:xfrm>
-              <a:off x="4356763" y="2412934"/>
-              <a:ext cx="49651" cy="49651"/>
+              <a:off x="4234506" y="2670723"/>
+              <a:ext cx="63193" cy="63193"/>
             </a:xfrm>
             <a:prstGeom prst="ellipse">
               <a:avLst/>
@@ -7806,7 +7796,7 @@
                 <a:alpha val="100000"/>
               </a:srgbClr>
             </a:solidFill>
-            <a:ln w="9000" cap="rnd">
+            <a:ln w="11454" cap="rnd">
               <a:solidFill>
                 <a:srgbClr val="C77CFF">
                   <a:alpha val="100000"/>
@@ -7830,8 +7820,8 @@
           </p:nvSpPr>
           <p:spPr>
             <a:xfrm>
-              <a:off x="4459806" y="2330981"/>
-              <a:ext cx="49651" cy="49651"/>
+              <a:off x="4332949" y="2569434"/>
+              <a:ext cx="63193" cy="63193"/>
             </a:xfrm>
             <a:prstGeom prst="ellipse">
               <a:avLst/>
@@ -7841,7 +7831,7 @@
                 <a:alpha val="100000"/>
               </a:srgbClr>
             </a:solidFill>
-            <a:ln w="9000" cap="rnd">
+            <a:ln w="11454" cap="rnd">
               <a:solidFill>
                 <a:srgbClr val="C77CFF">
                   <a:alpha val="100000"/>
@@ -7865,8 +7855,8 @@
           </p:nvSpPr>
           <p:spPr>
             <a:xfrm>
-              <a:off x="4528502" y="2177230"/>
-              <a:ext cx="49651" cy="49651"/>
+              <a:off x="4398577" y="2379404"/>
+              <a:ext cx="63193" cy="63193"/>
             </a:xfrm>
             <a:prstGeom prst="ellipse">
               <a:avLst/>
@@ -7876,7 +7866,7 @@
                 <a:alpha val="100000"/>
               </a:srgbClr>
             </a:solidFill>
-            <a:ln w="9000" cap="rnd">
+            <a:ln w="11454" cap="rnd">
               <a:solidFill>
                 <a:srgbClr val="C77CFF">
                   <a:alpha val="100000"/>
@@ -7900,8 +7890,8 @@
           </p:nvSpPr>
           <p:spPr>
             <a:xfrm>
-              <a:off x="4562850" y="2058945"/>
-              <a:ext cx="49651" cy="49651"/>
+              <a:off x="4431392" y="2233210"/>
+              <a:ext cx="63193" cy="63193"/>
             </a:xfrm>
             <a:prstGeom prst="ellipse">
               <a:avLst/>
@@ -7911,7 +7901,7 @@
                 <a:alpha val="100000"/>
               </a:srgbClr>
             </a:solidFill>
-            <a:ln w="9000" cap="rnd">
+            <a:ln w="11454" cap="rnd">
               <a:solidFill>
                 <a:srgbClr val="C77CFF">
                   <a:alpha val="100000"/>
@@ -7935,8 +7925,8 @@
           </p:nvSpPr>
           <p:spPr>
             <a:xfrm>
-              <a:off x="4597198" y="1903493"/>
-              <a:ext cx="49651" cy="49651"/>
+              <a:off x="4464206" y="2041077"/>
+              <a:ext cx="63193" cy="63193"/>
             </a:xfrm>
             <a:prstGeom prst="ellipse">
               <a:avLst/>
@@ -7946,7 +7936,7 @@
                 <a:alpha val="100000"/>
               </a:srgbClr>
             </a:solidFill>
-            <a:ln w="9000" cap="rnd">
+            <a:ln w="11454" cap="rnd">
               <a:solidFill>
                 <a:srgbClr val="C77CFF">
                   <a:alpha val="100000"/>
@@ -7970,8 +7960,8 @@
           </p:nvSpPr>
           <p:spPr>
             <a:xfrm>
-              <a:off x="4631546" y="1787915"/>
-              <a:ext cx="49651" cy="49651"/>
+              <a:off x="4497020" y="1898229"/>
+              <a:ext cx="63193" cy="63193"/>
             </a:xfrm>
             <a:prstGeom prst="ellipse">
               <a:avLst/>
@@ -7981,7 +7971,7 @@
                 <a:alpha val="100000"/>
               </a:srgbClr>
             </a:solidFill>
-            <a:ln w="9000" cap="rnd">
+            <a:ln w="11454" cap="rnd">
               <a:solidFill>
                 <a:srgbClr val="C77CFF">
                   <a:alpha val="100000"/>
@@ -8005,8 +7995,8 @@
           </p:nvSpPr>
           <p:spPr>
             <a:xfrm>
-              <a:off x="4665894" y="1682638"/>
-              <a:ext cx="49651" cy="49651"/>
+              <a:off x="4529835" y="1768111"/>
+              <a:ext cx="63193" cy="63193"/>
             </a:xfrm>
             <a:prstGeom prst="ellipse">
               <a:avLst/>
@@ -8016,7 +8006,7 @@
                 <a:alpha val="100000"/>
               </a:srgbClr>
             </a:solidFill>
-            <a:ln w="9000" cap="rnd">
+            <a:ln w="11454" cap="rnd">
               <a:solidFill>
                 <a:srgbClr val="C77CFF">
                   <a:alpha val="100000"/>
@@ -8040,8 +8030,8 @@
           </p:nvSpPr>
           <p:spPr>
             <a:xfrm>
-              <a:off x="4700242" y="1635705"/>
-              <a:ext cx="49651" cy="49651"/>
+              <a:off x="4562649" y="1710104"/>
+              <a:ext cx="63193" cy="63193"/>
             </a:xfrm>
             <a:prstGeom prst="ellipse">
               <a:avLst/>
@@ -8051,7 +8041,7 @@
                 <a:alpha val="100000"/>
               </a:srgbClr>
             </a:solidFill>
-            <a:ln w="9000" cap="rnd">
+            <a:ln w="11454" cap="rnd">
               <a:solidFill>
                 <a:srgbClr val="C77CFF">
                   <a:alpha val="100000"/>
@@ -8075,8 +8065,8 @@
           </p:nvSpPr>
           <p:spPr>
             <a:xfrm>
-              <a:off x="4734590" y="1631112"/>
-              <a:ext cx="49651" cy="49651"/>
+              <a:off x="4595463" y="1704428"/>
+              <a:ext cx="63193" cy="63193"/>
             </a:xfrm>
             <a:prstGeom prst="ellipse">
               <a:avLst/>
@@ -8086,7 +8076,7 @@
                 <a:alpha val="100000"/>
               </a:srgbClr>
             </a:solidFill>
-            <a:ln w="9000" cap="rnd">
+            <a:ln w="11454" cap="rnd">
               <a:solidFill>
                 <a:srgbClr val="C77CFF">
                   <a:alpha val="100000"/>
@@ -8110,8 +8100,8 @@
           </p:nvSpPr>
           <p:spPr>
             <a:xfrm>
-              <a:off x="4768938" y="1648324"/>
-              <a:ext cx="49651" cy="49651"/>
+              <a:off x="4628277" y="1725701"/>
+              <a:ext cx="63193" cy="63193"/>
             </a:xfrm>
             <a:prstGeom prst="ellipse">
               <a:avLst/>
@@ -8121,7 +8111,7 @@
                 <a:alpha val="100000"/>
               </a:srgbClr>
             </a:solidFill>
-            <a:ln w="9000" cap="rnd">
+            <a:ln w="11454" cap="rnd">
               <a:solidFill>
                 <a:srgbClr val="C77CFF">
                   <a:alpha val="100000"/>
@@ -8145,8 +8135,8 @@
           </p:nvSpPr>
           <p:spPr>
             <a:xfrm>
-              <a:off x="4803286" y="1708879"/>
-              <a:ext cx="49651" cy="49651"/>
+              <a:off x="4661092" y="1800544"/>
+              <a:ext cx="63193" cy="63193"/>
             </a:xfrm>
             <a:prstGeom prst="ellipse">
               <a:avLst/>
@@ -8156,7 +8146,7 @@
                 <a:alpha val="100000"/>
               </a:srgbClr>
             </a:solidFill>
-            <a:ln w="9000" cap="rnd">
+            <a:ln w="11454" cap="rnd">
               <a:solidFill>
                 <a:srgbClr val="C77CFF">
                   <a:alpha val="100000"/>
@@ -8180,8 +8170,8 @@
           </p:nvSpPr>
           <p:spPr>
             <a:xfrm>
-              <a:off x="4837634" y="1775797"/>
-              <a:ext cx="49651" cy="49651"/>
+              <a:off x="4693906" y="1883251"/>
+              <a:ext cx="63193" cy="63193"/>
             </a:xfrm>
             <a:prstGeom prst="ellipse">
               <a:avLst/>
@@ -8191,7 +8181,7 @@
                 <a:alpha val="100000"/>
               </a:srgbClr>
             </a:solidFill>
-            <a:ln w="9000" cap="rnd">
+            <a:ln w="11454" cap="rnd">
               <a:solidFill>
                 <a:srgbClr val="C77CFF">
                   <a:alpha val="100000"/>
@@ -8215,8 +8205,8 @@
           </p:nvSpPr>
           <p:spPr>
             <a:xfrm>
-              <a:off x="4871982" y="1856102"/>
-              <a:ext cx="49651" cy="49651"/>
+              <a:off x="4726720" y="1982504"/>
+              <a:ext cx="63193" cy="63193"/>
             </a:xfrm>
             <a:prstGeom prst="ellipse">
               <a:avLst/>
@@ -8226,7 +8216,7 @@
                 <a:alpha val="100000"/>
               </a:srgbClr>
             </a:solidFill>
-            <a:ln w="9000" cap="rnd">
+            <a:ln w="11454" cap="rnd">
               <a:solidFill>
                 <a:srgbClr val="C77CFF">
                   <a:alpha val="100000"/>
@@ -8250,8 +8240,8 @@
           </p:nvSpPr>
           <p:spPr>
             <a:xfrm>
-              <a:off x="4906330" y="1944107"/>
-              <a:ext cx="49651" cy="49651"/>
+              <a:off x="4759535" y="2091275"/>
+              <a:ext cx="63193" cy="63193"/>
             </a:xfrm>
             <a:prstGeom prst="ellipse">
               <a:avLst/>
@@ -8261,7 +8251,7 @@
                 <a:alpha val="100000"/>
               </a:srgbClr>
             </a:solidFill>
-            <a:ln w="9000" cap="rnd">
+            <a:ln w="11454" cap="rnd">
               <a:solidFill>
                 <a:srgbClr val="C77CFF">
                   <a:alpha val="100000"/>
@@ -8285,8 +8275,8 @@
           </p:nvSpPr>
           <p:spPr>
             <a:xfrm>
-              <a:off x="5249810" y="2417344"/>
-              <a:ext cx="49651" cy="49651"/>
+              <a:off x="5087678" y="2676175"/>
+              <a:ext cx="63193" cy="63193"/>
             </a:xfrm>
             <a:prstGeom prst="ellipse">
               <a:avLst/>
@@ -8296,7 +8286,7 @@
                 <a:alpha val="100000"/>
               </a:srgbClr>
             </a:solidFill>
-            <a:ln w="9000" cap="rnd">
+            <a:ln w="11454" cap="rnd">
               <a:solidFill>
                 <a:srgbClr val="C77CFF">
                   <a:alpha val="100000"/>
@@ -8320,8 +8310,8 @@
           </p:nvSpPr>
           <p:spPr>
             <a:xfrm>
-              <a:off x="5455898" y="2449139"/>
-              <a:ext cx="49651" cy="49651"/>
+              <a:off x="5284564" y="2715472"/>
+              <a:ext cx="63193" cy="63193"/>
             </a:xfrm>
             <a:prstGeom prst="ellipse">
               <a:avLst/>
@@ -8331,7 +8321,7 @@
                 <a:alpha val="100000"/>
               </a:srgbClr>
             </a:solidFill>
-            <a:ln w="9000" cap="rnd">
+            <a:ln w="11454" cap="rnd">
               <a:solidFill>
                 <a:srgbClr val="C77CFF">
                   <a:alpha val="100000"/>
@@ -8355,8 +8345,8 @@
           </p:nvSpPr>
           <p:spPr>
             <a:xfrm>
-              <a:off x="4288067" y="2426841"/>
-              <a:ext cx="49651" cy="49651"/>
+              <a:off x="4168877" y="2687912"/>
+              <a:ext cx="63193" cy="63193"/>
             </a:xfrm>
             <a:prstGeom prst="ellipse">
               <a:avLst/>
@@ -8366,7 +8356,7 @@
                 <a:alpha val="100000"/>
               </a:srgbClr>
             </a:solidFill>
-            <a:ln w="9000" cap="rnd">
+            <a:ln w="11454" cap="rnd">
               <a:solidFill>
                 <a:srgbClr val="DE8C00">
                   <a:alpha val="100000"/>
@@ -8390,8 +8380,8 @@
           </p:nvSpPr>
           <p:spPr>
             <a:xfrm>
-              <a:off x="4425458" y="2264720"/>
-              <a:ext cx="49651" cy="49651"/>
+              <a:off x="4300134" y="2487538"/>
+              <a:ext cx="63193" cy="63193"/>
             </a:xfrm>
             <a:prstGeom prst="ellipse">
               <a:avLst/>
@@ -8401,7 +8391,7 @@
                 <a:alpha val="100000"/>
               </a:srgbClr>
             </a:solidFill>
-            <a:ln w="9000" cap="rnd">
+            <a:ln w="11454" cap="rnd">
               <a:solidFill>
                 <a:srgbClr val="DE8C00">
                   <a:alpha val="100000"/>
@@ -8425,8 +8415,8 @@
           </p:nvSpPr>
           <p:spPr>
             <a:xfrm>
-              <a:off x="4459806" y="2159888"/>
-              <a:ext cx="49651" cy="49651"/>
+              <a:off x="4332949" y="2357970"/>
+              <a:ext cx="63193" cy="63193"/>
             </a:xfrm>
             <a:prstGeom prst="ellipse">
               <a:avLst/>
@@ -8436,7 +8426,7 @@
                 <a:alpha val="100000"/>
               </a:srgbClr>
             </a:solidFill>
-            <a:ln w="9000" cap="rnd">
+            <a:ln w="11454" cap="rnd">
               <a:solidFill>
                 <a:srgbClr val="DE8C00">
                   <a:alpha val="100000"/>
@@ -8460,8 +8450,8 @@
           </p:nvSpPr>
           <p:spPr>
             <a:xfrm>
-              <a:off x="4494154" y="2020137"/>
-              <a:ext cx="49651" cy="49651"/>
+              <a:off x="4365763" y="2185244"/>
+              <a:ext cx="63193" cy="63193"/>
             </a:xfrm>
             <a:prstGeom prst="ellipse">
               <a:avLst/>
@@ -8471,7 +8461,7 @@
                 <a:alpha val="100000"/>
               </a:srgbClr>
             </a:solidFill>
-            <a:ln w="9000" cap="rnd">
+            <a:ln w="11454" cap="rnd">
               <a:solidFill>
                 <a:srgbClr val="DE8C00">
                   <a:alpha val="100000"/>
@@ -8495,8 +8485,8 @@
           </p:nvSpPr>
           <p:spPr>
             <a:xfrm>
-              <a:off x="4528502" y="1863611"/>
-              <a:ext cx="49651" cy="49651"/>
+              <a:off x="4398577" y="1991785"/>
+              <a:ext cx="63193" cy="63193"/>
             </a:xfrm>
             <a:prstGeom prst="ellipse">
               <a:avLst/>
@@ -8506,7 +8496,7 @@
                 <a:alpha val="100000"/>
               </a:srgbClr>
             </a:solidFill>
-            <a:ln w="9000" cap="rnd">
+            <a:ln w="11454" cap="rnd">
               <a:solidFill>
                 <a:srgbClr val="DE8C00">
                   <a:alpha val="100000"/>
@@ -8530,8 +8520,8 @@
           </p:nvSpPr>
           <p:spPr>
             <a:xfrm>
-              <a:off x="4562850" y="1723403"/>
-              <a:ext cx="49651" cy="49651"/>
+              <a:off x="4431392" y="1818495"/>
+              <a:ext cx="63193" cy="63193"/>
             </a:xfrm>
             <a:prstGeom prst="ellipse">
               <a:avLst/>
@@ -8541,7 +8531,7 @@
                 <a:alpha val="100000"/>
               </a:srgbClr>
             </a:solidFill>
-            <a:ln w="9000" cap="rnd">
+            <a:ln w="11454" cap="rnd">
               <a:solidFill>
                 <a:srgbClr val="DE8C00">
                   <a:alpha val="100000"/>
@@ -8565,8 +8555,8 @@
           </p:nvSpPr>
           <p:spPr>
             <a:xfrm>
-              <a:off x="4597198" y="1631029"/>
-              <a:ext cx="49651" cy="49651"/>
+              <a:off x="4464206" y="1704325"/>
+              <a:ext cx="63193" cy="63193"/>
             </a:xfrm>
             <a:prstGeom prst="ellipse">
               <a:avLst/>
@@ -8576,7 +8566,7 @@
                 <a:alpha val="100000"/>
               </a:srgbClr>
             </a:solidFill>
-            <a:ln w="9000" cap="rnd">
+            <a:ln w="11454" cap="rnd">
               <a:solidFill>
                 <a:srgbClr val="DE8C00">
                   <a:alpha val="100000"/>
@@ -8600,8 +8590,8 @@
           </p:nvSpPr>
           <p:spPr>
             <a:xfrm>
-              <a:off x="4631546" y="1608278"/>
-              <a:ext cx="49651" cy="49651"/>
+              <a:off x="4497020" y="1676206"/>
+              <a:ext cx="63193" cy="63193"/>
             </a:xfrm>
             <a:prstGeom prst="ellipse">
               <a:avLst/>
@@ -8611,7 +8601,7 @@
                 <a:alpha val="100000"/>
               </a:srgbClr>
             </a:solidFill>
-            <a:ln w="9000" cap="rnd">
+            <a:ln w="11454" cap="rnd">
               <a:solidFill>
                 <a:srgbClr val="DE8C00">
                   <a:alpha val="100000"/>
@@ -8635,8 +8625,8 @@
           </p:nvSpPr>
           <p:spPr>
             <a:xfrm>
-              <a:off x="4665894" y="1644396"/>
-              <a:ext cx="49651" cy="49651"/>
+              <a:off x="4529835" y="1720846"/>
+              <a:ext cx="63193" cy="63193"/>
             </a:xfrm>
             <a:prstGeom prst="ellipse">
               <a:avLst/>
@@ -8646,7 +8636,7 @@
                 <a:alpha val="100000"/>
               </a:srgbClr>
             </a:solidFill>
-            <a:ln w="9000" cap="rnd">
+            <a:ln w="11454" cap="rnd">
               <a:solidFill>
                 <a:srgbClr val="DE8C00">
                   <a:alpha val="100000"/>
@@ -8670,8 +8660,8 @@
           </p:nvSpPr>
           <p:spPr>
             <a:xfrm>
-              <a:off x="4700242" y="1715742"/>
-              <a:ext cx="49651" cy="49651"/>
+              <a:off x="4562649" y="1809026"/>
+              <a:ext cx="63193" cy="63193"/>
             </a:xfrm>
             <a:prstGeom prst="ellipse">
               <a:avLst/>
@@ -8681,7 +8671,7 @@
                 <a:alpha val="100000"/>
               </a:srgbClr>
             </a:solidFill>
-            <a:ln w="9000" cap="rnd">
+            <a:ln w="11454" cap="rnd">
               <a:solidFill>
                 <a:srgbClr val="DE8C00">
                   <a:alpha val="100000"/>
@@ -8705,8 +8695,8 @@
           </p:nvSpPr>
           <p:spPr>
             <a:xfrm>
-              <a:off x="4734590" y="1800134"/>
-              <a:ext cx="49651" cy="49651"/>
+              <a:off x="4595463" y="1913331"/>
+              <a:ext cx="63193" cy="63193"/>
             </a:xfrm>
             <a:prstGeom prst="ellipse">
               <a:avLst/>
@@ -8716,7 +8706,7 @@
                 <a:alpha val="100000"/>
               </a:srgbClr>
             </a:solidFill>
-            <a:ln w="9000" cap="rnd">
+            <a:ln w="11454" cap="rnd">
               <a:solidFill>
                 <a:srgbClr val="DE8C00">
                   <a:alpha val="100000"/>
@@ -8740,8 +8730,8 @@
           </p:nvSpPr>
           <p:spPr>
             <a:xfrm>
-              <a:off x="4768938" y="1884649"/>
-              <a:ext cx="49651" cy="49651"/>
+              <a:off x="4628277" y="2017788"/>
+              <a:ext cx="63193" cy="63193"/>
             </a:xfrm>
             <a:prstGeom prst="ellipse">
               <a:avLst/>
@@ -8751,7 +8741,7 @@
                 <a:alpha val="100000"/>
               </a:srgbClr>
             </a:solidFill>
-            <a:ln w="9000" cap="rnd">
+            <a:ln w="11454" cap="rnd">
               <a:solidFill>
                 <a:srgbClr val="DE8C00">
                   <a:alpha val="100000"/>
@@ -8775,8 +8765,8 @@
           </p:nvSpPr>
           <p:spPr>
             <a:xfrm>
-              <a:off x="4803286" y="1964323"/>
-              <a:ext cx="49651" cy="49651"/>
+              <a:off x="4661092" y="2116260"/>
+              <a:ext cx="63193" cy="63193"/>
             </a:xfrm>
             <a:prstGeom prst="ellipse">
               <a:avLst/>
@@ -8786,7 +8776,7 @@
                 <a:alpha val="100000"/>
               </a:srgbClr>
             </a:solidFill>
-            <a:ln w="9000" cap="rnd">
+            <a:ln w="11454" cap="rnd">
               <a:solidFill>
                 <a:srgbClr val="DE8C00">
                   <a:alpha val="100000"/>
@@ -8810,8 +8800,8 @@
           </p:nvSpPr>
           <p:spPr>
             <a:xfrm>
-              <a:off x="4837634" y="2037831"/>
-              <a:ext cx="49651" cy="49651"/>
+              <a:off x="4693906" y="2207113"/>
+              <a:ext cx="63193" cy="63193"/>
             </a:xfrm>
             <a:prstGeom prst="ellipse">
               <a:avLst/>
@@ -8821,7 +8811,7 @@
                 <a:alpha val="100000"/>
               </a:srgbClr>
             </a:solidFill>
-            <a:ln w="9000" cap="rnd">
+            <a:ln w="11454" cap="rnd">
               <a:solidFill>
                 <a:srgbClr val="DE8C00">
                   <a:alpha val="100000"/>
@@ -8845,8 +8835,8 @@
           </p:nvSpPr>
           <p:spPr>
             <a:xfrm>
-              <a:off x="4871982" y="2104075"/>
-              <a:ext cx="49651" cy="49651"/>
+              <a:off x="4726720" y="2288988"/>
+              <a:ext cx="63193" cy="63193"/>
             </a:xfrm>
             <a:prstGeom prst="ellipse">
               <a:avLst/>
@@ -8856,7 +8846,7 @@
                 <a:alpha val="100000"/>
               </a:srgbClr>
             </a:solidFill>
-            <a:ln w="9000" cap="rnd">
+            <a:ln w="11454" cap="rnd">
               <a:solidFill>
                 <a:srgbClr val="DE8C00">
                   <a:alpha val="100000"/>
@@ -8880,8 +8870,8 @@
           </p:nvSpPr>
           <p:spPr>
             <a:xfrm>
-              <a:off x="4906330" y="2163493"/>
-              <a:ext cx="49651" cy="49651"/>
+              <a:off x="4759535" y="2362426"/>
+              <a:ext cx="63193" cy="63193"/>
             </a:xfrm>
             <a:prstGeom prst="ellipse">
               <a:avLst/>
@@ -8891,7 +8881,7 @@
                 <a:alpha val="100000"/>
               </a:srgbClr>
             </a:solidFill>
-            <a:ln w="9000" cap="rnd">
+            <a:ln w="11454" cap="rnd">
               <a:solidFill>
                 <a:srgbClr val="DE8C00">
                   <a:alpha val="100000"/>
@@ -8915,8 +8905,8 @@
           </p:nvSpPr>
           <p:spPr>
             <a:xfrm>
-              <a:off x="4975026" y="2260857"/>
-              <a:ext cx="49651" cy="49651"/>
+              <a:off x="4825163" y="2482763"/>
+              <a:ext cx="63193" cy="63193"/>
             </a:xfrm>
             <a:prstGeom prst="ellipse">
               <a:avLst/>
@@ -8926,7 +8916,7 @@
                 <a:alpha val="100000"/>
               </a:srgbClr>
             </a:solidFill>
-            <a:ln w="9000" cap="rnd">
+            <a:ln w="11454" cap="rnd">
               <a:solidFill>
                 <a:srgbClr val="DE8C00">
                   <a:alpha val="100000"/>
@@ -8950,8 +8940,8 @@
           </p:nvSpPr>
           <p:spPr>
             <a:xfrm>
-              <a:off x="5078070" y="2358235"/>
-              <a:ext cx="49651" cy="49651"/>
+              <a:off x="4923606" y="2603119"/>
+              <a:ext cx="63193" cy="63193"/>
             </a:xfrm>
             <a:prstGeom prst="ellipse">
               <a:avLst/>
@@ -8961,7 +8951,7 @@
                 <a:alpha val="100000"/>
               </a:srgbClr>
             </a:solidFill>
-            <a:ln w="9000" cap="rnd">
+            <a:ln w="11454" cap="rnd">
               <a:solidFill>
                 <a:srgbClr val="DE8C00">
                   <a:alpha val="100000"/>
@@ -8985,8 +8975,8 @@
           </p:nvSpPr>
           <p:spPr>
             <a:xfrm>
-              <a:off x="5455898" y="2450670"/>
-              <a:ext cx="49651" cy="49651"/>
+              <a:off x="5284564" y="2717364"/>
+              <a:ext cx="63193" cy="63193"/>
             </a:xfrm>
             <a:prstGeom prst="ellipse">
               <a:avLst/>
@@ -8996,7 +8986,7 @@
                 <a:alpha val="100000"/>
               </a:srgbClr>
             </a:solidFill>
-            <a:ln w="9000" cap="rnd">
+            <a:ln w="11454" cap="rnd">
               <a:solidFill>
                 <a:srgbClr val="DE8C00">
                   <a:alpha val="100000"/>
@@ -9020,12 +9010,13 @@
           </p:nvSpPr>
           <p:spPr>
             <a:xfrm>
-              <a:off x="3625933" y="1315914"/>
-              <a:ext cx="1889138" cy="1171063"/>
+              <a:off x="3544187" y="1315770"/>
+              <a:ext cx="1804787" cy="1447380"/>
             </a:xfrm>
             <a:prstGeom prst="rect">
               <a:avLst/>
             </a:prstGeom>
+            <a:noFill/>
           </p:spPr>
           <p:txBody>
             <a:bodyPr/>
@@ -9041,17 +9032,13 @@
           </p:nvSpPr>
           <p:spPr>
             <a:xfrm>
-              <a:off x="3625933" y="2850534"/>
-              <a:ext cx="1889138" cy="1171063"/>
+              <a:off x="3544187" y="3126564"/>
+              <a:ext cx="1804787" cy="1447380"/>
             </a:xfrm>
             <a:prstGeom prst="rect">
               <a:avLst/>
             </a:prstGeom>
-            <a:solidFill>
-              <a:srgbClr val="FFFFFF">
-                <a:alpha val="100000"/>
-              </a:srgbClr>
-            </a:solidFill>
+            <a:noFill/>
           </p:spPr>
           <p:txBody>
             <a:bodyPr/>
@@ -9067,60 +9054,60 @@
           </p:nvSpPr>
           <p:spPr>
             <a:xfrm>
-              <a:off x="4553328" y="3046453"/>
-              <a:ext cx="927395" cy="953309"/>
+              <a:off x="4430174" y="3368710"/>
+              <a:ext cx="885986" cy="1178247"/>
             </a:xfrm>
             <a:custGeom>
               <a:avLst/>
               <a:pathLst>
-                <a:path w="927395" h="953309">
+                <a:path w="885986" h="1178247">
                   <a:moveTo>
-                    <a:pt x="0" y="945428"/>
+                    <a:pt x="0" y="1168506"/>
                   </a:moveTo>
                   <a:lnTo>
-                    <a:pt x="68695" y="714052"/>
-                  </a:lnTo>
-                  <a:lnTo>
-                    <a:pt x="103043" y="377380"/>
-                  </a:lnTo>
-                  <a:lnTo>
-                    <a:pt x="137391" y="60651"/>
-                  </a:lnTo>
-                  <a:lnTo>
-                    <a:pt x="171739" y="0"/>
-                  </a:lnTo>
-                  <a:lnTo>
-                    <a:pt x="206087" y="117900"/>
-                  </a:lnTo>
-                  <a:lnTo>
-                    <a:pt x="274783" y="306663"/>
-                  </a:lnTo>
-                  <a:lnTo>
-                    <a:pt x="309131" y="334946"/>
-                  </a:lnTo>
-                  <a:lnTo>
-                    <a:pt x="343479" y="398491"/>
-                  </a:lnTo>
-                  <a:lnTo>
-                    <a:pt x="377827" y="481519"/>
-                  </a:lnTo>
-                  <a:lnTo>
-                    <a:pt x="446523" y="665607"/>
-                  </a:lnTo>
-                  <a:lnTo>
-                    <a:pt x="618263" y="773745"/>
-                  </a:lnTo>
-                  <a:lnTo>
-                    <a:pt x="652611" y="762657"/>
-                  </a:lnTo>
-                  <a:lnTo>
-                    <a:pt x="686959" y="762086"/>
-                  </a:lnTo>
-                  <a:lnTo>
-                    <a:pt x="721307" y="782408"/>
-                  </a:lnTo>
-                  <a:lnTo>
-                    <a:pt x="927395" y="953309"/>
+                    <a:pt x="65628" y="882535"/>
+                  </a:lnTo>
+                  <a:lnTo>
+                    <a:pt x="98442" y="466424"/>
+                  </a:lnTo>
+                  <a:lnTo>
+                    <a:pt x="131257" y="74962"/>
+                  </a:lnTo>
+                  <a:lnTo>
+                    <a:pt x="164071" y="0"/>
+                  </a:lnTo>
+                  <a:lnTo>
+                    <a:pt x="196885" y="145719"/>
+                  </a:lnTo>
+                  <a:lnTo>
+                    <a:pt x="262514" y="379022"/>
+                  </a:lnTo>
+                  <a:lnTo>
+                    <a:pt x="295328" y="413979"/>
+                  </a:lnTo>
+                  <a:lnTo>
+                    <a:pt x="328143" y="492517"/>
+                  </a:lnTo>
+                  <a:lnTo>
+                    <a:pt x="360957" y="595136"/>
+                  </a:lnTo>
+                  <a:lnTo>
+                    <a:pt x="426586" y="822660"/>
+                  </a:lnTo>
+                  <a:lnTo>
+                    <a:pt x="590657" y="956314"/>
+                  </a:lnTo>
+                  <a:lnTo>
+                    <a:pt x="623471" y="942609"/>
+                  </a:lnTo>
+                  <a:lnTo>
+                    <a:pt x="656286" y="941904"/>
+                  </a:lnTo>
+                  <a:lnTo>
+                    <a:pt x="689100" y="967021"/>
+                  </a:lnTo>
+                  <a:lnTo>
+                    <a:pt x="885986" y="1178247"/>
                   </a:lnTo>
                 </a:path>
               </a:pathLst>
@@ -9149,54 +9136,54 @@
           </p:nvSpPr>
           <p:spPr>
             <a:xfrm>
-              <a:off x="4518980" y="3418854"/>
-              <a:ext cx="961743" cy="576735"/>
+              <a:off x="4397360" y="3828981"/>
+              <a:ext cx="918800" cy="712818"/>
             </a:xfrm>
             <a:custGeom>
               <a:avLst/>
               <a:pathLst>
-                <a:path w="961743" h="576735">
+                <a:path w="918800" h="712818">
                   <a:moveTo>
-                    <a:pt x="0" y="554213"/>
+                    <a:pt x="0" y="684982"/>
                   </a:moveTo>
                   <a:lnTo>
-                    <a:pt x="34347" y="523618"/>
-                  </a:lnTo>
-                  <a:lnTo>
-                    <a:pt x="103043" y="409320"/>
-                  </a:lnTo>
-                  <a:lnTo>
-                    <a:pt x="137391" y="334093"/>
-                  </a:lnTo>
-                  <a:lnTo>
-                    <a:pt x="240435" y="111144"/>
-                  </a:lnTo>
-                  <a:lnTo>
-                    <a:pt x="274783" y="42070"/>
-                  </a:lnTo>
-                  <a:lnTo>
-                    <a:pt x="309131" y="0"/>
-                  </a:lnTo>
-                  <a:lnTo>
-                    <a:pt x="343479" y="6068"/>
-                  </a:lnTo>
-                  <a:lnTo>
-                    <a:pt x="377827" y="53733"/>
-                  </a:lnTo>
-                  <a:lnTo>
-                    <a:pt x="412175" y="124111"/>
-                  </a:lnTo>
-                  <a:lnTo>
-                    <a:pt x="446523" y="199712"/>
-                  </a:lnTo>
-                  <a:lnTo>
-                    <a:pt x="721307" y="528950"/>
-                  </a:lnTo>
-                  <a:lnTo>
-                    <a:pt x="858699" y="563013"/>
-                  </a:lnTo>
-                  <a:lnTo>
-                    <a:pt x="961743" y="576735"/>
+                    <a:pt x="32814" y="647168"/>
+                  </a:lnTo>
+                  <a:lnTo>
+                    <a:pt x="98442" y="505901"/>
+                  </a:lnTo>
+                  <a:lnTo>
+                    <a:pt x="131257" y="412924"/>
+                  </a:lnTo>
+                  <a:lnTo>
+                    <a:pt x="229700" y="137370"/>
+                  </a:lnTo>
+                  <a:lnTo>
+                    <a:pt x="262514" y="51996"/>
+                  </a:lnTo>
+                  <a:lnTo>
+                    <a:pt x="295328" y="0"/>
+                  </a:lnTo>
+                  <a:lnTo>
+                    <a:pt x="328143" y="7500"/>
+                  </a:lnTo>
+                  <a:lnTo>
+                    <a:pt x="360957" y="66412"/>
+                  </a:lnTo>
+                  <a:lnTo>
+                    <a:pt x="393771" y="153396"/>
+                  </a:lnTo>
+                  <a:lnTo>
+                    <a:pt x="426586" y="246835"/>
+                  </a:lnTo>
+                  <a:lnTo>
+                    <a:pt x="689100" y="653758"/>
+                  </a:lnTo>
+                  <a:lnTo>
+                    <a:pt x="820357" y="695859"/>
+                  </a:lnTo>
+                  <a:lnTo>
+                    <a:pt x="918800" y="712818"/>
                   </a:lnTo>
                 </a:path>
               </a:pathLst>
@@ -9225,66 +9212,66 @@
           </p:nvSpPr>
           <p:spPr>
             <a:xfrm>
-              <a:off x="4278545" y="3371006"/>
-              <a:ext cx="1202178" cy="618865"/>
+              <a:off x="4167659" y="3769843"/>
+              <a:ext cx="1148501" cy="764889"/>
             </a:xfrm>
             <a:custGeom>
               <a:avLst/>
               <a:pathLst>
-                <a:path w="1202178" h="618865">
+                <a:path w="1148501" h="764889">
                   <a:moveTo>
-                    <a:pt x="0" y="618865"/>
+                    <a:pt x="0" y="764889"/>
                   </a:moveTo>
                   <a:lnTo>
-                    <a:pt x="68695" y="602580"/>
-                  </a:lnTo>
-                  <a:lnTo>
-                    <a:pt x="103043" y="591141"/>
-                  </a:lnTo>
-                  <a:lnTo>
-                    <a:pt x="206087" y="538139"/>
-                  </a:lnTo>
-                  <a:lnTo>
-                    <a:pt x="309131" y="438976"/>
-                  </a:lnTo>
-                  <a:lnTo>
-                    <a:pt x="377827" y="331627"/>
-                  </a:lnTo>
-                  <a:lnTo>
-                    <a:pt x="412175" y="265991"/>
-                  </a:lnTo>
-                  <a:lnTo>
-                    <a:pt x="480871" y="129329"/>
-                  </a:lnTo>
-                  <a:lnTo>
-                    <a:pt x="515219" y="67970"/>
-                  </a:lnTo>
-                  <a:lnTo>
-                    <a:pt x="549567" y="22385"/>
-                  </a:lnTo>
-                  <a:lnTo>
-                    <a:pt x="583915" y="0"/>
-                  </a:lnTo>
-                  <a:lnTo>
-                    <a:pt x="618263" y="2770"/>
-                  </a:lnTo>
-                  <a:lnTo>
-                    <a:pt x="652611" y="29607"/>
-                  </a:lnTo>
-                  <a:lnTo>
-                    <a:pt x="686959" y="77664"/>
-                  </a:lnTo>
-                  <a:lnTo>
-                    <a:pt x="721307" y="141671"/>
-                  </a:lnTo>
-                  <a:lnTo>
-                    <a:pt x="790003" y="280799"/>
-                  </a:lnTo>
-                  <a:lnTo>
-                    <a:pt x="996091" y="529299"/>
-                  </a:lnTo>
-                  <a:lnTo>
-                    <a:pt x="1202178" y="602570"/>
+                    <a:pt x="65628" y="744761"/>
+                  </a:lnTo>
+                  <a:lnTo>
+                    <a:pt x="98442" y="730624"/>
+                  </a:lnTo>
+                  <a:lnTo>
+                    <a:pt x="196885" y="665116"/>
+                  </a:lnTo>
+                  <a:lnTo>
+                    <a:pt x="295328" y="542555"/>
+                  </a:lnTo>
+                  <a:lnTo>
+                    <a:pt x="360957" y="409876"/>
+                  </a:lnTo>
+                  <a:lnTo>
+                    <a:pt x="393771" y="328753"/>
+                  </a:lnTo>
+                  <a:lnTo>
+                    <a:pt x="459400" y="159845"/>
+                  </a:lnTo>
+                  <a:lnTo>
+                    <a:pt x="492214" y="84008"/>
+                  </a:lnTo>
+                  <a:lnTo>
+                    <a:pt x="525029" y="27667"/>
+                  </a:lnTo>
+                  <a:lnTo>
+                    <a:pt x="557843" y="0"/>
+                  </a:lnTo>
+                  <a:lnTo>
+                    <a:pt x="590657" y="3424"/>
+                  </a:lnTo>
+                  <a:lnTo>
+                    <a:pt x="623471" y="36594"/>
+                  </a:lnTo>
+                  <a:lnTo>
+                    <a:pt x="656286" y="95989"/>
+                  </a:lnTo>
+                  <a:lnTo>
+                    <a:pt x="689100" y="175099"/>
+                  </a:lnTo>
+                  <a:lnTo>
+                    <a:pt x="754729" y="347055"/>
+                  </a:lnTo>
+                  <a:lnTo>
+                    <a:pt x="951615" y="654189"/>
+                  </a:lnTo>
+                  <a:lnTo>
+                    <a:pt x="1148501" y="744749"/>
                   </a:lnTo>
                 </a:path>
               </a:pathLst>
@@ -9313,8 +9300,8 @@
           </p:nvSpPr>
           <p:spPr>
             <a:xfrm>
-              <a:off x="4253719" y="3965045"/>
-              <a:ext cx="49651" cy="49651"/>
+              <a:off x="4136063" y="4503135"/>
+              <a:ext cx="63193" cy="63193"/>
             </a:xfrm>
             <a:prstGeom prst="ellipse">
               <a:avLst/>
@@ -9324,7 +9311,7 @@
                 <a:alpha val="100000"/>
               </a:srgbClr>
             </a:solidFill>
-            <a:ln w="9000" cap="rnd">
+            <a:ln w="11454" cap="rnd">
               <a:solidFill>
                 <a:srgbClr val="F564E3">
                   <a:alpha val="100000"/>
@@ -9348,8 +9335,8 @@
           </p:nvSpPr>
           <p:spPr>
             <a:xfrm>
-              <a:off x="4322415" y="3948760"/>
-              <a:ext cx="49651" cy="49651"/>
+              <a:off x="4201691" y="4483007"/>
+              <a:ext cx="63193" cy="63193"/>
             </a:xfrm>
             <a:prstGeom prst="ellipse">
               <a:avLst/>
@@ -9359,7 +9346,7 @@
                 <a:alpha val="100000"/>
               </a:srgbClr>
             </a:solidFill>
-            <a:ln w="9000" cap="rnd">
+            <a:ln w="11454" cap="rnd">
               <a:solidFill>
                 <a:srgbClr val="F564E3">
                   <a:alpha val="100000"/>
@@ -9383,8 +9370,8 @@
           </p:nvSpPr>
           <p:spPr>
             <a:xfrm>
-              <a:off x="4356763" y="3937321"/>
-              <a:ext cx="49651" cy="49651"/>
+              <a:off x="4234506" y="4468870"/>
+              <a:ext cx="63193" cy="63193"/>
             </a:xfrm>
             <a:prstGeom prst="ellipse">
               <a:avLst/>
@@ -9394,7 +9381,7 @@
                 <a:alpha val="100000"/>
               </a:srgbClr>
             </a:solidFill>
-            <a:ln w="9000" cap="rnd">
+            <a:ln w="11454" cap="rnd">
               <a:solidFill>
                 <a:srgbClr val="F564E3">
                   <a:alpha val="100000"/>
@@ -9418,8 +9405,8 @@
           </p:nvSpPr>
           <p:spPr>
             <a:xfrm>
-              <a:off x="4459806" y="3884319"/>
-              <a:ext cx="49651" cy="49651"/>
+              <a:off x="4332949" y="4403362"/>
+              <a:ext cx="63193" cy="63193"/>
             </a:xfrm>
             <a:prstGeom prst="ellipse">
               <a:avLst/>
@@ -9429,7 +9416,7 @@
                 <a:alpha val="100000"/>
               </a:srgbClr>
             </a:solidFill>
-            <a:ln w="9000" cap="rnd">
+            <a:ln w="11454" cap="rnd">
               <a:solidFill>
                 <a:srgbClr val="F564E3">
                   <a:alpha val="100000"/>
@@ -9453,8 +9440,8 @@
           </p:nvSpPr>
           <p:spPr>
             <a:xfrm>
-              <a:off x="4562850" y="3785156"/>
-              <a:ext cx="49651" cy="49651"/>
+              <a:off x="4431392" y="4280801"/>
+              <a:ext cx="63193" cy="63193"/>
             </a:xfrm>
             <a:prstGeom prst="ellipse">
               <a:avLst/>
@@ -9464,7 +9451,7 @@
                 <a:alpha val="100000"/>
               </a:srgbClr>
             </a:solidFill>
-            <a:ln w="9000" cap="rnd">
+            <a:ln w="11454" cap="rnd">
               <a:solidFill>
                 <a:srgbClr val="F564E3">
                   <a:alpha val="100000"/>
@@ -9488,8 +9475,8 @@
           </p:nvSpPr>
           <p:spPr>
             <a:xfrm>
-              <a:off x="4631546" y="3677807"/>
-              <a:ext cx="49651" cy="49651"/>
+              <a:off x="4497020" y="4148122"/>
+              <a:ext cx="63193" cy="63193"/>
             </a:xfrm>
             <a:prstGeom prst="ellipse">
               <a:avLst/>
@@ -9499,7 +9486,7 @@
                 <a:alpha val="100000"/>
               </a:srgbClr>
             </a:solidFill>
-            <a:ln w="9000" cap="rnd">
+            <a:ln w="11454" cap="rnd">
               <a:solidFill>
                 <a:srgbClr val="F564E3">
                   <a:alpha val="100000"/>
@@ -9523,8 +9510,8 @@
           </p:nvSpPr>
           <p:spPr>
             <a:xfrm>
-              <a:off x="4665894" y="3612171"/>
-              <a:ext cx="49651" cy="49651"/>
+              <a:off x="4529835" y="4066999"/>
+              <a:ext cx="63193" cy="63193"/>
             </a:xfrm>
             <a:prstGeom prst="ellipse">
               <a:avLst/>
@@ -9534,7 +9521,7 @@
                 <a:alpha val="100000"/>
               </a:srgbClr>
             </a:solidFill>
-            <a:ln w="9000" cap="rnd">
+            <a:ln w="11454" cap="rnd">
               <a:solidFill>
                 <a:srgbClr val="F564E3">
                   <a:alpha val="100000"/>
@@ -9558,8 +9545,8 @@
           </p:nvSpPr>
           <p:spPr>
             <a:xfrm>
-              <a:off x="4734590" y="3475509"/>
-              <a:ext cx="49651" cy="49651"/>
+              <a:off x="4595463" y="3898091"/>
+              <a:ext cx="63193" cy="63193"/>
             </a:xfrm>
             <a:prstGeom prst="ellipse">
               <a:avLst/>
@@ -9569,7 +9556,7 @@
                 <a:alpha val="100000"/>
               </a:srgbClr>
             </a:solidFill>
-            <a:ln w="9000" cap="rnd">
+            <a:ln w="11454" cap="rnd">
               <a:solidFill>
                 <a:srgbClr val="F564E3">
                   <a:alpha val="100000"/>
@@ -9593,8 +9580,8 @@
           </p:nvSpPr>
           <p:spPr>
             <a:xfrm>
-              <a:off x="4768938" y="3414150"/>
-              <a:ext cx="49651" cy="49651"/>
+              <a:off x="4628277" y="3822254"/>
+              <a:ext cx="63193" cy="63193"/>
             </a:xfrm>
             <a:prstGeom prst="ellipse">
               <a:avLst/>
@@ -9604,7 +9591,7 @@
                 <a:alpha val="100000"/>
               </a:srgbClr>
             </a:solidFill>
-            <a:ln w="9000" cap="rnd">
+            <a:ln w="11454" cap="rnd">
               <a:solidFill>
                 <a:srgbClr val="F564E3">
                   <a:alpha val="100000"/>
@@ -9628,8 +9615,8 @@
           </p:nvSpPr>
           <p:spPr>
             <a:xfrm>
-              <a:off x="4803286" y="3368565"/>
-              <a:ext cx="49651" cy="49651"/>
+              <a:off x="4661092" y="3765913"/>
+              <a:ext cx="63193" cy="63193"/>
             </a:xfrm>
             <a:prstGeom prst="ellipse">
               <a:avLst/>
@@ -9639,7 +9626,7 @@
                 <a:alpha val="100000"/>
               </a:srgbClr>
             </a:solidFill>
-            <a:ln w="9000" cap="rnd">
+            <a:ln w="11454" cap="rnd">
               <a:solidFill>
                 <a:srgbClr val="F564E3">
                   <a:alpha val="100000"/>
@@ -9663,8 +9650,8 @@
           </p:nvSpPr>
           <p:spPr>
             <a:xfrm>
-              <a:off x="4837634" y="3346180"/>
-              <a:ext cx="49651" cy="49651"/>
+              <a:off x="4693906" y="3738246"/>
+              <a:ext cx="63193" cy="63193"/>
             </a:xfrm>
             <a:prstGeom prst="ellipse">
               <a:avLst/>
@@ -9674,7 +9661,7 @@
                 <a:alpha val="100000"/>
               </a:srgbClr>
             </a:solidFill>
-            <a:ln w="9000" cap="rnd">
+            <a:ln w="11454" cap="rnd">
               <a:solidFill>
                 <a:srgbClr val="F564E3">
                   <a:alpha val="100000"/>
@@ -9698,8 +9685,8 @@
           </p:nvSpPr>
           <p:spPr>
             <a:xfrm>
-              <a:off x="4871982" y="3348950"/>
-              <a:ext cx="49651" cy="49651"/>
+              <a:off x="4726720" y="3741670"/>
+              <a:ext cx="63193" cy="63193"/>
             </a:xfrm>
             <a:prstGeom prst="ellipse">
               <a:avLst/>
@@ -9709,7 +9696,7 @@
                 <a:alpha val="100000"/>
               </a:srgbClr>
             </a:solidFill>
-            <a:ln w="9000" cap="rnd">
+            <a:ln w="11454" cap="rnd">
               <a:solidFill>
                 <a:srgbClr val="F564E3">
                   <a:alpha val="100000"/>
@@ -9733,8 +9720,8 @@
           </p:nvSpPr>
           <p:spPr>
             <a:xfrm>
-              <a:off x="4906330" y="3375788"/>
-              <a:ext cx="49651" cy="49651"/>
+              <a:off x="4759535" y="3774840"/>
+              <a:ext cx="63193" cy="63193"/>
             </a:xfrm>
             <a:prstGeom prst="ellipse">
               <a:avLst/>
@@ -9744,7 +9731,7 @@
                 <a:alpha val="100000"/>
               </a:srgbClr>
             </a:solidFill>
-            <a:ln w="9000" cap="rnd">
+            <a:ln w="11454" cap="rnd">
               <a:solidFill>
                 <a:srgbClr val="F564E3">
                   <a:alpha val="100000"/>
@@ -9768,8 +9755,8 @@
           </p:nvSpPr>
           <p:spPr>
             <a:xfrm>
-              <a:off x="4940678" y="3423844"/>
-              <a:ext cx="49651" cy="49651"/>
+              <a:off x="4792349" y="3834236"/>
+              <a:ext cx="63193" cy="63193"/>
             </a:xfrm>
             <a:prstGeom prst="ellipse">
               <a:avLst/>
@@ -9779,7 +9766,7 @@
                 <a:alpha val="100000"/>
               </a:srgbClr>
             </a:solidFill>
-            <a:ln w="9000" cap="rnd">
+            <a:ln w="11454" cap="rnd">
               <a:solidFill>
                 <a:srgbClr val="F564E3">
                   <a:alpha val="100000"/>
@@ -9803,8 +9790,8 @@
           </p:nvSpPr>
           <p:spPr>
             <a:xfrm>
-              <a:off x="4975026" y="3487851"/>
-              <a:ext cx="49651" cy="49651"/>
+              <a:off x="4825163" y="3913345"/>
+              <a:ext cx="63193" cy="63193"/>
             </a:xfrm>
             <a:prstGeom prst="ellipse">
               <a:avLst/>
@@ -9814,7 +9801,7 @@
                 <a:alpha val="100000"/>
               </a:srgbClr>
             </a:solidFill>
-            <a:ln w="9000" cap="rnd">
+            <a:ln w="11454" cap="rnd">
               <a:solidFill>
                 <a:srgbClr val="F564E3">
                   <a:alpha val="100000"/>
@@ -9838,8 +9825,8 @@
           </p:nvSpPr>
           <p:spPr>
             <a:xfrm>
-              <a:off x="5043722" y="3626979"/>
-              <a:ext cx="49651" cy="49651"/>
+              <a:off x="4890792" y="4085301"/>
+              <a:ext cx="63193" cy="63193"/>
             </a:xfrm>
             <a:prstGeom prst="ellipse">
               <a:avLst/>
@@ -9849,7 +9836,7 @@
                 <a:alpha val="100000"/>
               </a:srgbClr>
             </a:solidFill>
-            <a:ln w="9000" cap="rnd">
+            <a:ln w="11454" cap="rnd">
               <a:solidFill>
                 <a:srgbClr val="F564E3">
                   <a:alpha val="100000"/>
@@ -9873,8 +9860,8 @@
           </p:nvSpPr>
           <p:spPr>
             <a:xfrm>
-              <a:off x="5249810" y="3875479"/>
-              <a:ext cx="49651" cy="49651"/>
+              <a:off x="5087678" y="4392435"/>
+              <a:ext cx="63193" cy="63193"/>
             </a:xfrm>
             <a:prstGeom prst="ellipse">
               <a:avLst/>
@@ -9884,7 +9871,7 @@
                 <a:alpha val="100000"/>
               </a:srgbClr>
             </a:solidFill>
-            <a:ln w="9000" cap="rnd">
+            <a:ln w="11454" cap="rnd">
               <a:solidFill>
                 <a:srgbClr val="F564E3">
                   <a:alpha val="100000"/>
@@ -9908,8 +9895,8 @@
           </p:nvSpPr>
           <p:spPr>
             <a:xfrm>
-              <a:off x="5455898" y="3948750"/>
-              <a:ext cx="49651" cy="49651"/>
+              <a:off x="5284564" y="4482995"/>
+              <a:ext cx="63193" cy="63193"/>
             </a:xfrm>
             <a:prstGeom prst="ellipse">
               <a:avLst/>
@@ -9919,7 +9906,7 @@
                 <a:alpha val="100000"/>
               </a:srgbClr>
             </a:solidFill>
-            <a:ln w="9000" cap="rnd">
+            <a:ln w="11454" cap="rnd">
               <a:solidFill>
                 <a:srgbClr val="F564E3">
                   <a:alpha val="100000"/>
@@ -9943,8 +9930,8 @@
           </p:nvSpPr>
           <p:spPr>
             <a:xfrm>
-              <a:off x="4494154" y="3948242"/>
-              <a:ext cx="49651" cy="49651"/>
+              <a:off x="4365763" y="4482367"/>
+              <a:ext cx="63193" cy="63193"/>
             </a:xfrm>
             <a:prstGeom prst="ellipse">
               <a:avLst/>
@@ -9954,7 +9941,7 @@
                 <a:alpha val="100000"/>
               </a:srgbClr>
             </a:solidFill>
-            <a:ln w="9000" cap="rnd">
+            <a:ln w="11454" cap="rnd">
               <a:solidFill>
                 <a:srgbClr val="619CFF">
                   <a:alpha val="100000"/>
@@ -9978,8 +9965,8 @@
           </p:nvSpPr>
           <p:spPr>
             <a:xfrm>
-              <a:off x="4528502" y="3917646"/>
-              <a:ext cx="49651" cy="49651"/>
+              <a:off x="4398577" y="4444553"/>
+              <a:ext cx="63193" cy="63193"/>
             </a:xfrm>
             <a:prstGeom prst="ellipse">
               <a:avLst/>
@@ -9989,7 +9976,7 @@
                 <a:alpha val="100000"/>
               </a:srgbClr>
             </a:solidFill>
-            <a:ln w="9000" cap="rnd">
+            <a:ln w="11454" cap="rnd">
               <a:solidFill>
                 <a:srgbClr val="619CFF">
                   <a:alpha val="100000"/>
@@ -10013,8 +10000,8 @@
           </p:nvSpPr>
           <p:spPr>
             <a:xfrm>
-              <a:off x="4597198" y="3803348"/>
-              <a:ext cx="49651" cy="49651"/>
+              <a:off x="4464206" y="4303285"/>
+              <a:ext cx="63193" cy="63193"/>
             </a:xfrm>
             <a:prstGeom prst="ellipse">
               <a:avLst/>
@@ -10024,7 +10011,7 @@
                 <a:alpha val="100000"/>
               </a:srgbClr>
             </a:solidFill>
-            <a:ln w="9000" cap="rnd">
+            <a:ln w="11454" cap="rnd">
               <a:solidFill>
                 <a:srgbClr val="619CFF">
                   <a:alpha val="100000"/>
@@ -10048,8 +10035,8 @@
           </p:nvSpPr>
           <p:spPr>
             <a:xfrm>
-              <a:off x="4631546" y="3728121"/>
-              <a:ext cx="49651" cy="49651"/>
+              <a:off x="4497020" y="4210308"/>
+              <a:ext cx="63193" cy="63193"/>
             </a:xfrm>
             <a:prstGeom prst="ellipse">
               <a:avLst/>
@@ -10059,7 +10046,7 @@
                 <a:alpha val="100000"/>
               </a:srgbClr>
             </a:solidFill>
-            <a:ln w="9000" cap="rnd">
+            <a:ln w="11454" cap="rnd">
               <a:solidFill>
                 <a:srgbClr val="619CFF">
                   <a:alpha val="100000"/>
@@ -10083,8 +10070,8 @@
           </p:nvSpPr>
           <p:spPr>
             <a:xfrm>
-              <a:off x="4734590" y="3505173"/>
-              <a:ext cx="49651" cy="49651"/>
+              <a:off x="4595463" y="3934754"/>
+              <a:ext cx="63193" cy="63193"/>
             </a:xfrm>
             <a:prstGeom prst="ellipse">
               <a:avLst/>
@@ -10094,7 +10081,7 @@
                 <a:alpha val="100000"/>
               </a:srgbClr>
             </a:solidFill>
-            <a:ln w="9000" cap="rnd">
+            <a:ln w="11454" cap="rnd">
               <a:solidFill>
                 <a:srgbClr val="619CFF">
                   <a:alpha val="100000"/>
@@ -10118,8 +10105,8 @@
           </p:nvSpPr>
           <p:spPr>
             <a:xfrm>
-              <a:off x="4768938" y="3436098"/>
-              <a:ext cx="49651" cy="49651"/>
+              <a:off x="4628277" y="3849381"/>
+              <a:ext cx="63193" cy="63193"/>
             </a:xfrm>
             <a:prstGeom prst="ellipse">
               <a:avLst/>
@@ -10129,7 +10116,7 @@
                 <a:alpha val="100000"/>
               </a:srgbClr>
             </a:solidFill>
-            <a:ln w="9000" cap="rnd">
+            <a:ln w="11454" cap="rnd">
               <a:solidFill>
                 <a:srgbClr val="619CFF">
                   <a:alpha val="100000"/>
@@ -10153,8 +10140,8 @@
           </p:nvSpPr>
           <p:spPr>
             <a:xfrm>
-              <a:off x="4803286" y="3394028"/>
-              <a:ext cx="49651" cy="49651"/>
+              <a:off x="4661092" y="3797384"/>
+              <a:ext cx="63193" cy="63193"/>
             </a:xfrm>
             <a:prstGeom prst="ellipse">
               <a:avLst/>
@@ -10164,7 +10151,7 @@
                 <a:alpha val="100000"/>
               </a:srgbClr>
             </a:solidFill>
-            <a:ln w="9000" cap="rnd">
+            <a:ln w="11454" cap="rnd">
               <a:solidFill>
                 <a:srgbClr val="619CFF">
                   <a:alpha val="100000"/>
@@ -10188,8 +10175,8 @@
           </p:nvSpPr>
           <p:spPr>
             <a:xfrm>
-              <a:off x="4837634" y="3400096"/>
-              <a:ext cx="49651" cy="49651"/>
+              <a:off x="4693906" y="3804885"/>
+              <a:ext cx="63193" cy="63193"/>
             </a:xfrm>
             <a:prstGeom prst="ellipse">
               <a:avLst/>
@@ -10199,7 +10186,7 @@
                 <a:alpha val="100000"/>
               </a:srgbClr>
             </a:solidFill>
-            <a:ln w="9000" cap="rnd">
+            <a:ln w="11454" cap="rnd">
               <a:solidFill>
                 <a:srgbClr val="619CFF">
                   <a:alpha val="100000"/>
@@ -10223,8 +10210,8 @@
           </p:nvSpPr>
           <p:spPr>
             <a:xfrm>
-              <a:off x="4871982" y="3447762"/>
-              <a:ext cx="49651" cy="49651"/>
+              <a:off x="4726720" y="3863797"/>
+              <a:ext cx="63193" cy="63193"/>
             </a:xfrm>
             <a:prstGeom prst="ellipse">
               <a:avLst/>
@@ -10234,7 +10221,7 @@
                 <a:alpha val="100000"/>
               </a:srgbClr>
             </a:solidFill>
-            <a:ln w="9000" cap="rnd">
+            <a:ln w="11454" cap="rnd">
               <a:solidFill>
                 <a:srgbClr val="619CFF">
                   <a:alpha val="100000"/>
@@ -10258,8 +10245,8 @@
           </p:nvSpPr>
           <p:spPr>
             <a:xfrm>
-              <a:off x="4906330" y="3518140"/>
-              <a:ext cx="49651" cy="49651"/>
+              <a:off x="4759535" y="3950781"/>
+              <a:ext cx="63193" cy="63193"/>
             </a:xfrm>
             <a:prstGeom prst="ellipse">
               <a:avLst/>
@@ -10269,7 +10256,7 @@
                 <a:alpha val="100000"/>
               </a:srgbClr>
             </a:solidFill>
-            <a:ln w="9000" cap="rnd">
+            <a:ln w="11454" cap="rnd">
               <a:solidFill>
                 <a:srgbClr val="619CFF">
                   <a:alpha val="100000"/>
@@ -10293,8 +10280,8 @@
           </p:nvSpPr>
           <p:spPr>
             <a:xfrm>
-              <a:off x="4940678" y="3593741"/>
-              <a:ext cx="49651" cy="49651"/>
+              <a:off x="4792349" y="4044220"/>
+              <a:ext cx="63193" cy="63193"/>
             </a:xfrm>
             <a:prstGeom prst="ellipse">
               <a:avLst/>
@@ -10304,7 +10291,7 @@
                 <a:alpha val="100000"/>
               </a:srgbClr>
             </a:solidFill>
-            <a:ln w="9000" cap="rnd">
+            <a:ln w="11454" cap="rnd">
               <a:solidFill>
                 <a:srgbClr val="619CFF">
                   <a:alpha val="100000"/>
@@ -10328,8 +10315,8 @@
           </p:nvSpPr>
           <p:spPr>
             <a:xfrm>
-              <a:off x="5215462" y="3922978"/>
-              <a:ext cx="49651" cy="49651"/>
+              <a:off x="5054864" y="4451143"/>
+              <a:ext cx="63193" cy="63193"/>
             </a:xfrm>
             <a:prstGeom prst="ellipse">
               <a:avLst/>
@@ -10339,7 +10326,7 @@
                 <a:alpha val="100000"/>
               </a:srgbClr>
             </a:solidFill>
-            <a:ln w="9000" cap="rnd">
+            <a:ln w="11454" cap="rnd">
               <a:solidFill>
                 <a:srgbClr val="619CFF">
                   <a:alpha val="100000"/>
@@ -10363,8 +10350,8 @@
           </p:nvSpPr>
           <p:spPr>
             <a:xfrm>
-              <a:off x="5352854" y="3957041"/>
-              <a:ext cx="49651" cy="49651"/>
+              <a:off x="5186121" y="4493243"/>
+              <a:ext cx="63193" cy="63193"/>
             </a:xfrm>
             <a:prstGeom prst="ellipse">
               <a:avLst/>
@@ -10374,7 +10361,7 @@
                 <a:alpha val="100000"/>
               </a:srgbClr>
             </a:solidFill>
-            <a:ln w="9000" cap="rnd">
+            <a:ln w="11454" cap="rnd">
               <a:solidFill>
                 <a:srgbClr val="619CFF">
                   <a:alpha val="100000"/>
@@ -10398,8 +10385,8 @@
           </p:nvSpPr>
           <p:spPr>
             <a:xfrm>
-              <a:off x="5455898" y="3970763"/>
-              <a:ext cx="49651" cy="49651"/>
+              <a:off x="5284564" y="4510203"/>
+              <a:ext cx="63193" cy="63193"/>
             </a:xfrm>
             <a:prstGeom prst="ellipse">
               <a:avLst/>
@@ -10409,7 +10396,7 @@
                 <a:alpha val="100000"/>
               </a:srgbClr>
             </a:solidFill>
-            <a:ln w="9000" cap="rnd">
+            <a:ln w="11454" cap="rnd">
               <a:solidFill>
                 <a:srgbClr val="619CFF">
                   <a:alpha val="100000"/>
@@ -10433,8 +10420,8 @@
           </p:nvSpPr>
           <p:spPr>
             <a:xfrm>
-              <a:off x="4528502" y="3967056"/>
-              <a:ext cx="49651" cy="49651"/>
+              <a:off x="4398577" y="4505620"/>
+              <a:ext cx="63193" cy="63193"/>
             </a:xfrm>
             <a:prstGeom prst="ellipse">
               <a:avLst/>
@@ -10444,7 +10431,7 @@
                 <a:alpha val="100000"/>
               </a:srgbClr>
             </a:solidFill>
-            <a:ln w="9000" cap="rnd">
+            <a:ln w="11454" cap="rnd">
               <a:solidFill>
                 <a:srgbClr val="00B4F0">
                   <a:alpha val="100000"/>
@@ -10468,8 +10455,8 @@
           </p:nvSpPr>
           <p:spPr>
             <a:xfrm>
-              <a:off x="4597198" y="3735679"/>
-              <a:ext cx="49651" cy="49651"/>
+              <a:off x="4464206" y="4219649"/>
+              <a:ext cx="63193" cy="63193"/>
             </a:xfrm>
             <a:prstGeom prst="ellipse">
               <a:avLst/>
@@ -10479,7 +10466,7 @@
                 <a:alpha val="100000"/>
               </a:srgbClr>
             </a:solidFill>
-            <a:ln w="9000" cap="rnd">
+            <a:ln w="11454" cap="rnd">
               <a:solidFill>
                 <a:srgbClr val="00B4F0">
                   <a:alpha val="100000"/>
@@ -10503,8 +10490,8 @@
           </p:nvSpPr>
           <p:spPr>
             <a:xfrm>
-              <a:off x="4631546" y="3399007"/>
-              <a:ext cx="49651" cy="49651"/>
+              <a:off x="4497020" y="3803538"/>
+              <a:ext cx="63193" cy="63193"/>
             </a:xfrm>
             <a:prstGeom prst="ellipse">
               <a:avLst/>
@@ -10514,7 +10501,7 @@
                 <a:alpha val="100000"/>
               </a:srgbClr>
             </a:solidFill>
-            <a:ln w="9000" cap="rnd">
+            <a:ln w="11454" cap="rnd">
               <a:solidFill>
                 <a:srgbClr val="00B4F0">
                   <a:alpha val="100000"/>
@@ -10538,8 +10525,8 @@
           </p:nvSpPr>
           <p:spPr>
             <a:xfrm>
-              <a:off x="4665894" y="3082278"/>
-              <a:ext cx="49651" cy="49651"/>
+              <a:off x="4529835" y="3412076"/>
+              <a:ext cx="63193" cy="63193"/>
             </a:xfrm>
             <a:prstGeom prst="ellipse">
               <a:avLst/>
@@ -10549,7 +10536,7 @@
                 <a:alpha val="100000"/>
               </a:srgbClr>
             </a:solidFill>
-            <a:ln w="9000" cap="rnd">
+            <a:ln w="11454" cap="rnd">
               <a:solidFill>
                 <a:srgbClr val="00B4F0">
                   <a:alpha val="100000"/>
@@ -10573,8 +10560,8 @@
           </p:nvSpPr>
           <p:spPr>
             <a:xfrm>
-              <a:off x="4700242" y="3021627"/>
-              <a:ext cx="49651" cy="49651"/>
+              <a:off x="4562649" y="3337113"/>
+              <a:ext cx="63193" cy="63193"/>
             </a:xfrm>
             <a:prstGeom prst="ellipse">
               <a:avLst/>
@@ -10584,7 +10571,7 @@
                 <a:alpha val="100000"/>
               </a:srgbClr>
             </a:solidFill>
-            <a:ln w="9000" cap="rnd">
+            <a:ln w="11454" cap="rnd">
               <a:solidFill>
                 <a:srgbClr val="00B4F0">
                   <a:alpha val="100000"/>
@@ -10608,8 +10595,8 @@
           </p:nvSpPr>
           <p:spPr>
             <a:xfrm>
-              <a:off x="4734590" y="3139527"/>
-              <a:ext cx="49651" cy="49651"/>
+              <a:off x="4595463" y="3482833"/>
+              <a:ext cx="63193" cy="63193"/>
             </a:xfrm>
             <a:prstGeom prst="ellipse">
               <a:avLst/>
@@ -10619,7 +10606,7 @@
                 <a:alpha val="100000"/>
               </a:srgbClr>
             </a:solidFill>
-            <a:ln w="9000" cap="rnd">
+            <a:ln w="11454" cap="rnd">
               <a:solidFill>
                 <a:srgbClr val="00B4F0">
                   <a:alpha val="100000"/>
@@ -10643,8 +10630,8 @@
           </p:nvSpPr>
           <p:spPr>
             <a:xfrm>
-              <a:off x="4803286" y="3328291"/>
-              <a:ext cx="49651" cy="49651"/>
+              <a:off x="4661092" y="3716136"/>
+              <a:ext cx="63193" cy="63193"/>
             </a:xfrm>
             <a:prstGeom prst="ellipse">
               <a:avLst/>
@@ -10654,7 +10641,7 @@
                 <a:alpha val="100000"/>
               </a:srgbClr>
             </a:solidFill>
-            <a:ln w="9000" cap="rnd">
+            <a:ln w="11454" cap="rnd">
               <a:solidFill>
                 <a:srgbClr val="00B4F0">
                   <a:alpha val="100000"/>
@@ -10678,8 +10665,8 @@
           </p:nvSpPr>
           <p:spPr>
             <a:xfrm>
-              <a:off x="4837634" y="3356574"/>
-              <a:ext cx="49651" cy="49651"/>
+              <a:off x="4693906" y="3751092"/>
+              <a:ext cx="63193" cy="63193"/>
             </a:xfrm>
             <a:prstGeom prst="ellipse">
               <a:avLst/>
@@ -10689,7 +10676,7 @@
                 <a:alpha val="100000"/>
               </a:srgbClr>
             </a:solidFill>
-            <a:ln w="9000" cap="rnd">
+            <a:ln w="11454" cap="rnd">
               <a:solidFill>
                 <a:srgbClr val="00B4F0">
                   <a:alpha val="100000"/>
@@ -10713,8 +10700,8 @@
           </p:nvSpPr>
           <p:spPr>
             <a:xfrm>
-              <a:off x="4871982" y="3420118"/>
-              <a:ext cx="49651" cy="49651"/>
+              <a:off x="4726720" y="3829631"/>
+              <a:ext cx="63193" cy="63193"/>
             </a:xfrm>
             <a:prstGeom prst="ellipse">
               <a:avLst/>
@@ -10724,7 +10711,7 @@
                 <a:alpha val="100000"/>
               </a:srgbClr>
             </a:solidFill>
-            <a:ln w="9000" cap="rnd">
+            <a:ln w="11454" cap="rnd">
               <a:solidFill>
                 <a:srgbClr val="00B4F0">
                   <a:alpha val="100000"/>
@@ -10748,8 +10735,8 @@
           </p:nvSpPr>
           <p:spPr>
             <a:xfrm>
-              <a:off x="4906330" y="3503147"/>
-              <a:ext cx="49651" cy="49651"/>
+              <a:off x="4759535" y="3932250"/>
+              <a:ext cx="63193" cy="63193"/>
             </a:xfrm>
             <a:prstGeom prst="ellipse">
               <a:avLst/>
@@ -10759,7 +10746,7 @@
                 <a:alpha val="100000"/>
               </a:srgbClr>
             </a:solidFill>
-            <a:ln w="9000" cap="rnd">
+            <a:ln w="11454" cap="rnd">
               <a:solidFill>
                 <a:srgbClr val="00B4F0">
                   <a:alpha val="100000"/>
@@ -10783,8 +10770,8 @@
           </p:nvSpPr>
           <p:spPr>
             <a:xfrm>
-              <a:off x="4975026" y="3687234"/>
-              <a:ext cx="49651" cy="49651"/>
+              <a:off x="4825163" y="4159773"/>
+              <a:ext cx="63193" cy="63193"/>
             </a:xfrm>
             <a:prstGeom prst="ellipse">
               <a:avLst/>
@@ -10794,7 +10781,7 @@
                 <a:alpha val="100000"/>
               </a:srgbClr>
             </a:solidFill>
-            <a:ln w="9000" cap="rnd">
+            <a:ln w="11454" cap="rnd">
               <a:solidFill>
                 <a:srgbClr val="00B4F0">
                   <a:alpha val="100000"/>
@@ -10818,8 +10805,8 @@
           </p:nvSpPr>
           <p:spPr>
             <a:xfrm>
-              <a:off x="5146766" y="3795373"/>
-              <a:ext cx="49651" cy="49651"/>
+              <a:off x="4989235" y="4293428"/>
+              <a:ext cx="63193" cy="63193"/>
             </a:xfrm>
             <a:prstGeom prst="ellipse">
               <a:avLst/>
@@ -10829,7 +10816,7 @@
                 <a:alpha val="100000"/>
               </a:srgbClr>
             </a:solidFill>
-            <a:ln w="9000" cap="rnd">
+            <a:ln w="11454" cap="rnd">
               <a:solidFill>
                 <a:srgbClr val="00B4F0">
                   <a:alpha val="100000"/>
@@ -10853,8 +10840,8 @@
           </p:nvSpPr>
           <p:spPr>
             <a:xfrm>
-              <a:off x="5181114" y="3784284"/>
-              <a:ext cx="49651" cy="49651"/>
+              <a:off x="5022049" y="4279723"/>
+              <a:ext cx="63193" cy="63193"/>
             </a:xfrm>
             <a:prstGeom prst="ellipse">
               <a:avLst/>
@@ -10864,7 +10851,7 @@
                 <a:alpha val="100000"/>
               </a:srgbClr>
             </a:solidFill>
-            <a:ln w="9000" cap="rnd">
+            <a:ln w="11454" cap="rnd">
               <a:solidFill>
                 <a:srgbClr val="00B4F0">
                   <a:alpha val="100000"/>
@@ -10888,8 +10875,8 @@
           </p:nvSpPr>
           <p:spPr>
             <a:xfrm>
-              <a:off x="5215462" y="3783714"/>
-              <a:ext cx="49651" cy="49651"/>
+              <a:off x="5054864" y="4279018"/>
+              <a:ext cx="63193" cy="63193"/>
             </a:xfrm>
             <a:prstGeom prst="ellipse">
               <a:avLst/>
@@ -10899,7 +10886,7 @@
                 <a:alpha val="100000"/>
               </a:srgbClr>
             </a:solidFill>
-            <a:ln w="9000" cap="rnd">
+            <a:ln w="11454" cap="rnd">
               <a:solidFill>
                 <a:srgbClr val="00B4F0">
                   <a:alpha val="100000"/>
@@ -10923,8 +10910,8 @@
           </p:nvSpPr>
           <p:spPr>
             <a:xfrm>
-              <a:off x="5249810" y="3804036"/>
-              <a:ext cx="49651" cy="49651"/>
+              <a:off x="5087678" y="4304135"/>
+              <a:ext cx="63193" cy="63193"/>
             </a:xfrm>
             <a:prstGeom prst="ellipse">
               <a:avLst/>
@@ -10934,7 +10921,7 @@
                 <a:alpha val="100000"/>
               </a:srgbClr>
             </a:solidFill>
-            <a:ln w="9000" cap="rnd">
+            <a:ln w="11454" cap="rnd">
               <a:solidFill>
                 <a:srgbClr val="00B4F0">
                   <a:alpha val="100000"/>
@@ -10958,8 +10945,8 @@
           </p:nvSpPr>
           <p:spPr>
             <a:xfrm>
-              <a:off x="5455898" y="3974936"/>
-              <a:ext cx="49651" cy="49651"/>
+              <a:off x="5284564" y="4515360"/>
+              <a:ext cx="63193" cy="63193"/>
             </a:xfrm>
             <a:prstGeom prst="ellipse">
               <a:avLst/>
@@ -10969,7 +10956,7 @@
                 <a:alpha val="100000"/>
               </a:srgbClr>
             </a:solidFill>
-            <a:ln w="9000" cap="rnd">
+            <a:ln w="11454" cap="rnd">
               <a:solidFill>
                 <a:srgbClr val="00B4F0">
                   <a:alpha val="100000"/>
@@ -10993,12 +10980,13 @@
           </p:nvSpPr>
           <p:spPr>
             <a:xfrm>
-              <a:off x="3625933" y="2850534"/>
-              <a:ext cx="1889138" cy="1171063"/>
+              <a:off x="3544187" y="3126564"/>
+              <a:ext cx="1804787" cy="1447380"/>
             </a:xfrm>
             <a:prstGeom prst="rect">
               <a:avLst/>
             </a:prstGeom>
+            <a:noFill/>
           </p:spPr>
           <p:txBody>
             <a:bodyPr/>
@@ -11014,8 +11002,8 @@
           </p:nvSpPr>
           <p:spPr>
             <a:xfrm>
-              <a:off x="1648227" y="2575545"/>
-              <a:ext cx="1889138" cy="274989"/>
+              <a:off x="1650832" y="2851719"/>
+              <a:ext cx="1804787" cy="274845"/>
             </a:xfrm>
             <a:prstGeom prst="rect">
               <a:avLst/>
@@ -11049,8 +11037,8 @@
           </p:nvSpPr>
           <p:spPr>
             <a:xfrm>
-              <a:off x="2540602" y="2657304"/>
-              <a:ext cx="104388" cy="107582"/>
+              <a:off x="2501105" y="2937341"/>
+              <a:ext cx="104241" cy="103601"/>
             </a:xfrm>
             <a:prstGeom prst="rect">
               <a:avLst/>
@@ -11062,9 +11050,6 @@
             <a:lstStyle/>
             <a:p>
               <a:pPr algn="l" marL="0" marR="0" indent="0">
-                <a:lnSpc>
-                  <a:spcPts val="1120"/>
-                </a:lnSpc>
                 <a:spcBef>
                   <a:spcPts val="0"/>
                 </a:spcBef>
@@ -11073,9 +11058,9 @@
                 </a:spcAft>
               </a:pPr>
               <a:r>
-                <a:rPr sz="1120" b="1">
+                <a:rPr sz="1120" i="0" b="1">
                   <a:solidFill>
-                    <a:srgbClr val="000000">
+                    <a:srgbClr val="1A1A1A">
                       <a:alpha val="100000"/>
                     </a:srgbClr>
                   </a:solidFill>
@@ -11095,8 +11080,8 @@
           </p:nvSpPr>
           <p:spPr>
             <a:xfrm>
-              <a:off x="3625933" y="2575545"/>
-              <a:ext cx="1889138" cy="274989"/>
+              <a:off x="3544187" y="2851719"/>
+              <a:ext cx="1804787" cy="274845"/>
             </a:xfrm>
             <a:prstGeom prst="rect">
               <a:avLst/>
@@ -11130,8 +11115,8 @@
           </p:nvSpPr>
           <p:spPr>
             <a:xfrm>
-              <a:off x="4511467" y="2661193"/>
-              <a:ext cx="118070" cy="103693"/>
+              <a:off x="4387602" y="2937341"/>
+              <a:ext cx="117957" cy="103601"/>
             </a:xfrm>
             <a:prstGeom prst="rect">
               <a:avLst/>
@@ -11143,9 +11128,6 @@
             <a:lstStyle/>
             <a:p>
               <a:pPr algn="l" marL="0" marR="0" indent="0">
-                <a:lnSpc>
-                  <a:spcPts val="1120"/>
-                </a:lnSpc>
                 <a:spcBef>
                   <a:spcPts val="0"/>
                 </a:spcBef>
@@ -11154,9 +11136,9 @@
                 </a:spcAft>
               </a:pPr>
               <a:r>
-                <a:rPr sz="1120" b="1">
+                <a:rPr sz="1120" i="0" b="1">
                   <a:solidFill>
-                    <a:srgbClr val="000000">
+                    <a:srgbClr val="1A1A1A">
                       <a:alpha val="100000"/>
                     </a:srgbClr>
                   </a:solidFill>
@@ -11176,8 +11158,8 @@
           </p:nvSpPr>
           <p:spPr>
             <a:xfrm>
-              <a:off x="1648227" y="1040925"/>
-              <a:ext cx="1889138" cy="274989"/>
+              <a:off x="1650832" y="1040925"/>
+              <a:ext cx="1804787" cy="274845"/>
             </a:xfrm>
             <a:prstGeom prst="rect">
               <a:avLst/>
@@ -11211,8 +11193,8 @@
           </p:nvSpPr>
           <p:spPr>
             <a:xfrm>
-              <a:off x="2537755" y="1126573"/>
-              <a:ext cx="110083" cy="103693"/>
+              <a:off x="2498225" y="1126547"/>
+              <a:ext cx="110002" cy="103601"/>
             </a:xfrm>
             <a:prstGeom prst="rect">
               <a:avLst/>
@@ -11224,9 +11206,6 @@
             <a:lstStyle/>
             <a:p>
               <a:pPr algn="l" marL="0" marR="0" indent="0">
-                <a:lnSpc>
-                  <a:spcPts val="1120"/>
-                </a:lnSpc>
                 <a:spcBef>
                   <a:spcPts val="0"/>
                 </a:spcBef>
@@ -11235,9 +11214,9 @@
                 </a:spcAft>
               </a:pPr>
               <a:r>
-                <a:rPr sz="1120" b="1">
+                <a:rPr sz="1120" i="0" b="1">
                   <a:solidFill>
-                    <a:srgbClr val="000000">
+                    <a:srgbClr val="1A1A1A">
                       <a:alpha val="100000"/>
                     </a:srgbClr>
                   </a:solidFill>
@@ -11257,8 +11236,8 @@
           </p:nvSpPr>
           <p:spPr>
             <a:xfrm>
-              <a:off x="3625933" y="1040925"/>
-              <a:ext cx="1889138" cy="274989"/>
+              <a:off x="3544187" y="1040925"/>
+              <a:ext cx="1804787" cy="274845"/>
             </a:xfrm>
             <a:prstGeom prst="rect">
               <a:avLst/>
@@ -11292,8 +11271,8 @@
           </p:nvSpPr>
           <p:spPr>
             <a:xfrm>
-              <a:off x="4516294" y="1126573"/>
-              <a:ext cx="108416" cy="103693"/>
+              <a:off x="4392449" y="1126547"/>
+              <a:ext cx="108264" cy="103601"/>
             </a:xfrm>
             <a:prstGeom prst="rect">
               <a:avLst/>
@@ -11305,9 +11284,6 @@
             <a:lstStyle/>
             <a:p>
               <a:pPr algn="l" marL="0" marR="0" indent="0">
-                <a:lnSpc>
-                  <a:spcPts val="1120"/>
-                </a:lnSpc>
                 <a:spcBef>
                   <a:spcPts val="0"/>
                 </a:spcBef>
@@ -11316,9 +11292,9 @@
                 </a:spcAft>
               </a:pPr>
               <a:r>
-                <a:rPr sz="1120" b="1">
+                <a:rPr sz="1120" i="0" b="1">
                   <a:solidFill>
-                    <a:srgbClr val="000000">
+                    <a:srgbClr val="1A1A1A">
                       <a:alpha val="100000"/>
                     </a:srgbClr>
                   </a:solidFill>
@@ -11338,23 +11314,23 @@
           </p:nvSpPr>
           <p:spPr>
             <a:xfrm>
-              <a:off x="1648227" y="4021598"/>
-              <a:ext cx="1889138" cy="0"/>
+              <a:off x="1650832" y="4573945"/>
+              <a:ext cx="1804787" cy="0"/>
             </a:xfrm>
             <a:custGeom>
               <a:avLst/>
               <a:pathLst>
-                <a:path w="1889138" h="0">
+                <a:path w="1804787" h="0">
                   <a:moveTo>
                     <a:pt x="0" y="0"/>
                   </a:moveTo>
                   <a:lnTo>
-                    <a:pt x="1889138" y="0"/>
+                    <a:pt x="1804787" y="0"/>
                   </a:lnTo>
                 </a:path>
               </a:pathLst>
             </a:custGeom>
-            <a:ln w="17246" cap="flat">
+            <a:ln w="18970" cap="flat">
               <a:solidFill>
                 <a:srgbClr val="000000">
                   <a:alpha val="100000"/>
@@ -11378,7 +11354,7 @@
           </p:nvSpPr>
           <p:spPr>
             <a:xfrm>
-              <a:off x="1648227" y="4021598"/>
+              <a:off x="1650832" y="4573945"/>
               <a:ext cx="0" cy="44283"/>
             </a:xfrm>
             <a:custGeom>
@@ -11394,9 +11370,9 @@
                 </a:path>
               </a:pathLst>
             </a:custGeom>
-            <a:ln w="17246" cap="flat">
-              <a:solidFill>
-                <a:srgbClr val="000000">
+            <a:ln w="18970" cap="flat">
+              <a:solidFill>
+                <a:srgbClr val="333333">
                   <a:alpha val="100000"/>
                 </a:srgbClr>
               </a:solidFill>
@@ -11418,7 +11394,7 @@
           </p:nvSpPr>
           <p:spPr>
             <a:xfrm>
-              <a:off x="1991707" y="4021598"/>
+              <a:off x="1978975" y="4573945"/>
               <a:ext cx="0" cy="44283"/>
             </a:xfrm>
             <a:custGeom>
@@ -11434,9 +11410,9 @@
                 </a:path>
               </a:pathLst>
             </a:custGeom>
-            <a:ln w="17246" cap="flat">
-              <a:solidFill>
-                <a:srgbClr val="000000">
+            <a:ln w="18970" cap="flat">
+              <a:solidFill>
+                <a:srgbClr val="333333">
                   <a:alpha val="100000"/>
                 </a:srgbClr>
               </a:solidFill>
@@ -11458,7 +11434,7 @@
           </p:nvSpPr>
           <p:spPr>
             <a:xfrm>
-              <a:off x="2335186" y="4021598"/>
+              <a:off x="2307119" y="4573945"/>
               <a:ext cx="0" cy="44283"/>
             </a:xfrm>
             <a:custGeom>
@@ -11474,9 +11450,9 @@
                 </a:path>
               </a:pathLst>
             </a:custGeom>
-            <a:ln w="17246" cap="flat">
-              <a:solidFill>
-                <a:srgbClr val="000000">
+            <a:ln w="18970" cap="flat">
+              <a:solidFill>
+                <a:srgbClr val="333333">
                   <a:alpha val="100000"/>
                 </a:srgbClr>
               </a:solidFill>
@@ -11498,7 +11474,7 @@
           </p:nvSpPr>
           <p:spPr>
             <a:xfrm>
-              <a:off x="2678666" y="4021598"/>
+              <a:off x="2635262" y="4573945"/>
               <a:ext cx="0" cy="44283"/>
             </a:xfrm>
             <a:custGeom>
@@ -11514,9 +11490,9 @@
                 </a:path>
               </a:pathLst>
             </a:custGeom>
-            <a:ln w="17246" cap="flat">
-              <a:solidFill>
-                <a:srgbClr val="000000">
+            <a:ln w="18970" cap="flat">
+              <a:solidFill>
+                <a:srgbClr val="333333">
                   <a:alpha val="100000"/>
                 </a:srgbClr>
               </a:solidFill>
@@ -11538,7 +11514,7 @@
           </p:nvSpPr>
           <p:spPr>
             <a:xfrm>
-              <a:off x="3022146" y="4021598"/>
+              <a:off x="2963405" y="4573945"/>
               <a:ext cx="0" cy="44283"/>
             </a:xfrm>
             <a:custGeom>
@@ -11554,9 +11530,9 @@
                 </a:path>
               </a:pathLst>
             </a:custGeom>
-            <a:ln w="17246" cap="flat">
-              <a:solidFill>
-                <a:srgbClr val="000000">
+            <a:ln w="18970" cap="flat">
+              <a:solidFill>
+                <a:srgbClr val="333333">
                   <a:alpha val="100000"/>
                 </a:srgbClr>
               </a:solidFill>
@@ -11578,7 +11554,7 @@
           </p:nvSpPr>
           <p:spPr>
             <a:xfrm>
-              <a:off x="3365625" y="4021598"/>
+              <a:off x="3291548" y="4573945"/>
               <a:ext cx="0" cy="44283"/>
             </a:xfrm>
             <a:custGeom>
@@ -11594,9 +11570,9 @@
                 </a:path>
               </a:pathLst>
             </a:custGeom>
-            <a:ln w="17246" cap="flat">
-              <a:solidFill>
-                <a:srgbClr val="000000">
+            <a:ln w="18970" cap="flat">
+              <a:solidFill>
+                <a:srgbClr val="333333">
                   <a:alpha val="100000"/>
                 </a:srgbClr>
               </a:solidFill>
@@ -11618,8 +11594,8 @@
           </p:nvSpPr>
           <p:spPr>
             <a:xfrm>
-              <a:off x="1602978" y="4097419"/>
-              <a:ext cx="90497" cy="107582"/>
+              <a:off x="1604015" y="4653656"/>
+              <a:ext cx="93634" cy="107350"/>
             </a:xfrm>
             <a:prstGeom prst="rect">
               <a:avLst/>
@@ -11631,9 +11607,6 @@
             <a:lstStyle/>
             <a:p>
               <a:pPr algn="l" marL="0" marR="0" indent="0">
-                <a:lnSpc>
-                  <a:spcPts val="1120"/>
-                </a:lnSpc>
                 <a:spcBef>
                   <a:spcPts val="0"/>
                 </a:spcBef>
@@ -11642,7 +11615,7 @@
                 </a:spcAft>
               </a:pPr>
               <a:r>
-                <a:rPr sz="1120">
+                <a:rPr sz="1160" i="0" b="0">
                   <a:solidFill>
                     <a:srgbClr val="000000">
                       <a:alpha val="100000"/>
@@ -11664,8 +11637,8 @@
           </p:nvSpPr>
           <p:spPr>
             <a:xfrm>
-              <a:off x="1901209" y="4097419"/>
-              <a:ext cx="180994" cy="107582"/>
+              <a:off x="1885341" y="4653656"/>
+              <a:ext cx="187269" cy="107350"/>
             </a:xfrm>
             <a:prstGeom prst="rect">
               <a:avLst/>
@@ -11677,9 +11650,6 @@
             <a:lstStyle/>
             <a:p>
               <a:pPr algn="l" marL="0" marR="0" indent="0">
-                <a:lnSpc>
-                  <a:spcPts val="1120"/>
-                </a:lnSpc>
                 <a:spcBef>
                   <a:spcPts val="0"/>
                 </a:spcBef>
@@ -11688,7 +11658,7 @@
                 </a:spcAft>
               </a:pPr>
               <a:r>
-                <a:rPr sz="1120">
+                <a:rPr sz="1160" i="0" b="0">
                   <a:solidFill>
                     <a:srgbClr val="000000">
                       <a:alpha val="100000"/>
@@ -11710,8 +11680,8 @@
           </p:nvSpPr>
           <p:spPr>
             <a:xfrm>
-              <a:off x="2244689" y="4097419"/>
-              <a:ext cx="180994" cy="107582"/>
+              <a:off x="2213484" y="4653656"/>
+              <a:ext cx="187269" cy="107350"/>
             </a:xfrm>
             <a:prstGeom prst="rect">
               <a:avLst/>
@@ -11723,9 +11693,6 @@
             <a:lstStyle/>
             <a:p>
               <a:pPr algn="l" marL="0" marR="0" indent="0">
-                <a:lnSpc>
-                  <a:spcPts val="1120"/>
-                </a:lnSpc>
                 <a:spcBef>
                   <a:spcPts val="0"/>
                 </a:spcBef>
@@ -11734,7 +11701,7 @@
                 </a:spcAft>
               </a:pPr>
               <a:r>
-                <a:rPr sz="1120">
+                <a:rPr sz="1160" i="0" b="0">
                   <a:solidFill>
                     <a:srgbClr val="000000">
                       <a:alpha val="100000"/>
@@ -11756,8 +11723,8 @@
           </p:nvSpPr>
           <p:spPr>
             <a:xfrm>
-              <a:off x="2588169" y="4097419"/>
-              <a:ext cx="180994" cy="107582"/>
+              <a:off x="2541627" y="4653656"/>
+              <a:ext cx="187269" cy="107350"/>
             </a:xfrm>
             <a:prstGeom prst="rect">
               <a:avLst/>
@@ -11769,9 +11736,6 @@
             <a:lstStyle/>
             <a:p>
               <a:pPr algn="l" marL="0" marR="0" indent="0">
-                <a:lnSpc>
-                  <a:spcPts val="1120"/>
-                </a:lnSpc>
                 <a:spcBef>
                   <a:spcPts val="0"/>
                 </a:spcBef>
@@ -11780,7 +11744,7 @@
                 </a:spcAft>
               </a:pPr>
               <a:r>
-                <a:rPr sz="1120">
+                <a:rPr sz="1160" i="0" b="0">
                   <a:solidFill>
                     <a:srgbClr val="000000">
                       <a:alpha val="100000"/>
@@ -11802,8 +11766,8 @@
           </p:nvSpPr>
           <p:spPr>
             <a:xfrm>
-              <a:off x="2931648" y="4097419"/>
-              <a:ext cx="180994" cy="107582"/>
+              <a:off x="2869770" y="4653656"/>
+              <a:ext cx="187269" cy="107350"/>
             </a:xfrm>
             <a:prstGeom prst="rect">
               <a:avLst/>
@@ -11815,9 +11779,6 @@
             <a:lstStyle/>
             <a:p>
               <a:pPr algn="l" marL="0" marR="0" indent="0">
-                <a:lnSpc>
-                  <a:spcPts val="1120"/>
-                </a:lnSpc>
                 <a:spcBef>
                   <a:spcPts val="0"/>
                 </a:spcBef>
@@ -11826,7 +11787,7 @@
                 </a:spcAft>
               </a:pPr>
               <a:r>
-                <a:rPr sz="1120">
+                <a:rPr sz="1160" i="0" b="0">
                   <a:solidFill>
                     <a:srgbClr val="000000">
                       <a:alpha val="100000"/>
@@ -11848,8 +11809,8 @@
           </p:nvSpPr>
           <p:spPr>
             <a:xfrm>
-              <a:off x="3275128" y="4097419"/>
-              <a:ext cx="180994" cy="107582"/>
+              <a:off x="3197913" y="4653656"/>
+              <a:ext cx="187269" cy="107350"/>
             </a:xfrm>
             <a:prstGeom prst="rect">
               <a:avLst/>
@@ -11861,9 +11822,6 @@
             <a:lstStyle/>
             <a:p>
               <a:pPr algn="l" marL="0" marR="0" indent="0">
-                <a:lnSpc>
-                  <a:spcPts val="1120"/>
-                </a:lnSpc>
                 <a:spcBef>
                   <a:spcPts val="0"/>
                 </a:spcBef>
@@ -11872,7 +11830,7 @@
                 </a:spcAft>
               </a:pPr>
               <a:r>
-                <a:rPr sz="1120">
+                <a:rPr sz="1160" i="0" b="0">
                   <a:solidFill>
                     <a:srgbClr val="000000">
                       <a:alpha val="100000"/>
@@ -11894,23 +11852,23 @@
           </p:nvSpPr>
           <p:spPr>
             <a:xfrm>
-              <a:off x="3625933" y="4021598"/>
-              <a:ext cx="1889138" cy="0"/>
+              <a:off x="3544187" y="4573945"/>
+              <a:ext cx="1804787" cy="0"/>
             </a:xfrm>
             <a:custGeom>
               <a:avLst/>
               <a:pathLst>
-                <a:path w="1889138" h="0">
+                <a:path w="1804787" h="0">
                   <a:moveTo>
                     <a:pt x="0" y="0"/>
                   </a:moveTo>
                   <a:lnTo>
-                    <a:pt x="1889138" y="0"/>
+                    <a:pt x="1804787" y="0"/>
                   </a:lnTo>
                 </a:path>
               </a:pathLst>
             </a:custGeom>
-            <a:ln w="17246" cap="flat">
+            <a:ln w="18970" cap="flat">
               <a:solidFill>
                 <a:srgbClr val="000000">
                   <a:alpha val="100000"/>
@@ -11934,7 +11892,7 @@
           </p:nvSpPr>
           <p:spPr>
             <a:xfrm>
-              <a:off x="3625933" y="4021598"/>
+              <a:off x="3544187" y="4573945"/>
               <a:ext cx="0" cy="44283"/>
             </a:xfrm>
             <a:custGeom>
@@ -11950,9 +11908,9 @@
                 </a:path>
               </a:pathLst>
             </a:custGeom>
-            <a:ln w="17246" cap="flat">
-              <a:solidFill>
-                <a:srgbClr val="000000">
+            <a:ln w="18970" cap="flat">
+              <a:solidFill>
+                <a:srgbClr val="333333">
                   <a:alpha val="100000"/>
                 </a:srgbClr>
               </a:solidFill>
@@ -11974,7 +11932,7 @@
           </p:nvSpPr>
           <p:spPr>
             <a:xfrm>
-              <a:off x="3969413" y="4021598"/>
+              <a:off x="3872331" y="4573945"/>
               <a:ext cx="0" cy="44283"/>
             </a:xfrm>
             <a:custGeom>
@@ -11990,9 +11948,9 @@
                 </a:path>
               </a:pathLst>
             </a:custGeom>
-            <a:ln w="17246" cap="flat">
-              <a:solidFill>
-                <a:srgbClr val="000000">
+            <a:ln w="18970" cap="flat">
+              <a:solidFill>
+                <a:srgbClr val="333333">
                   <a:alpha val="100000"/>
                 </a:srgbClr>
               </a:solidFill>
@@ -12014,7 +11972,7 @@
           </p:nvSpPr>
           <p:spPr>
             <a:xfrm>
-              <a:off x="4312893" y="4021598"/>
+              <a:off x="4200474" y="4573945"/>
               <a:ext cx="0" cy="44283"/>
             </a:xfrm>
             <a:custGeom>
@@ -12030,9 +11988,9 @@
                 </a:path>
               </a:pathLst>
             </a:custGeom>
-            <a:ln w="17246" cap="flat">
-              <a:solidFill>
-                <a:srgbClr val="000000">
+            <a:ln w="18970" cap="flat">
+              <a:solidFill>
+                <a:srgbClr val="333333">
                   <a:alpha val="100000"/>
                 </a:srgbClr>
               </a:solidFill>
@@ -12054,7 +12012,7 @@
           </p:nvSpPr>
           <p:spPr>
             <a:xfrm>
-              <a:off x="4656372" y="4021598"/>
+              <a:off x="4528617" y="4573945"/>
               <a:ext cx="0" cy="44283"/>
             </a:xfrm>
             <a:custGeom>
@@ -12070,9 +12028,9 @@
                 </a:path>
               </a:pathLst>
             </a:custGeom>
-            <a:ln w="17246" cap="flat">
-              <a:solidFill>
-                <a:srgbClr val="000000">
+            <a:ln w="18970" cap="flat">
+              <a:solidFill>
+                <a:srgbClr val="333333">
                   <a:alpha val="100000"/>
                 </a:srgbClr>
               </a:solidFill>
@@ -12094,7 +12052,7 @@
           </p:nvSpPr>
           <p:spPr>
             <a:xfrm>
-              <a:off x="4999852" y="4021598"/>
+              <a:off x="4856760" y="4573945"/>
               <a:ext cx="0" cy="44283"/>
             </a:xfrm>
             <a:custGeom>
@@ -12110,9 +12068,9 @@
                 </a:path>
               </a:pathLst>
             </a:custGeom>
-            <a:ln w="17246" cap="flat">
-              <a:solidFill>
-                <a:srgbClr val="000000">
+            <a:ln w="18970" cap="flat">
+              <a:solidFill>
+                <a:srgbClr val="333333">
                   <a:alpha val="100000"/>
                 </a:srgbClr>
               </a:solidFill>
@@ -12134,7 +12092,7 @@
           </p:nvSpPr>
           <p:spPr>
             <a:xfrm>
-              <a:off x="5343332" y="4021598"/>
+              <a:off x="5184903" y="4573945"/>
               <a:ext cx="0" cy="44283"/>
             </a:xfrm>
             <a:custGeom>
@@ -12150,9 +12108,9 @@
                 </a:path>
               </a:pathLst>
             </a:custGeom>
-            <a:ln w="17246" cap="flat">
-              <a:solidFill>
-                <a:srgbClr val="000000">
+            <a:ln w="18970" cap="flat">
+              <a:solidFill>
+                <a:srgbClr val="333333">
                   <a:alpha val="100000"/>
                 </a:srgbClr>
               </a:solidFill>
@@ -12174,8 +12132,8 @@
           </p:nvSpPr>
           <p:spPr>
             <a:xfrm>
-              <a:off x="3580684" y="4097419"/>
-              <a:ext cx="90497" cy="107582"/>
+              <a:off x="3497370" y="4653656"/>
+              <a:ext cx="93634" cy="107350"/>
             </a:xfrm>
             <a:prstGeom prst="rect">
               <a:avLst/>
@@ -12187,9 +12145,6 @@
             <a:lstStyle/>
             <a:p>
               <a:pPr algn="l" marL="0" marR="0" indent="0">
-                <a:lnSpc>
-                  <a:spcPts val="1120"/>
-                </a:lnSpc>
                 <a:spcBef>
                   <a:spcPts val="0"/>
                 </a:spcBef>
@@ -12198,7 +12153,7 @@
                 </a:spcAft>
               </a:pPr>
               <a:r>
-                <a:rPr sz="1120">
+                <a:rPr sz="1160" i="0" b="0">
                   <a:solidFill>
                     <a:srgbClr val="000000">
                       <a:alpha val="100000"/>
@@ -12220,8 +12175,8 @@
           </p:nvSpPr>
           <p:spPr>
             <a:xfrm>
-              <a:off x="3878915" y="4097419"/>
-              <a:ext cx="180994" cy="107582"/>
+              <a:off x="3778696" y="4653656"/>
+              <a:ext cx="187269" cy="107350"/>
             </a:xfrm>
             <a:prstGeom prst="rect">
               <a:avLst/>
@@ -12233,9 +12188,6 @@
             <a:lstStyle/>
             <a:p>
               <a:pPr algn="l" marL="0" marR="0" indent="0">
-                <a:lnSpc>
-                  <a:spcPts val="1120"/>
-                </a:lnSpc>
                 <a:spcBef>
                   <a:spcPts val="0"/>
                 </a:spcBef>
@@ -12244,7 +12196,7 @@
                 </a:spcAft>
               </a:pPr>
               <a:r>
-                <a:rPr sz="1120">
+                <a:rPr sz="1160" i="0" b="0">
                   <a:solidFill>
                     <a:srgbClr val="000000">
                       <a:alpha val="100000"/>
@@ -12266,8 +12218,8 @@
           </p:nvSpPr>
           <p:spPr>
             <a:xfrm>
-              <a:off x="4222395" y="4097419"/>
-              <a:ext cx="180994" cy="107582"/>
+              <a:off x="4106839" y="4653656"/>
+              <a:ext cx="187269" cy="107350"/>
             </a:xfrm>
             <a:prstGeom prst="rect">
               <a:avLst/>
@@ -12279,9 +12231,6 @@
             <a:lstStyle/>
             <a:p>
               <a:pPr algn="l" marL="0" marR="0" indent="0">
-                <a:lnSpc>
-                  <a:spcPts val="1120"/>
-                </a:lnSpc>
                 <a:spcBef>
                   <a:spcPts val="0"/>
                 </a:spcBef>
@@ -12290,7 +12239,7 @@
                 </a:spcAft>
               </a:pPr>
               <a:r>
-                <a:rPr sz="1120">
+                <a:rPr sz="1160" i="0" b="0">
                   <a:solidFill>
                     <a:srgbClr val="000000">
                       <a:alpha val="100000"/>
@@ -12312,8 +12261,8 @@
           </p:nvSpPr>
           <p:spPr>
             <a:xfrm>
-              <a:off x="4565875" y="4097419"/>
-              <a:ext cx="180994" cy="107582"/>
+              <a:off x="4434982" y="4653656"/>
+              <a:ext cx="187269" cy="107350"/>
             </a:xfrm>
             <a:prstGeom prst="rect">
               <a:avLst/>
@@ -12325,9 +12274,6 @@
             <a:lstStyle/>
             <a:p>
               <a:pPr algn="l" marL="0" marR="0" indent="0">
-                <a:lnSpc>
-                  <a:spcPts val="1120"/>
-                </a:lnSpc>
                 <a:spcBef>
                   <a:spcPts val="0"/>
                 </a:spcBef>
@@ -12336,7 +12282,7 @@
                 </a:spcAft>
               </a:pPr>
               <a:r>
-                <a:rPr sz="1120">
+                <a:rPr sz="1160" i="0" b="0">
                   <a:solidFill>
                     <a:srgbClr val="000000">
                       <a:alpha val="100000"/>
@@ -12358,8 +12304,8 @@
           </p:nvSpPr>
           <p:spPr>
             <a:xfrm>
-              <a:off x="4909354" y="4097419"/>
-              <a:ext cx="180994" cy="107582"/>
+              <a:off x="4763125" y="4653656"/>
+              <a:ext cx="187269" cy="107350"/>
             </a:xfrm>
             <a:prstGeom prst="rect">
               <a:avLst/>
@@ -12371,9 +12317,6 @@
             <a:lstStyle/>
             <a:p>
               <a:pPr algn="l" marL="0" marR="0" indent="0">
-                <a:lnSpc>
-                  <a:spcPts val="1120"/>
-                </a:lnSpc>
                 <a:spcBef>
                   <a:spcPts val="0"/>
                 </a:spcBef>
@@ -12382,7 +12325,7 @@
                 </a:spcAft>
               </a:pPr>
               <a:r>
-                <a:rPr sz="1120">
+                <a:rPr sz="1160" i="0" b="0">
                   <a:solidFill>
                     <a:srgbClr val="000000">
                       <a:alpha val="100000"/>
@@ -12404,8 +12347,8 @@
           </p:nvSpPr>
           <p:spPr>
             <a:xfrm>
-              <a:off x="5252834" y="4097419"/>
-              <a:ext cx="180994" cy="107582"/>
+              <a:off x="5091269" y="4653656"/>
+              <a:ext cx="187269" cy="107350"/>
             </a:xfrm>
             <a:prstGeom prst="rect">
               <a:avLst/>
@@ -12417,9 +12360,6 @@
             <a:lstStyle/>
             <a:p>
               <a:pPr algn="l" marL="0" marR="0" indent="0">
-                <a:lnSpc>
-                  <a:spcPts val="1120"/>
-                </a:lnSpc>
                 <a:spcBef>
                   <a:spcPts val="0"/>
                 </a:spcBef>
@@ -12428,7 +12368,7 @@
                 </a:spcAft>
               </a:pPr>
               <a:r>
-                <a:rPr sz="1120">
+                <a:rPr sz="1160" i="0" b="0">
                   <a:solidFill>
                     <a:srgbClr val="000000">
                       <a:alpha val="100000"/>
@@ -12450,15 +12390,15 @@
           </p:nvSpPr>
           <p:spPr>
             <a:xfrm>
-              <a:off x="1648227" y="1315914"/>
-              <a:ext cx="0" cy="1171063"/>
+              <a:off x="1650832" y="1315770"/>
+              <a:ext cx="0" cy="1447380"/>
             </a:xfrm>
             <a:custGeom>
               <a:avLst/>
               <a:pathLst>
-                <a:path w="0" h="1171063">
+                <a:path w="0" h="1447380">
                   <a:moveTo>
-                    <a:pt x="0" y="1171063"/>
+                    <a:pt x="0" y="1447380"/>
                   </a:moveTo>
                   <a:lnTo>
                     <a:pt x="0" y="0"/>
@@ -12466,7 +12406,7 @@
                 </a:path>
               </a:pathLst>
             </a:custGeom>
-            <a:ln w="17246" cap="flat">
+            <a:ln w="18970" cap="flat">
               <a:solidFill>
                 <a:srgbClr val="000000">
                   <a:alpha val="100000"/>
@@ -12490,8 +12430,8 @@
           </p:nvSpPr>
           <p:spPr>
             <a:xfrm>
-              <a:off x="1251810" y="2423067"/>
-              <a:ext cx="316706" cy="107582"/>
+              <a:off x="1243400" y="2699372"/>
+              <a:ext cx="327720" cy="107350"/>
             </a:xfrm>
             <a:prstGeom prst="rect">
               <a:avLst/>
@@ -12503,9 +12443,6 @@
             <a:lstStyle/>
             <a:p>
               <a:pPr algn="l" marL="0" marR="0" indent="0">
-                <a:lnSpc>
-                  <a:spcPts val="1120"/>
-                </a:lnSpc>
                 <a:spcBef>
                   <a:spcPts val="0"/>
                 </a:spcBef>
@@ -12514,7 +12451,7 @@
                 </a:spcAft>
               </a:pPr>
               <a:r>
-                <a:rPr sz="1120">
+                <a:rPr sz="1160" i="0" b="0">
                   <a:solidFill>
                     <a:srgbClr val="000000">
                       <a:alpha val="100000"/>
@@ -12536,8 +12473,8 @@
           </p:nvSpPr>
           <p:spPr>
             <a:xfrm>
-              <a:off x="1251810" y="2195712"/>
-              <a:ext cx="316706" cy="107582"/>
+              <a:off x="1243400" y="2418372"/>
+              <a:ext cx="327720" cy="107350"/>
             </a:xfrm>
             <a:prstGeom prst="rect">
               <a:avLst/>
@@ -12549,9 +12486,6 @@
             <a:lstStyle/>
             <a:p>
               <a:pPr algn="l" marL="0" marR="0" indent="0">
-                <a:lnSpc>
-                  <a:spcPts val="1120"/>
-                </a:lnSpc>
                 <a:spcBef>
                   <a:spcPts val="0"/>
                 </a:spcBef>
@@ -12560,7 +12494,7 @@
                 </a:spcAft>
               </a:pPr>
               <a:r>
-                <a:rPr sz="1120">
+                <a:rPr sz="1160" i="0" b="0">
                   <a:solidFill>
                     <a:srgbClr val="000000">
                       <a:alpha val="100000"/>
@@ -12582,8 +12516,8 @@
           </p:nvSpPr>
           <p:spPr>
             <a:xfrm>
-              <a:off x="1251810" y="1968357"/>
-              <a:ext cx="316706" cy="107582"/>
+              <a:off x="1243400" y="2137372"/>
+              <a:ext cx="327720" cy="107350"/>
             </a:xfrm>
             <a:prstGeom prst="rect">
               <a:avLst/>
@@ -12595,9 +12529,6 @@
             <a:lstStyle/>
             <a:p>
               <a:pPr algn="l" marL="0" marR="0" indent="0">
-                <a:lnSpc>
-                  <a:spcPts val="1120"/>
-                </a:lnSpc>
                 <a:spcBef>
                   <a:spcPts val="0"/>
                 </a:spcBef>
@@ -12606,7 +12537,7 @@
                 </a:spcAft>
               </a:pPr>
               <a:r>
-                <a:rPr sz="1120">
+                <a:rPr sz="1160" i="0" b="0">
                   <a:solidFill>
                     <a:srgbClr val="000000">
                       <a:alpha val="100000"/>
@@ -12628,8 +12559,8 @@
           </p:nvSpPr>
           <p:spPr>
             <a:xfrm>
-              <a:off x="1251810" y="1741003"/>
-              <a:ext cx="316706" cy="107582"/>
+              <a:off x="1243400" y="1856372"/>
+              <a:ext cx="327720" cy="107350"/>
             </a:xfrm>
             <a:prstGeom prst="rect">
               <a:avLst/>
@@ -12641,9 +12572,6 @@
             <a:lstStyle/>
             <a:p>
               <a:pPr algn="l" marL="0" marR="0" indent="0">
-                <a:lnSpc>
-                  <a:spcPts val="1120"/>
-                </a:lnSpc>
                 <a:spcBef>
                   <a:spcPts val="0"/>
                 </a:spcBef>
@@ -12652,7 +12580,7 @@
                 </a:spcAft>
               </a:pPr>
               <a:r>
-                <a:rPr sz="1120">
+                <a:rPr sz="1160" i="0" b="0">
                   <a:solidFill>
                     <a:srgbClr val="000000">
                       <a:alpha val="100000"/>
@@ -12674,8 +12602,8 @@
           </p:nvSpPr>
           <p:spPr>
             <a:xfrm>
-              <a:off x="1251810" y="1513648"/>
-              <a:ext cx="316706" cy="107582"/>
+              <a:off x="1243400" y="1575372"/>
+              <a:ext cx="327720" cy="107350"/>
             </a:xfrm>
             <a:prstGeom prst="rect">
               <a:avLst/>
@@ -12687,9 +12615,6 @@
             <a:lstStyle/>
             <a:p>
               <a:pPr algn="l" marL="0" marR="0" indent="0">
-                <a:lnSpc>
-                  <a:spcPts val="1120"/>
-                </a:lnSpc>
                 <a:spcBef>
                   <a:spcPts val="0"/>
                 </a:spcBef>
@@ -12698,7 +12623,7 @@
                 </a:spcAft>
               </a:pPr>
               <a:r>
-                <a:rPr sz="1120">
+                <a:rPr sz="1160" i="0" b="0">
                   <a:solidFill>
                     <a:srgbClr val="000000">
                       <a:alpha val="100000"/>
@@ -12720,8 +12645,8 @@
           </p:nvSpPr>
           <p:spPr>
             <a:xfrm>
-              <a:off x="1251810" y="1286293"/>
-              <a:ext cx="316706" cy="107582"/>
+              <a:off x="1243400" y="1294372"/>
+              <a:ext cx="327720" cy="107350"/>
             </a:xfrm>
             <a:prstGeom prst="rect">
               <a:avLst/>
@@ -12733,9 +12658,6 @@
             <a:lstStyle/>
             <a:p>
               <a:pPr algn="l" marL="0" marR="0" indent="0">
-                <a:lnSpc>
-                  <a:spcPts val="1120"/>
-                </a:lnSpc>
                 <a:spcBef>
                   <a:spcPts val="0"/>
                 </a:spcBef>
@@ -12744,7 +12666,7 @@
                 </a:spcAft>
               </a:pPr>
               <a:r>
-                <a:rPr sz="1120">
+                <a:rPr sz="1160" i="0" b="0">
                   <a:solidFill>
                     <a:srgbClr val="000000">
                       <a:alpha val="100000"/>
@@ -12766,7 +12688,7 @@
           </p:nvSpPr>
           <p:spPr>
             <a:xfrm>
-              <a:off x="1603943" y="2478803"/>
+              <a:off x="1606548" y="2753047"/>
               <a:ext cx="44283" cy="0"/>
             </a:xfrm>
             <a:custGeom>
@@ -12782,9 +12704,9 @@
                 </a:path>
               </a:pathLst>
             </a:custGeom>
-            <a:ln w="17246" cap="flat">
-              <a:solidFill>
-                <a:srgbClr val="000000">
+            <a:ln w="18970" cap="flat">
+              <a:solidFill>
+                <a:srgbClr val="333333">
                   <a:alpha val="100000"/>
                 </a:srgbClr>
               </a:solidFill>
@@ -12806,7 +12728,7 @@
           </p:nvSpPr>
           <p:spPr>
             <a:xfrm>
-              <a:off x="1603943" y="2251448"/>
+              <a:off x="1606548" y="2472047"/>
               <a:ext cx="44283" cy="0"/>
             </a:xfrm>
             <a:custGeom>
@@ -12822,9 +12744,9 @@
                 </a:path>
               </a:pathLst>
             </a:custGeom>
-            <a:ln w="17246" cap="flat">
-              <a:solidFill>
-                <a:srgbClr val="000000">
+            <a:ln w="18970" cap="flat">
+              <a:solidFill>
+                <a:srgbClr val="333333">
                   <a:alpha val="100000"/>
                 </a:srgbClr>
               </a:solidFill>
@@ -12846,7 +12768,7 @@
           </p:nvSpPr>
           <p:spPr>
             <a:xfrm>
-              <a:off x="1603943" y="2024093"/>
+              <a:off x="1606548" y="2191048"/>
               <a:ext cx="44283" cy="0"/>
             </a:xfrm>
             <a:custGeom>
@@ -12862,9 +12784,9 @@
                 </a:path>
               </a:pathLst>
             </a:custGeom>
-            <a:ln w="17246" cap="flat">
-              <a:solidFill>
-                <a:srgbClr val="000000">
+            <a:ln w="18970" cap="flat">
+              <a:solidFill>
+                <a:srgbClr val="333333">
                   <a:alpha val="100000"/>
                 </a:srgbClr>
               </a:solidFill>
@@ -12886,7 +12808,7 @@
           </p:nvSpPr>
           <p:spPr>
             <a:xfrm>
-              <a:off x="1603943" y="1796739"/>
+              <a:off x="1606548" y="1910048"/>
               <a:ext cx="44283" cy="0"/>
             </a:xfrm>
             <a:custGeom>
@@ -12902,9 +12824,9 @@
                 </a:path>
               </a:pathLst>
             </a:custGeom>
-            <a:ln w="17246" cap="flat">
-              <a:solidFill>
-                <a:srgbClr val="000000">
+            <a:ln w="18970" cap="flat">
+              <a:solidFill>
+                <a:srgbClr val="333333">
                   <a:alpha val="100000"/>
                 </a:srgbClr>
               </a:solidFill>
@@ -12926,7 +12848,7 @@
           </p:nvSpPr>
           <p:spPr>
             <a:xfrm>
-              <a:off x="1603943" y="1569384"/>
+              <a:off x="1606548" y="1629048"/>
               <a:ext cx="44283" cy="0"/>
             </a:xfrm>
             <a:custGeom>
@@ -12942,9 +12864,9 @@
                 </a:path>
               </a:pathLst>
             </a:custGeom>
-            <a:ln w="17246" cap="flat">
-              <a:solidFill>
-                <a:srgbClr val="000000">
+            <a:ln w="18970" cap="flat">
+              <a:solidFill>
+                <a:srgbClr val="333333">
                   <a:alpha val="100000"/>
                 </a:srgbClr>
               </a:solidFill>
@@ -12966,7 +12888,7 @@
           </p:nvSpPr>
           <p:spPr>
             <a:xfrm>
-              <a:off x="1603943" y="1342030"/>
+              <a:off x="1606548" y="1348048"/>
               <a:ext cx="44283" cy="0"/>
             </a:xfrm>
             <a:custGeom>
@@ -12982,9 +12904,9 @@
                 </a:path>
               </a:pathLst>
             </a:custGeom>
-            <a:ln w="17246" cap="flat">
-              <a:solidFill>
-                <a:srgbClr val="000000">
+            <a:ln w="18970" cap="flat">
+              <a:solidFill>
+                <a:srgbClr val="333333">
                   <a:alpha val="100000"/>
                 </a:srgbClr>
               </a:solidFill>
@@ -13006,15 +12928,15 @@
           </p:nvSpPr>
           <p:spPr>
             <a:xfrm>
-              <a:off x="1648227" y="2850534"/>
-              <a:ext cx="0" cy="1171063"/>
+              <a:off x="1650832" y="3126564"/>
+              <a:ext cx="0" cy="1447380"/>
             </a:xfrm>
             <a:custGeom>
               <a:avLst/>
               <a:pathLst>
-                <a:path w="0" h="1171063">
+                <a:path w="0" h="1447380">
                   <a:moveTo>
-                    <a:pt x="0" y="1171063"/>
+                    <a:pt x="0" y="1447380"/>
                   </a:moveTo>
                   <a:lnTo>
                     <a:pt x="0" y="0"/>
@@ -13022,7 +12944,7 @@
                 </a:path>
               </a:pathLst>
             </a:custGeom>
-            <a:ln w="17246" cap="flat">
+            <a:ln w="18970" cap="flat">
               <a:solidFill>
                 <a:srgbClr val="000000">
                   <a:alpha val="100000"/>
@@ -13046,8 +12968,8 @@
           </p:nvSpPr>
           <p:spPr>
             <a:xfrm>
-              <a:off x="1251810" y="3957687"/>
-              <a:ext cx="316706" cy="107582"/>
+              <a:off x="1243400" y="4510166"/>
+              <a:ext cx="327720" cy="107350"/>
             </a:xfrm>
             <a:prstGeom prst="rect">
               <a:avLst/>
@@ -13059,9 +12981,6 @@
             <a:lstStyle/>
             <a:p>
               <a:pPr algn="l" marL="0" marR="0" indent="0">
-                <a:lnSpc>
-                  <a:spcPts val="1120"/>
-                </a:lnSpc>
                 <a:spcBef>
                   <a:spcPts val="0"/>
                 </a:spcBef>
@@ -13070,7 +12989,7 @@
                 </a:spcAft>
               </a:pPr>
               <a:r>
-                <a:rPr sz="1120">
+                <a:rPr sz="1160" i="0" b="0">
                   <a:solidFill>
                     <a:srgbClr val="000000">
                       <a:alpha val="100000"/>
@@ -13092,8 +13011,8 @@
           </p:nvSpPr>
           <p:spPr>
             <a:xfrm>
-              <a:off x="1251810" y="3730332"/>
-              <a:ext cx="316706" cy="107582"/>
+              <a:off x="1243400" y="4229166"/>
+              <a:ext cx="327720" cy="107350"/>
             </a:xfrm>
             <a:prstGeom prst="rect">
               <a:avLst/>
@@ -13105,9 +13024,6 @@
             <a:lstStyle/>
             <a:p>
               <a:pPr algn="l" marL="0" marR="0" indent="0">
-                <a:lnSpc>
-                  <a:spcPts val="1120"/>
-                </a:lnSpc>
                 <a:spcBef>
                   <a:spcPts val="0"/>
                 </a:spcBef>
@@ -13116,7 +13032,7 @@
                 </a:spcAft>
               </a:pPr>
               <a:r>
-                <a:rPr sz="1120">
+                <a:rPr sz="1160" i="0" b="0">
                   <a:solidFill>
                     <a:srgbClr val="000000">
                       <a:alpha val="100000"/>
@@ -13138,8 +13054,8 @@
           </p:nvSpPr>
           <p:spPr>
             <a:xfrm>
-              <a:off x="1251810" y="3502978"/>
-              <a:ext cx="316706" cy="107582"/>
+              <a:off x="1243400" y="3948166"/>
+              <a:ext cx="327720" cy="107350"/>
             </a:xfrm>
             <a:prstGeom prst="rect">
               <a:avLst/>
@@ -13151,9 +13067,6 @@
             <a:lstStyle/>
             <a:p>
               <a:pPr algn="l" marL="0" marR="0" indent="0">
-                <a:lnSpc>
-                  <a:spcPts val="1120"/>
-                </a:lnSpc>
                 <a:spcBef>
                   <a:spcPts val="0"/>
                 </a:spcBef>
@@ -13162,7 +13075,7 @@
                 </a:spcAft>
               </a:pPr>
               <a:r>
-                <a:rPr sz="1120">
+                <a:rPr sz="1160" i="0" b="0">
                   <a:solidFill>
                     <a:srgbClr val="000000">
                       <a:alpha val="100000"/>
@@ -13184,8 +13097,8 @@
           </p:nvSpPr>
           <p:spPr>
             <a:xfrm>
-              <a:off x="1251810" y="3275623"/>
-              <a:ext cx="316706" cy="107582"/>
+              <a:off x="1243400" y="3667166"/>
+              <a:ext cx="327720" cy="107350"/>
             </a:xfrm>
             <a:prstGeom prst="rect">
               <a:avLst/>
@@ -13197,9 +13110,6 @@
             <a:lstStyle/>
             <a:p>
               <a:pPr algn="l" marL="0" marR="0" indent="0">
-                <a:lnSpc>
-                  <a:spcPts val="1120"/>
-                </a:lnSpc>
                 <a:spcBef>
                   <a:spcPts val="0"/>
                 </a:spcBef>
@@ -13208,7 +13118,7 @@
                 </a:spcAft>
               </a:pPr>
               <a:r>
-                <a:rPr sz="1120">
+                <a:rPr sz="1160" i="0" b="0">
                   <a:solidFill>
                     <a:srgbClr val="000000">
                       <a:alpha val="100000"/>
@@ -13230,8 +13140,8 @@
           </p:nvSpPr>
           <p:spPr>
             <a:xfrm>
-              <a:off x="1251810" y="3048268"/>
-              <a:ext cx="316706" cy="107582"/>
+              <a:off x="1243400" y="3386166"/>
+              <a:ext cx="327720" cy="107350"/>
             </a:xfrm>
             <a:prstGeom prst="rect">
               <a:avLst/>
@@ -13243,9 +13153,6 @@
             <a:lstStyle/>
             <a:p>
               <a:pPr algn="l" marL="0" marR="0" indent="0">
-                <a:lnSpc>
-                  <a:spcPts val="1120"/>
-                </a:lnSpc>
                 <a:spcBef>
                   <a:spcPts val="0"/>
                 </a:spcBef>
@@ -13254,7 +13161,7 @@
                 </a:spcAft>
               </a:pPr>
               <a:r>
-                <a:rPr sz="1120">
+                <a:rPr sz="1160" i="0" b="0">
                   <a:solidFill>
                     <a:srgbClr val="000000">
                       <a:alpha val="100000"/>
@@ -13276,8 +13183,8 @@
           </p:nvSpPr>
           <p:spPr>
             <a:xfrm>
-              <a:off x="1251810" y="2820914"/>
-              <a:ext cx="316706" cy="107582"/>
+              <a:off x="1243400" y="3105166"/>
+              <a:ext cx="327720" cy="107350"/>
             </a:xfrm>
             <a:prstGeom prst="rect">
               <a:avLst/>
@@ -13289,9 +13196,6 @@
             <a:lstStyle/>
             <a:p>
               <a:pPr algn="l" marL="0" marR="0" indent="0">
-                <a:lnSpc>
-                  <a:spcPts val="1120"/>
-                </a:lnSpc>
                 <a:spcBef>
                   <a:spcPts val="0"/>
                 </a:spcBef>
@@ -13300,7 +13204,7 @@
                 </a:spcAft>
               </a:pPr>
               <a:r>
-                <a:rPr sz="1120">
+                <a:rPr sz="1160" i="0" b="0">
                   <a:solidFill>
                     <a:srgbClr val="000000">
                       <a:alpha val="100000"/>
@@ -13322,7 +13226,7 @@
           </p:nvSpPr>
           <p:spPr>
             <a:xfrm>
-              <a:off x="1603943" y="4013423"/>
+              <a:off x="1606548" y="4563841"/>
               <a:ext cx="44283" cy="0"/>
             </a:xfrm>
             <a:custGeom>
@@ -13338,9 +13242,9 @@
                 </a:path>
               </a:pathLst>
             </a:custGeom>
-            <a:ln w="17246" cap="flat">
-              <a:solidFill>
-                <a:srgbClr val="000000">
+            <a:ln w="18970" cap="flat">
+              <a:solidFill>
+                <a:srgbClr val="333333">
                   <a:alpha val="100000"/>
                 </a:srgbClr>
               </a:solidFill>
@@ -13362,7 +13266,7 @@
           </p:nvSpPr>
           <p:spPr>
             <a:xfrm>
-              <a:off x="1603943" y="3786068"/>
+              <a:off x="1606548" y="4282841"/>
               <a:ext cx="44283" cy="0"/>
             </a:xfrm>
             <a:custGeom>
@@ -13378,9 +13282,9 @@
                 </a:path>
               </a:pathLst>
             </a:custGeom>
-            <a:ln w="17246" cap="flat">
-              <a:solidFill>
-                <a:srgbClr val="000000">
+            <a:ln w="18970" cap="flat">
+              <a:solidFill>
+                <a:srgbClr val="333333">
                   <a:alpha val="100000"/>
                 </a:srgbClr>
               </a:solidFill>
@@ -13402,7 +13306,7 @@
           </p:nvSpPr>
           <p:spPr>
             <a:xfrm>
-              <a:off x="1603943" y="3558714"/>
+              <a:off x="1606548" y="4001841"/>
               <a:ext cx="44283" cy="0"/>
             </a:xfrm>
             <a:custGeom>
@@ -13418,9 +13322,9 @@
                 </a:path>
               </a:pathLst>
             </a:custGeom>
-            <a:ln w="17246" cap="flat">
-              <a:solidFill>
-                <a:srgbClr val="000000">
+            <a:ln w="18970" cap="flat">
+              <a:solidFill>
+                <a:srgbClr val="333333">
                   <a:alpha val="100000"/>
                 </a:srgbClr>
               </a:solidFill>
@@ -13442,7 +13346,7 @@
           </p:nvSpPr>
           <p:spPr>
             <a:xfrm>
-              <a:off x="1603943" y="3331359"/>
+              <a:off x="1606548" y="3720841"/>
               <a:ext cx="44283" cy="0"/>
             </a:xfrm>
             <a:custGeom>
@@ -13458,9 +13362,9 @@
                 </a:path>
               </a:pathLst>
             </a:custGeom>
-            <a:ln w="17246" cap="flat">
-              <a:solidFill>
-                <a:srgbClr val="000000">
+            <a:ln w="18970" cap="flat">
+              <a:solidFill>
+                <a:srgbClr val="333333">
                   <a:alpha val="100000"/>
                 </a:srgbClr>
               </a:solidFill>
@@ -13482,7 +13386,7 @@
           </p:nvSpPr>
           <p:spPr>
             <a:xfrm>
-              <a:off x="1603943" y="3104004"/>
+              <a:off x="1606548" y="3439841"/>
               <a:ext cx="44283" cy="0"/>
             </a:xfrm>
             <a:custGeom>
@@ -13498,9 +13402,9 @@
                 </a:path>
               </a:pathLst>
             </a:custGeom>
-            <a:ln w="17246" cap="flat">
-              <a:solidFill>
-                <a:srgbClr val="000000">
+            <a:ln w="18970" cap="flat">
+              <a:solidFill>
+                <a:srgbClr val="333333">
                   <a:alpha val="100000"/>
                 </a:srgbClr>
               </a:solidFill>
@@ -13522,7 +13426,7 @@
           </p:nvSpPr>
           <p:spPr>
             <a:xfrm>
-              <a:off x="1603943" y="2876650"/>
+              <a:off x="1606548" y="3158842"/>
               <a:ext cx="44283" cy="0"/>
             </a:xfrm>
             <a:custGeom>
@@ -13538,9 +13442,9 @@
                 </a:path>
               </a:pathLst>
             </a:custGeom>
-            <a:ln w="17246" cap="flat">
-              <a:solidFill>
-                <a:srgbClr val="000000">
+            <a:ln w="18970" cap="flat">
+              <a:solidFill>
+                <a:srgbClr val="333333">
                   <a:alpha val="100000"/>
                 </a:srgbClr>
               </a:solidFill>
@@ -13562,8 +13466,8 @@
           </p:nvSpPr>
           <p:spPr>
             <a:xfrm>
-              <a:off x="3399639" y="4338047"/>
-              <a:ext cx="364021" cy="129616"/>
+              <a:off x="3325070" y="4892104"/>
+              <a:ext cx="349666" cy="123078"/>
             </a:xfrm>
             <a:prstGeom prst="rect">
               <a:avLst/>
@@ -13575,9 +13479,6 @@
             <a:lstStyle/>
             <a:p>
               <a:pPr algn="l" marL="0" marR="0" indent="0">
-                <a:lnSpc>
-                  <a:spcPts val="1400"/>
-                </a:lnSpc>
                 <a:spcBef>
                   <a:spcPts val="0"/>
                 </a:spcBef>
@@ -13586,7 +13487,7 @@
                 </a:spcAft>
               </a:pPr>
               <a:r>
-                <a:rPr sz="1400" b="1">
+                <a:rPr sz="1330" i="0" b="1">
                   <a:solidFill>
                     <a:srgbClr val="000000">
                       <a:alpha val="100000"/>
@@ -13608,8 +13509,8 @@
           </p:nvSpPr>
           <p:spPr>
             <a:xfrm rot="-5400000">
-              <a:off x="711153" y="2599954"/>
-              <a:ext cx="707206" cy="137604"/>
+              <a:off x="731492" y="2883318"/>
+              <a:ext cx="671718" cy="123078"/>
             </a:xfrm>
             <a:prstGeom prst="rect">
               <a:avLst/>
@@ -13621,9 +13522,6 @@
             <a:lstStyle/>
             <a:p>
               <a:pPr algn="l" marL="0" marR="0" indent="0">
-                <a:lnSpc>
-                  <a:spcPts val="1400"/>
-                </a:lnSpc>
                 <a:spcBef>
                   <a:spcPts val="0"/>
                 </a:spcBef>
@@ -13632,7 +13530,7 @@
                 </a:spcAft>
               </a:pPr>
               <a:r>
-                <a:rPr sz="1400" b="1">
+                <a:rPr sz="1330" i="0" b="1">
                   <a:solidFill>
                     <a:srgbClr val="000000">
                       <a:alpha val="100000"/>
@@ -13654,8 +13552,8 @@
           </p:nvSpPr>
           <p:spPr>
             <a:xfrm>
-              <a:off x="5692207" y="1689072"/>
-              <a:ext cx="582066" cy="1959368"/>
+              <a:off x="5526110" y="1703713"/>
+              <a:ext cx="565283" cy="2482288"/>
             </a:xfrm>
             <a:prstGeom prst="rect">
               <a:avLst/>
@@ -13674,14 +13572,494 @@
         </p:sp>
         <p:sp>
           <p:nvSpPr>
-            <p:cNvPr id="302" name="tx301"/>
-            <p:cNvSpPr/>
-            <p:nvPr/>
-          </p:nvSpPr>
-          <p:spPr>
-            <a:xfrm>
-              <a:off x="5692207" y="1698076"/>
-              <a:ext cx="582066" cy="117946"/>
+            <p:cNvPr id="302" name="pl301"/>
+            <p:cNvSpPr/>
+            <p:nvPr/>
+          </p:nvSpPr>
+          <p:spPr>
+            <a:xfrm>
+              <a:off x="5551310" y="1807142"/>
+              <a:ext cx="201599" cy="0"/>
+            </a:xfrm>
+            <a:custGeom>
+              <a:avLst/>
+              <a:pathLst>
+                <a:path w="201599" h="0">
+                  <a:moveTo>
+                    <a:pt x="0" y="0"/>
+                  </a:moveTo>
+                  <a:lnTo>
+                    <a:pt x="201599" y="0"/>
+                  </a:lnTo>
+                </a:path>
+              </a:pathLst>
+            </a:custGeom>
+            <a:ln w="27101" cap="flat">
+              <a:solidFill>
+                <a:srgbClr val="F8766D">
+                  <a:alpha val="100000"/>
+                </a:srgbClr>
+              </a:solidFill>
+              <a:prstDash val="solid"/>
+              <a:round/>
+            </a:ln>
+          </p:spPr>
+          <p:txBody>
+            <a:bodyPr/>
+            <a:lstStyle/>
+            <a:p/>
+          </p:txBody>
+        </p:sp>
+        <p:sp>
+          <p:nvSpPr>
+            <p:cNvPr id="303" name="pl302"/>
+            <p:cNvSpPr/>
+            <p:nvPr/>
+          </p:nvSpPr>
+          <p:spPr>
+            <a:xfrm>
+              <a:off x="5551310" y="2013999"/>
+              <a:ext cx="201599" cy="0"/>
+            </a:xfrm>
+            <a:custGeom>
+              <a:avLst/>
+              <a:pathLst>
+                <a:path w="201599" h="0">
+                  <a:moveTo>
+                    <a:pt x="0" y="0"/>
+                  </a:moveTo>
+                  <a:lnTo>
+                    <a:pt x="201599" y="0"/>
+                  </a:lnTo>
+                </a:path>
+              </a:pathLst>
+            </a:custGeom>
+            <a:ln w="27101" cap="flat">
+              <a:solidFill>
+                <a:srgbClr val="DE8C00">
+                  <a:alpha val="100000"/>
+                </a:srgbClr>
+              </a:solidFill>
+              <a:prstDash val="solid"/>
+              <a:round/>
+            </a:ln>
+          </p:spPr>
+          <p:txBody>
+            <a:bodyPr/>
+            <a:lstStyle/>
+            <a:p/>
+          </p:txBody>
+        </p:sp>
+        <p:sp>
+          <p:nvSpPr>
+            <p:cNvPr id="304" name="pl303"/>
+            <p:cNvSpPr/>
+            <p:nvPr/>
+          </p:nvSpPr>
+          <p:spPr>
+            <a:xfrm>
+              <a:off x="5551310" y="2220857"/>
+              <a:ext cx="201599" cy="0"/>
+            </a:xfrm>
+            <a:custGeom>
+              <a:avLst/>
+              <a:pathLst>
+                <a:path w="201599" h="0">
+                  <a:moveTo>
+                    <a:pt x="0" y="0"/>
+                  </a:moveTo>
+                  <a:lnTo>
+                    <a:pt x="201599" y="0"/>
+                  </a:lnTo>
+                </a:path>
+              </a:pathLst>
+            </a:custGeom>
+            <a:ln w="27101" cap="flat">
+              <a:solidFill>
+                <a:srgbClr val="B79F00">
+                  <a:alpha val="100000"/>
+                </a:srgbClr>
+              </a:solidFill>
+              <a:prstDash val="solid"/>
+              <a:round/>
+            </a:ln>
+          </p:spPr>
+          <p:txBody>
+            <a:bodyPr/>
+            <a:lstStyle/>
+            <a:p/>
+          </p:txBody>
+        </p:sp>
+        <p:sp>
+          <p:nvSpPr>
+            <p:cNvPr id="305" name="pl304"/>
+            <p:cNvSpPr/>
+            <p:nvPr/>
+          </p:nvSpPr>
+          <p:spPr>
+            <a:xfrm>
+              <a:off x="5551310" y="2427714"/>
+              <a:ext cx="201599" cy="0"/>
+            </a:xfrm>
+            <a:custGeom>
+              <a:avLst/>
+              <a:pathLst>
+                <a:path w="201599" h="0">
+                  <a:moveTo>
+                    <a:pt x="0" y="0"/>
+                  </a:moveTo>
+                  <a:lnTo>
+                    <a:pt x="201599" y="0"/>
+                  </a:lnTo>
+                </a:path>
+              </a:pathLst>
+            </a:custGeom>
+            <a:ln w="27101" cap="flat">
+              <a:solidFill>
+                <a:srgbClr val="7CAE00">
+                  <a:alpha val="100000"/>
+                </a:srgbClr>
+              </a:solidFill>
+              <a:prstDash val="solid"/>
+              <a:round/>
+            </a:ln>
+          </p:spPr>
+          <p:txBody>
+            <a:bodyPr/>
+            <a:lstStyle/>
+            <a:p/>
+          </p:txBody>
+        </p:sp>
+        <p:sp>
+          <p:nvSpPr>
+            <p:cNvPr id="306" name="pl305"/>
+            <p:cNvSpPr/>
+            <p:nvPr/>
+          </p:nvSpPr>
+          <p:spPr>
+            <a:xfrm>
+              <a:off x="5551310" y="2634571"/>
+              <a:ext cx="201599" cy="0"/>
+            </a:xfrm>
+            <a:custGeom>
+              <a:avLst/>
+              <a:pathLst>
+                <a:path w="201599" h="0">
+                  <a:moveTo>
+                    <a:pt x="0" y="0"/>
+                  </a:moveTo>
+                  <a:lnTo>
+                    <a:pt x="201599" y="0"/>
+                  </a:lnTo>
+                </a:path>
+              </a:pathLst>
+            </a:custGeom>
+            <a:ln w="27101" cap="flat">
+              <a:solidFill>
+                <a:srgbClr val="00BA38">
+                  <a:alpha val="100000"/>
+                </a:srgbClr>
+              </a:solidFill>
+              <a:prstDash val="solid"/>
+              <a:round/>
+            </a:ln>
+          </p:spPr>
+          <p:txBody>
+            <a:bodyPr/>
+            <a:lstStyle/>
+            <a:p/>
+          </p:txBody>
+        </p:sp>
+        <p:sp>
+          <p:nvSpPr>
+            <p:cNvPr id="307" name="pl306"/>
+            <p:cNvSpPr/>
+            <p:nvPr/>
+          </p:nvSpPr>
+          <p:spPr>
+            <a:xfrm>
+              <a:off x="5551310" y="2841429"/>
+              <a:ext cx="201599" cy="0"/>
+            </a:xfrm>
+            <a:custGeom>
+              <a:avLst/>
+              <a:pathLst>
+                <a:path w="201599" h="0">
+                  <a:moveTo>
+                    <a:pt x="0" y="0"/>
+                  </a:moveTo>
+                  <a:lnTo>
+                    <a:pt x="201599" y="0"/>
+                  </a:lnTo>
+                </a:path>
+              </a:pathLst>
+            </a:custGeom>
+            <a:ln w="27101" cap="flat">
+              <a:solidFill>
+                <a:srgbClr val="00C08B">
+                  <a:alpha val="100000"/>
+                </a:srgbClr>
+              </a:solidFill>
+              <a:prstDash val="solid"/>
+              <a:round/>
+            </a:ln>
+          </p:spPr>
+          <p:txBody>
+            <a:bodyPr/>
+            <a:lstStyle/>
+            <a:p/>
+          </p:txBody>
+        </p:sp>
+        <p:sp>
+          <p:nvSpPr>
+            <p:cNvPr id="308" name="pl307"/>
+            <p:cNvSpPr/>
+            <p:nvPr/>
+          </p:nvSpPr>
+          <p:spPr>
+            <a:xfrm>
+              <a:off x="5551310" y="3048286"/>
+              <a:ext cx="201599" cy="0"/>
+            </a:xfrm>
+            <a:custGeom>
+              <a:avLst/>
+              <a:pathLst>
+                <a:path w="201599" h="0">
+                  <a:moveTo>
+                    <a:pt x="0" y="0"/>
+                  </a:moveTo>
+                  <a:lnTo>
+                    <a:pt x="201599" y="0"/>
+                  </a:lnTo>
+                </a:path>
+              </a:pathLst>
+            </a:custGeom>
+            <a:ln w="27101" cap="flat">
+              <a:solidFill>
+                <a:srgbClr val="00BFC4">
+                  <a:alpha val="100000"/>
+                </a:srgbClr>
+              </a:solidFill>
+              <a:prstDash val="solid"/>
+              <a:round/>
+            </a:ln>
+          </p:spPr>
+          <p:txBody>
+            <a:bodyPr/>
+            <a:lstStyle/>
+            <a:p/>
+          </p:txBody>
+        </p:sp>
+        <p:sp>
+          <p:nvSpPr>
+            <p:cNvPr id="309" name="pl308"/>
+            <p:cNvSpPr/>
+            <p:nvPr/>
+          </p:nvSpPr>
+          <p:spPr>
+            <a:xfrm>
+              <a:off x="5551310" y="3255144"/>
+              <a:ext cx="201599" cy="0"/>
+            </a:xfrm>
+            <a:custGeom>
+              <a:avLst/>
+              <a:pathLst>
+                <a:path w="201599" h="0">
+                  <a:moveTo>
+                    <a:pt x="0" y="0"/>
+                  </a:moveTo>
+                  <a:lnTo>
+                    <a:pt x="201599" y="0"/>
+                  </a:lnTo>
+                </a:path>
+              </a:pathLst>
+            </a:custGeom>
+            <a:ln w="27101" cap="flat">
+              <a:solidFill>
+                <a:srgbClr val="00B4F0">
+                  <a:alpha val="100000"/>
+                </a:srgbClr>
+              </a:solidFill>
+              <a:prstDash val="solid"/>
+              <a:round/>
+            </a:ln>
+          </p:spPr>
+          <p:txBody>
+            <a:bodyPr/>
+            <a:lstStyle/>
+            <a:p/>
+          </p:txBody>
+        </p:sp>
+        <p:sp>
+          <p:nvSpPr>
+            <p:cNvPr id="310" name="pl309"/>
+            <p:cNvSpPr/>
+            <p:nvPr/>
+          </p:nvSpPr>
+          <p:spPr>
+            <a:xfrm>
+              <a:off x="5551310" y="3462001"/>
+              <a:ext cx="201599" cy="0"/>
+            </a:xfrm>
+            <a:custGeom>
+              <a:avLst/>
+              <a:pathLst>
+                <a:path w="201599" h="0">
+                  <a:moveTo>
+                    <a:pt x="0" y="0"/>
+                  </a:moveTo>
+                  <a:lnTo>
+                    <a:pt x="201599" y="0"/>
+                  </a:lnTo>
+                </a:path>
+              </a:pathLst>
+            </a:custGeom>
+            <a:ln w="27101" cap="flat">
+              <a:solidFill>
+                <a:srgbClr val="619CFF">
+                  <a:alpha val="100000"/>
+                </a:srgbClr>
+              </a:solidFill>
+              <a:prstDash val="solid"/>
+              <a:round/>
+            </a:ln>
+          </p:spPr>
+          <p:txBody>
+            <a:bodyPr/>
+            <a:lstStyle/>
+            <a:p/>
+          </p:txBody>
+        </p:sp>
+        <p:sp>
+          <p:nvSpPr>
+            <p:cNvPr id="311" name="pl310"/>
+            <p:cNvSpPr/>
+            <p:nvPr/>
+          </p:nvSpPr>
+          <p:spPr>
+            <a:xfrm>
+              <a:off x="5551310" y="3668858"/>
+              <a:ext cx="201599" cy="0"/>
+            </a:xfrm>
+            <a:custGeom>
+              <a:avLst/>
+              <a:pathLst>
+                <a:path w="201599" h="0">
+                  <a:moveTo>
+                    <a:pt x="0" y="0"/>
+                  </a:moveTo>
+                  <a:lnTo>
+                    <a:pt x="201599" y="0"/>
+                  </a:lnTo>
+                </a:path>
+              </a:pathLst>
+            </a:custGeom>
+            <a:ln w="27101" cap="flat">
+              <a:solidFill>
+                <a:srgbClr val="C77CFF">
+                  <a:alpha val="100000"/>
+                </a:srgbClr>
+              </a:solidFill>
+              <a:prstDash val="solid"/>
+              <a:round/>
+            </a:ln>
+          </p:spPr>
+          <p:txBody>
+            <a:bodyPr/>
+            <a:lstStyle/>
+            <a:p/>
+          </p:txBody>
+        </p:sp>
+        <p:sp>
+          <p:nvSpPr>
+            <p:cNvPr id="312" name="pl311"/>
+            <p:cNvSpPr/>
+            <p:nvPr/>
+          </p:nvSpPr>
+          <p:spPr>
+            <a:xfrm>
+              <a:off x="5551310" y="3875716"/>
+              <a:ext cx="201599" cy="0"/>
+            </a:xfrm>
+            <a:custGeom>
+              <a:avLst/>
+              <a:pathLst>
+                <a:path w="201599" h="0">
+                  <a:moveTo>
+                    <a:pt x="0" y="0"/>
+                  </a:moveTo>
+                  <a:lnTo>
+                    <a:pt x="201599" y="0"/>
+                  </a:lnTo>
+                </a:path>
+              </a:pathLst>
+            </a:custGeom>
+            <a:ln w="27101" cap="flat">
+              <a:solidFill>
+                <a:srgbClr val="F564E3">
+                  <a:alpha val="100000"/>
+                </a:srgbClr>
+              </a:solidFill>
+              <a:prstDash val="solid"/>
+              <a:round/>
+            </a:ln>
+          </p:spPr>
+          <p:txBody>
+            <a:bodyPr/>
+            <a:lstStyle/>
+            <a:p/>
+          </p:txBody>
+        </p:sp>
+        <p:sp>
+          <p:nvSpPr>
+            <p:cNvPr id="313" name="pl312"/>
+            <p:cNvSpPr/>
+            <p:nvPr/>
+          </p:nvSpPr>
+          <p:spPr>
+            <a:xfrm>
+              <a:off x="5551310" y="4082573"/>
+              <a:ext cx="201599" cy="0"/>
+            </a:xfrm>
+            <a:custGeom>
+              <a:avLst/>
+              <a:pathLst>
+                <a:path w="201599" h="0">
+                  <a:moveTo>
+                    <a:pt x="0" y="0"/>
+                  </a:moveTo>
+                  <a:lnTo>
+                    <a:pt x="201599" y="0"/>
+                  </a:lnTo>
+                </a:path>
+              </a:pathLst>
+            </a:custGeom>
+            <a:ln w="27101" cap="flat">
+              <a:solidFill>
+                <a:srgbClr val="FF64B0">
+                  <a:alpha val="100000"/>
+                </a:srgbClr>
+              </a:solidFill>
+              <a:prstDash val="solid"/>
+              <a:round/>
+            </a:ln>
+          </p:spPr>
+          <p:txBody>
+            <a:bodyPr/>
+            <a:lstStyle/>
+            <a:p/>
+          </p:txBody>
+        </p:sp>
+        <p:sp>
+          <p:nvSpPr>
+            <p:cNvPr id="314" name="tx313"/>
+            <p:cNvSpPr/>
+            <p:nvPr/>
+          </p:nvSpPr>
+          <p:spPr>
+            <a:xfrm>
+              <a:off x="5816068" y="1756210"/>
+              <a:ext cx="186446" cy="101864"/>
             </a:xfrm>
             <a:prstGeom prst="rect">
               <a:avLst/>
@@ -13693,9 +14071,6 @@
             <a:lstStyle/>
             <a:p>
               <a:pPr algn="l" marL="0" marR="0" indent="0">
-                <a:lnSpc>
-                  <a:spcPts val="1200"/>
-                </a:lnSpc>
                 <a:spcBef>
                   <a:spcPts val="0"/>
                 </a:spcBef>
@@ -13704,953 +14079,7 @@
                 </a:spcAft>
               </a:pPr>
               <a:r>
-                <a:rPr sz="1200">
-                  <a:solidFill>
-                    <a:srgbClr val="000000">
-                      <a:alpha val="100000"/>
-                    </a:srgbClr>
-                  </a:solidFill>
-                  <a:latin typeface="DejaVu Sans"/>
-                  <a:cs typeface="DejaVu Sans"/>
-                </a:rPr>
-                <a:t>Tank.ID</a:t>
-              </a:r>
-            </a:p>
-          </p:txBody>
-        </p:sp>
-        <p:sp>
-          <p:nvSpPr>
-            <p:cNvPr id="303" name="pl302"/>
-            <p:cNvSpPr/>
-            <p:nvPr/>
-          </p:nvSpPr>
-          <p:spPr>
-            <a:xfrm>
-              <a:off x="5706607" y="1992440"/>
-              <a:ext cx="115199" cy="0"/>
-            </a:xfrm>
-            <a:custGeom>
-              <a:avLst/>
-              <a:pathLst>
-                <a:path w="115199" h="0">
-                  <a:moveTo>
-                    <a:pt x="0" y="0"/>
-                  </a:moveTo>
-                  <a:lnTo>
-                    <a:pt x="115199" y="0"/>
-                  </a:lnTo>
-                </a:path>
-              </a:pathLst>
-            </a:custGeom>
-            <a:ln w="27101" cap="flat">
-              <a:solidFill>
-                <a:srgbClr val="F8766D">
-                  <a:alpha val="100000"/>
-                </a:srgbClr>
-              </a:solidFill>
-              <a:prstDash val="solid"/>
-              <a:round/>
-            </a:ln>
-          </p:spPr>
-          <p:txBody>
-            <a:bodyPr/>
-            <a:lstStyle/>
-            <a:p/>
-          </p:txBody>
-        </p:sp>
-        <p:sp>
-          <p:nvSpPr>
-            <p:cNvPr id="304" name="pt303"/>
-            <p:cNvSpPr/>
-            <p:nvPr/>
-          </p:nvSpPr>
-          <p:spPr>
-            <a:xfrm>
-              <a:off x="5739381" y="1967614"/>
-              <a:ext cx="49651" cy="49651"/>
-            </a:xfrm>
-            <a:prstGeom prst="ellipse">
-              <a:avLst/>
-            </a:prstGeom>
-            <a:solidFill>
-              <a:srgbClr val="F8766D">
-                <a:alpha val="100000"/>
-              </a:srgbClr>
-            </a:solidFill>
-            <a:ln w="9000" cap="rnd">
-              <a:solidFill>
-                <a:srgbClr val="F8766D">
-                  <a:alpha val="100000"/>
-                </a:srgbClr>
-              </a:solidFill>
-              <a:prstDash val="solid"/>
-              <a:round/>
-            </a:ln>
-          </p:spPr>
-          <p:txBody>
-            <a:bodyPr/>
-            <a:lstStyle/>
-            <a:p/>
-          </p:txBody>
-        </p:sp>
-        <p:sp>
-          <p:nvSpPr>
-            <p:cNvPr id="305" name="pl304"/>
-            <p:cNvSpPr/>
-            <p:nvPr/>
-          </p:nvSpPr>
-          <p:spPr>
-            <a:xfrm>
-              <a:off x="5706607" y="2136440"/>
-              <a:ext cx="115199" cy="0"/>
-            </a:xfrm>
-            <a:custGeom>
-              <a:avLst/>
-              <a:pathLst>
-                <a:path w="115199" h="0">
-                  <a:moveTo>
-                    <a:pt x="0" y="0"/>
-                  </a:moveTo>
-                  <a:lnTo>
-                    <a:pt x="115199" y="0"/>
-                  </a:lnTo>
-                </a:path>
-              </a:pathLst>
-            </a:custGeom>
-            <a:ln w="27101" cap="flat">
-              <a:solidFill>
-                <a:srgbClr val="DE8C00">
-                  <a:alpha val="100000"/>
-                </a:srgbClr>
-              </a:solidFill>
-              <a:prstDash val="solid"/>
-              <a:round/>
-            </a:ln>
-          </p:spPr>
-          <p:txBody>
-            <a:bodyPr/>
-            <a:lstStyle/>
-            <a:p/>
-          </p:txBody>
-        </p:sp>
-        <p:sp>
-          <p:nvSpPr>
-            <p:cNvPr id="306" name="pt305"/>
-            <p:cNvSpPr/>
-            <p:nvPr/>
-          </p:nvSpPr>
-          <p:spPr>
-            <a:xfrm>
-              <a:off x="5739381" y="2111614"/>
-              <a:ext cx="49651" cy="49651"/>
-            </a:xfrm>
-            <a:prstGeom prst="ellipse">
-              <a:avLst/>
-            </a:prstGeom>
-            <a:solidFill>
-              <a:srgbClr val="DE8C00">
-                <a:alpha val="100000"/>
-              </a:srgbClr>
-            </a:solidFill>
-            <a:ln w="9000" cap="rnd">
-              <a:solidFill>
-                <a:srgbClr val="DE8C00">
-                  <a:alpha val="100000"/>
-                </a:srgbClr>
-              </a:solidFill>
-              <a:prstDash val="solid"/>
-              <a:round/>
-            </a:ln>
-          </p:spPr>
-          <p:txBody>
-            <a:bodyPr/>
-            <a:lstStyle/>
-            <a:p/>
-          </p:txBody>
-        </p:sp>
-        <p:sp>
-          <p:nvSpPr>
-            <p:cNvPr id="307" name="pl306"/>
-            <p:cNvSpPr/>
-            <p:nvPr/>
-          </p:nvSpPr>
-          <p:spPr>
-            <a:xfrm>
-              <a:off x="5706607" y="2280440"/>
-              <a:ext cx="115199" cy="0"/>
-            </a:xfrm>
-            <a:custGeom>
-              <a:avLst/>
-              <a:pathLst>
-                <a:path w="115199" h="0">
-                  <a:moveTo>
-                    <a:pt x="0" y="0"/>
-                  </a:moveTo>
-                  <a:lnTo>
-                    <a:pt x="115199" y="0"/>
-                  </a:lnTo>
-                </a:path>
-              </a:pathLst>
-            </a:custGeom>
-            <a:ln w="27101" cap="flat">
-              <a:solidFill>
-                <a:srgbClr val="B79F00">
-                  <a:alpha val="100000"/>
-                </a:srgbClr>
-              </a:solidFill>
-              <a:prstDash val="solid"/>
-              <a:round/>
-            </a:ln>
-          </p:spPr>
-          <p:txBody>
-            <a:bodyPr/>
-            <a:lstStyle/>
-            <a:p/>
-          </p:txBody>
-        </p:sp>
-        <p:sp>
-          <p:nvSpPr>
-            <p:cNvPr id="308" name="pt307"/>
-            <p:cNvSpPr/>
-            <p:nvPr/>
-          </p:nvSpPr>
-          <p:spPr>
-            <a:xfrm>
-              <a:off x="5739381" y="2255614"/>
-              <a:ext cx="49651" cy="49651"/>
-            </a:xfrm>
-            <a:prstGeom prst="ellipse">
-              <a:avLst/>
-            </a:prstGeom>
-            <a:solidFill>
-              <a:srgbClr val="B79F00">
-                <a:alpha val="100000"/>
-              </a:srgbClr>
-            </a:solidFill>
-            <a:ln w="9000" cap="rnd">
-              <a:solidFill>
-                <a:srgbClr val="B79F00">
-                  <a:alpha val="100000"/>
-                </a:srgbClr>
-              </a:solidFill>
-              <a:prstDash val="solid"/>
-              <a:round/>
-            </a:ln>
-          </p:spPr>
-          <p:txBody>
-            <a:bodyPr/>
-            <a:lstStyle/>
-            <a:p/>
-          </p:txBody>
-        </p:sp>
-        <p:sp>
-          <p:nvSpPr>
-            <p:cNvPr id="309" name="pl308"/>
-            <p:cNvSpPr/>
-            <p:nvPr/>
-          </p:nvSpPr>
-          <p:spPr>
-            <a:xfrm>
-              <a:off x="5706607" y="2424440"/>
-              <a:ext cx="115199" cy="0"/>
-            </a:xfrm>
-            <a:custGeom>
-              <a:avLst/>
-              <a:pathLst>
-                <a:path w="115199" h="0">
-                  <a:moveTo>
-                    <a:pt x="0" y="0"/>
-                  </a:moveTo>
-                  <a:lnTo>
-                    <a:pt x="115199" y="0"/>
-                  </a:lnTo>
-                </a:path>
-              </a:pathLst>
-            </a:custGeom>
-            <a:ln w="27101" cap="flat">
-              <a:solidFill>
-                <a:srgbClr val="7CAE00">
-                  <a:alpha val="100000"/>
-                </a:srgbClr>
-              </a:solidFill>
-              <a:prstDash val="solid"/>
-              <a:round/>
-            </a:ln>
-          </p:spPr>
-          <p:txBody>
-            <a:bodyPr/>
-            <a:lstStyle/>
-            <a:p/>
-          </p:txBody>
-        </p:sp>
-        <p:sp>
-          <p:nvSpPr>
-            <p:cNvPr id="310" name="pt309"/>
-            <p:cNvSpPr/>
-            <p:nvPr/>
-          </p:nvSpPr>
-          <p:spPr>
-            <a:xfrm>
-              <a:off x="5739381" y="2399614"/>
-              <a:ext cx="49651" cy="49651"/>
-            </a:xfrm>
-            <a:prstGeom prst="ellipse">
-              <a:avLst/>
-            </a:prstGeom>
-            <a:solidFill>
-              <a:srgbClr val="7CAE00">
-                <a:alpha val="100000"/>
-              </a:srgbClr>
-            </a:solidFill>
-            <a:ln w="9000" cap="rnd">
-              <a:solidFill>
-                <a:srgbClr val="7CAE00">
-                  <a:alpha val="100000"/>
-                </a:srgbClr>
-              </a:solidFill>
-              <a:prstDash val="solid"/>
-              <a:round/>
-            </a:ln>
-          </p:spPr>
-          <p:txBody>
-            <a:bodyPr/>
-            <a:lstStyle/>
-            <a:p/>
-          </p:txBody>
-        </p:sp>
-        <p:sp>
-          <p:nvSpPr>
-            <p:cNvPr id="311" name="pl310"/>
-            <p:cNvSpPr/>
-            <p:nvPr/>
-          </p:nvSpPr>
-          <p:spPr>
-            <a:xfrm>
-              <a:off x="5706607" y="2568440"/>
-              <a:ext cx="115199" cy="0"/>
-            </a:xfrm>
-            <a:custGeom>
-              <a:avLst/>
-              <a:pathLst>
-                <a:path w="115199" h="0">
-                  <a:moveTo>
-                    <a:pt x="0" y="0"/>
-                  </a:moveTo>
-                  <a:lnTo>
-                    <a:pt x="115199" y="0"/>
-                  </a:lnTo>
-                </a:path>
-              </a:pathLst>
-            </a:custGeom>
-            <a:ln w="27101" cap="flat">
-              <a:solidFill>
-                <a:srgbClr val="00BA38">
-                  <a:alpha val="100000"/>
-                </a:srgbClr>
-              </a:solidFill>
-              <a:prstDash val="solid"/>
-              <a:round/>
-            </a:ln>
-          </p:spPr>
-          <p:txBody>
-            <a:bodyPr/>
-            <a:lstStyle/>
-            <a:p/>
-          </p:txBody>
-        </p:sp>
-        <p:sp>
-          <p:nvSpPr>
-            <p:cNvPr id="312" name="pt311"/>
-            <p:cNvSpPr/>
-            <p:nvPr/>
-          </p:nvSpPr>
-          <p:spPr>
-            <a:xfrm>
-              <a:off x="5739381" y="2543614"/>
-              <a:ext cx="49651" cy="49651"/>
-            </a:xfrm>
-            <a:prstGeom prst="ellipse">
-              <a:avLst/>
-            </a:prstGeom>
-            <a:solidFill>
-              <a:srgbClr val="00BA38">
-                <a:alpha val="100000"/>
-              </a:srgbClr>
-            </a:solidFill>
-            <a:ln w="9000" cap="rnd">
-              <a:solidFill>
-                <a:srgbClr val="00BA38">
-                  <a:alpha val="100000"/>
-                </a:srgbClr>
-              </a:solidFill>
-              <a:prstDash val="solid"/>
-              <a:round/>
-            </a:ln>
-          </p:spPr>
-          <p:txBody>
-            <a:bodyPr/>
-            <a:lstStyle/>
-            <a:p/>
-          </p:txBody>
-        </p:sp>
-        <p:sp>
-          <p:nvSpPr>
-            <p:cNvPr id="313" name="pl312"/>
-            <p:cNvSpPr/>
-            <p:nvPr/>
-          </p:nvSpPr>
-          <p:spPr>
-            <a:xfrm>
-              <a:off x="5706607" y="2712440"/>
-              <a:ext cx="115199" cy="0"/>
-            </a:xfrm>
-            <a:custGeom>
-              <a:avLst/>
-              <a:pathLst>
-                <a:path w="115199" h="0">
-                  <a:moveTo>
-                    <a:pt x="0" y="0"/>
-                  </a:moveTo>
-                  <a:lnTo>
-                    <a:pt x="115199" y="0"/>
-                  </a:lnTo>
-                </a:path>
-              </a:pathLst>
-            </a:custGeom>
-            <a:ln w="27101" cap="flat">
-              <a:solidFill>
-                <a:srgbClr val="00C08B">
-                  <a:alpha val="100000"/>
-                </a:srgbClr>
-              </a:solidFill>
-              <a:prstDash val="solid"/>
-              <a:round/>
-            </a:ln>
-          </p:spPr>
-          <p:txBody>
-            <a:bodyPr/>
-            <a:lstStyle/>
-            <a:p/>
-          </p:txBody>
-        </p:sp>
-        <p:sp>
-          <p:nvSpPr>
-            <p:cNvPr id="314" name="pt313"/>
-            <p:cNvSpPr/>
-            <p:nvPr/>
-          </p:nvSpPr>
-          <p:spPr>
-            <a:xfrm>
-              <a:off x="5739381" y="2687614"/>
-              <a:ext cx="49651" cy="49651"/>
-            </a:xfrm>
-            <a:prstGeom prst="ellipse">
-              <a:avLst/>
-            </a:prstGeom>
-            <a:solidFill>
-              <a:srgbClr val="00C08B">
-                <a:alpha val="100000"/>
-              </a:srgbClr>
-            </a:solidFill>
-            <a:ln w="9000" cap="rnd">
-              <a:solidFill>
-                <a:srgbClr val="00C08B">
-                  <a:alpha val="100000"/>
-                </a:srgbClr>
-              </a:solidFill>
-              <a:prstDash val="solid"/>
-              <a:round/>
-            </a:ln>
-          </p:spPr>
-          <p:txBody>
-            <a:bodyPr/>
-            <a:lstStyle/>
-            <a:p/>
-          </p:txBody>
-        </p:sp>
-        <p:sp>
-          <p:nvSpPr>
-            <p:cNvPr id="315" name="pl314"/>
-            <p:cNvSpPr/>
-            <p:nvPr/>
-          </p:nvSpPr>
-          <p:spPr>
-            <a:xfrm>
-              <a:off x="5706607" y="2856440"/>
-              <a:ext cx="115199" cy="0"/>
-            </a:xfrm>
-            <a:custGeom>
-              <a:avLst/>
-              <a:pathLst>
-                <a:path w="115199" h="0">
-                  <a:moveTo>
-                    <a:pt x="0" y="0"/>
-                  </a:moveTo>
-                  <a:lnTo>
-                    <a:pt x="115199" y="0"/>
-                  </a:lnTo>
-                </a:path>
-              </a:pathLst>
-            </a:custGeom>
-            <a:ln w="27101" cap="flat">
-              <a:solidFill>
-                <a:srgbClr val="00BFC4">
-                  <a:alpha val="100000"/>
-                </a:srgbClr>
-              </a:solidFill>
-              <a:prstDash val="solid"/>
-              <a:round/>
-            </a:ln>
-          </p:spPr>
-          <p:txBody>
-            <a:bodyPr/>
-            <a:lstStyle/>
-            <a:p/>
-          </p:txBody>
-        </p:sp>
-        <p:sp>
-          <p:nvSpPr>
-            <p:cNvPr id="316" name="pt315"/>
-            <p:cNvSpPr/>
-            <p:nvPr/>
-          </p:nvSpPr>
-          <p:spPr>
-            <a:xfrm>
-              <a:off x="5739381" y="2831614"/>
-              <a:ext cx="49651" cy="49651"/>
-            </a:xfrm>
-            <a:prstGeom prst="ellipse">
-              <a:avLst/>
-            </a:prstGeom>
-            <a:solidFill>
-              <a:srgbClr val="00BFC4">
-                <a:alpha val="100000"/>
-              </a:srgbClr>
-            </a:solidFill>
-            <a:ln w="9000" cap="rnd">
-              <a:solidFill>
-                <a:srgbClr val="00BFC4">
-                  <a:alpha val="100000"/>
-                </a:srgbClr>
-              </a:solidFill>
-              <a:prstDash val="solid"/>
-              <a:round/>
-            </a:ln>
-          </p:spPr>
-          <p:txBody>
-            <a:bodyPr/>
-            <a:lstStyle/>
-            <a:p/>
-          </p:txBody>
-        </p:sp>
-        <p:sp>
-          <p:nvSpPr>
-            <p:cNvPr id="317" name="pl316"/>
-            <p:cNvSpPr/>
-            <p:nvPr/>
-          </p:nvSpPr>
-          <p:spPr>
-            <a:xfrm>
-              <a:off x="5706607" y="3000440"/>
-              <a:ext cx="115199" cy="0"/>
-            </a:xfrm>
-            <a:custGeom>
-              <a:avLst/>
-              <a:pathLst>
-                <a:path w="115199" h="0">
-                  <a:moveTo>
-                    <a:pt x="0" y="0"/>
-                  </a:moveTo>
-                  <a:lnTo>
-                    <a:pt x="115199" y="0"/>
-                  </a:lnTo>
-                </a:path>
-              </a:pathLst>
-            </a:custGeom>
-            <a:ln w="27101" cap="flat">
-              <a:solidFill>
-                <a:srgbClr val="00B4F0">
-                  <a:alpha val="100000"/>
-                </a:srgbClr>
-              </a:solidFill>
-              <a:prstDash val="solid"/>
-              <a:round/>
-            </a:ln>
-          </p:spPr>
-          <p:txBody>
-            <a:bodyPr/>
-            <a:lstStyle/>
-            <a:p/>
-          </p:txBody>
-        </p:sp>
-        <p:sp>
-          <p:nvSpPr>
-            <p:cNvPr id="318" name="pt317"/>
-            <p:cNvSpPr/>
-            <p:nvPr/>
-          </p:nvSpPr>
-          <p:spPr>
-            <a:xfrm>
-              <a:off x="5739381" y="2975614"/>
-              <a:ext cx="49651" cy="49651"/>
-            </a:xfrm>
-            <a:prstGeom prst="ellipse">
-              <a:avLst/>
-            </a:prstGeom>
-            <a:solidFill>
-              <a:srgbClr val="00B4F0">
-                <a:alpha val="100000"/>
-              </a:srgbClr>
-            </a:solidFill>
-            <a:ln w="9000" cap="rnd">
-              <a:solidFill>
-                <a:srgbClr val="00B4F0">
-                  <a:alpha val="100000"/>
-                </a:srgbClr>
-              </a:solidFill>
-              <a:prstDash val="solid"/>
-              <a:round/>
-            </a:ln>
-          </p:spPr>
-          <p:txBody>
-            <a:bodyPr/>
-            <a:lstStyle/>
-            <a:p/>
-          </p:txBody>
-        </p:sp>
-        <p:sp>
-          <p:nvSpPr>
-            <p:cNvPr id="319" name="pl318"/>
-            <p:cNvSpPr/>
-            <p:nvPr/>
-          </p:nvSpPr>
-          <p:spPr>
-            <a:xfrm>
-              <a:off x="5706607" y="3144440"/>
-              <a:ext cx="115199" cy="0"/>
-            </a:xfrm>
-            <a:custGeom>
-              <a:avLst/>
-              <a:pathLst>
-                <a:path w="115199" h="0">
-                  <a:moveTo>
-                    <a:pt x="0" y="0"/>
-                  </a:moveTo>
-                  <a:lnTo>
-                    <a:pt x="115199" y="0"/>
-                  </a:lnTo>
-                </a:path>
-              </a:pathLst>
-            </a:custGeom>
-            <a:ln w="27101" cap="flat">
-              <a:solidFill>
-                <a:srgbClr val="619CFF">
-                  <a:alpha val="100000"/>
-                </a:srgbClr>
-              </a:solidFill>
-              <a:prstDash val="solid"/>
-              <a:round/>
-            </a:ln>
-          </p:spPr>
-          <p:txBody>
-            <a:bodyPr/>
-            <a:lstStyle/>
-            <a:p/>
-          </p:txBody>
-        </p:sp>
-        <p:sp>
-          <p:nvSpPr>
-            <p:cNvPr id="320" name="pt319"/>
-            <p:cNvSpPr/>
-            <p:nvPr/>
-          </p:nvSpPr>
-          <p:spPr>
-            <a:xfrm>
-              <a:off x="5739381" y="3119614"/>
-              <a:ext cx="49651" cy="49651"/>
-            </a:xfrm>
-            <a:prstGeom prst="ellipse">
-              <a:avLst/>
-            </a:prstGeom>
-            <a:solidFill>
-              <a:srgbClr val="619CFF">
-                <a:alpha val="100000"/>
-              </a:srgbClr>
-            </a:solidFill>
-            <a:ln w="9000" cap="rnd">
-              <a:solidFill>
-                <a:srgbClr val="619CFF">
-                  <a:alpha val="100000"/>
-                </a:srgbClr>
-              </a:solidFill>
-              <a:prstDash val="solid"/>
-              <a:round/>
-            </a:ln>
-          </p:spPr>
-          <p:txBody>
-            <a:bodyPr/>
-            <a:lstStyle/>
-            <a:p/>
-          </p:txBody>
-        </p:sp>
-        <p:sp>
-          <p:nvSpPr>
-            <p:cNvPr id="321" name="pl320"/>
-            <p:cNvSpPr/>
-            <p:nvPr/>
-          </p:nvSpPr>
-          <p:spPr>
-            <a:xfrm>
-              <a:off x="5706607" y="3288440"/>
-              <a:ext cx="115199" cy="0"/>
-            </a:xfrm>
-            <a:custGeom>
-              <a:avLst/>
-              <a:pathLst>
-                <a:path w="115199" h="0">
-                  <a:moveTo>
-                    <a:pt x="0" y="0"/>
-                  </a:moveTo>
-                  <a:lnTo>
-                    <a:pt x="115199" y="0"/>
-                  </a:lnTo>
-                </a:path>
-              </a:pathLst>
-            </a:custGeom>
-            <a:ln w="27101" cap="flat">
-              <a:solidFill>
-                <a:srgbClr val="C77CFF">
-                  <a:alpha val="100000"/>
-                </a:srgbClr>
-              </a:solidFill>
-              <a:prstDash val="solid"/>
-              <a:round/>
-            </a:ln>
-          </p:spPr>
-          <p:txBody>
-            <a:bodyPr/>
-            <a:lstStyle/>
-            <a:p/>
-          </p:txBody>
-        </p:sp>
-        <p:sp>
-          <p:nvSpPr>
-            <p:cNvPr id="322" name="pt321"/>
-            <p:cNvSpPr/>
-            <p:nvPr/>
-          </p:nvSpPr>
-          <p:spPr>
-            <a:xfrm>
-              <a:off x="5739381" y="3263614"/>
-              <a:ext cx="49651" cy="49651"/>
-            </a:xfrm>
-            <a:prstGeom prst="ellipse">
-              <a:avLst/>
-            </a:prstGeom>
-            <a:solidFill>
-              <a:srgbClr val="C77CFF">
-                <a:alpha val="100000"/>
-              </a:srgbClr>
-            </a:solidFill>
-            <a:ln w="9000" cap="rnd">
-              <a:solidFill>
-                <a:srgbClr val="C77CFF">
-                  <a:alpha val="100000"/>
-                </a:srgbClr>
-              </a:solidFill>
-              <a:prstDash val="solid"/>
-              <a:round/>
-            </a:ln>
-          </p:spPr>
-          <p:txBody>
-            <a:bodyPr/>
-            <a:lstStyle/>
-            <a:p/>
-          </p:txBody>
-        </p:sp>
-        <p:sp>
-          <p:nvSpPr>
-            <p:cNvPr id="323" name="pl322"/>
-            <p:cNvSpPr/>
-            <p:nvPr/>
-          </p:nvSpPr>
-          <p:spPr>
-            <a:xfrm>
-              <a:off x="5706607" y="3432440"/>
-              <a:ext cx="115199" cy="0"/>
-            </a:xfrm>
-            <a:custGeom>
-              <a:avLst/>
-              <a:pathLst>
-                <a:path w="115199" h="0">
-                  <a:moveTo>
-                    <a:pt x="0" y="0"/>
-                  </a:moveTo>
-                  <a:lnTo>
-                    <a:pt x="115199" y="0"/>
-                  </a:lnTo>
-                </a:path>
-              </a:pathLst>
-            </a:custGeom>
-            <a:ln w="27101" cap="flat">
-              <a:solidFill>
-                <a:srgbClr val="F564E3">
-                  <a:alpha val="100000"/>
-                </a:srgbClr>
-              </a:solidFill>
-              <a:prstDash val="solid"/>
-              <a:round/>
-            </a:ln>
-          </p:spPr>
-          <p:txBody>
-            <a:bodyPr/>
-            <a:lstStyle/>
-            <a:p/>
-          </p:txBody>
-        </p:sp>
-        <p:sp>
-          <p:nvSpPr>
-            <p:cNvPr id="324" name="pt323"/>
-            <p:cNvSpPr/>
-            <p:nvPr/>
-          </p:nvSpPr>
-          <p:spPr>
-            <a:xfrm>
-              <a:off x="5739381" y="3407614"/>
-              <a:ext cx="49651" cy="49651"/>
-            </a:xfrm>
-            <a:prstGeom prst="ellipse">
-              <a:avLst/>
-            </a:prstGeom>
-            <a:solidFill>
-              <a:srgbClr val="F564E3">
-                <a:alpha val="100000"/>
-              </a:srgbClr>
-            </a:solidFill>
-            <a:ln w="9000" cap="rnd">
-              <a:solidFill>
-                <a:srgbClr val="F564E3">
-                  <a:alpha val="100000"/>
-                </a:srgbClr>
-              </a:solidFill>
-              <a:prstDash val="solid"/>
-              <a:round/>
-            </a:ln>
-          </p:spPr>
-          <p:txBody>
-            <a:bodyPr/>
-            <a:lstStyle/>
-            <a:p/>
-          </p:txBody>
-        </p:sp>
-        <p:sp>
-          <p:nvSpPr>
-            <p:cNvPr id="325" name="pl324"/>
-            <p:cNvSpPr/>
-            <p:nvPr/>
-          </p:nvSpPr>
-          <p:spPr>
-            <a:xfrm>
-              <a:off x="5706607" y="3576440"/>
-              <a:ext cx="115199" cy="0"/>
-            </a:xfrm>
-            <a:custGeom>
-              <a:avLst/>
-              <a:pathLst>
-                <a:path w="115199" h="0">
-                  <a:moveTo>
-                    <a:pt x="0" y="0"/>
-                  </a:moveTo>
-                  <a:lnTo>
-                    <a:pt x="115199" y="0"/>
-                  </a:lnTo>
-                </a:path>
-              </a:pathLst>
-            </a:custGeom>
-            <a:ln w="27101" cap="flat">
-              <a:solidFill>
-                <a:srgbClr val="FF64B0">
-                  <a:alpha val="100000"/>
-                </a:srgbClr>
-              </a:solidFill>
-              <a:prstDash val="solid"/>
-              <a:round/>
-            </a:ln>
-          </p:spPr>
-          <p:txBody>
-            <a:bodyPr/>
-            <a:lstStyle/>
-            <a:p/>
-          </p:txBody>
-        </p:sp>
-        <p:sp>
-          <p:nvSpPr>
-            <p:cNvPr id="326" name="pt325"/>
-            <p:cNvSpPr/>
-            <p:nvPr/>
-          </p:nvSpPr>
-          <p:spPr>
-            <a:xfrm>
-              <a:off x="5739381" y="3551614"/>
-              <a:ext cx="49651" cy="49651"/>
-            </a:xfrm>
-            <a:prstGeom prst="ellipse">
-              <a:avLst/>
-            </a:prstGeom>
-            <a:solidFill>
-              <a:srgbClr val="FF64B0">
-                <a:alpha val="100000"/>
-              </a:srgbClr>
-            </a:solidFill>
-            <a:ln w="9000" cap="rnd">
-              <a:solidFill>
-                <a:srgbClr val="FF64B0">
-                  <a:alpha val="100000"/>
-                </a:srgbClr>
-              </a:solidFill>
-              <a:prstDash val="solid"/>
-              <a:round/>
-            </a:ln>
-          </p:spPr>
-          <p:txBody>
-            <a:bodyPr/>
-            <a:lstStyle/>
-            <a:p/>
-          </p:txBody>
-        </p:sp>
-        <p:sp>
-          <p:nvSpPr>
-            <p:cNvPr id="327" name="tx326"/>
-            <p:cNvSpPr/>
-            <p:nvPr/>
-          </p:nvSpPr>
-          <p:spPr>
-            <a:xfrm>
-              <a:off x="5924775" y="1936704"/>
-              <a:ext cx="189815" cy="107582"/>
-            </a:xfrm>
-            <a:prstGeom prst="rect">
-              <a:avLst/>
-            </a:prstGeom>
-            <a:noFill/>
-          </p:spPr>
-          <p:txBody>
-            <a:bodyPr lIns="0" rIns="0" tIns="0" bIns="0" anchorCtr="1" anchor="ctr" wrap="none"/>
-            <a:lstStyle/>
-            <a:p>
-              <a:pPr algn="l" marL="0" marR="0" indent="0">
-                <a:lnSpc>
-                  <a:spcPts val="1120"/>
-                </a:lnSpc>
-                <a:spcBef>
-                  <a:spcPts val="0"/>
-                </a:spcBef>
-                <a:spcAft>
-                  <a:spcPts val="0"/>
-                </a:spcAft>
-              </a:pPr>
-              <a:r>
-                <a:rPr sz="1120">
+                <a:rPr sz="1100" i="0" b="0">
                   <a:solidFill>
                     <a:srgbClr val="000000">
                       <a:alpha val="100000"/>
@@ -14666,14 +14095,14 @@
         </p:sp>
         <p:sp>
           <p:nvSpPr>
-            <p:cNvPr id="328" name="tx327"/>
-            <p:cNvSpPr/>
-            <p:nvPr/>
-          </p:nvSpPr>
-          <p:spPr>
-            <a:xfrm>
-              <a:off x="5924775" y="2080704"/>
-              <a:ext cx="280312" cy="107582"/>
+            <p:cNvPr id="315" name="tx314"/>
+            <p:cNvSpPr/>
+            <p:nvPr/>
+          </p:nvSpPr>
+          <p:spPr>
+            <a:xfrm>
+              <a:off x="5816068" y="1963067"/>
+              <a:ext cx="275325" cy="101864"/>
             </a:xfrm>
             <a:prstGeom prst="rect">
               <a:avLst/>
@@ -14685,9 +14114,6 @@
             <a:lstStyle/>
             <a:p>
               <a:pPr algn="l" marL="0" marR="0" indent="0">
-                <a:lnSpc>
-                  <a:spcPts val="1120"/>
-                </a:lnSpc>
                 <a:spcBef>
                   <a:spcPts val="0"/>
                 </a:spcBef>
@@ -14696,7 +14122,7 @@
                 </a:spcAft>
               </a:pPr>
               <a:r>
-                <a:rPr sz="1120">
+                <a:rPr sz="1100" i="0" b="0">
                   <a:solidFill>
                     <a:srgbClr val="000000">
                       <a:alpha val="100000"/>
@@ -14712,14 +14138,14 @@
         </p:sp>
         <p:sp>
           <p:nvSpPr>
-            <p:cNvPr id="329" name="tx328"/>
-            <p:cNvSpPr/>
-            <p:nvPr/>
-          </p:nvSpPr>
-          <p:spPr>
-            <a:xfrm>
-              <a:off x="5924775" y="2224704"/>
-              <a:ext cx="280312" cy="107582"/>
+            <p:cNvPr id="316" name="tx315"/>
+            <p:cNvSpPr/>
+            <p:nvPr/>
+          </p:nvSpPr>
+          <p:spPr>
+            <a:xfrm>
+              <a:off x="5816068" y="2169925"/>
+              <a:ext cx="275325" cy="101864"/>
             </a:xfrm>
             <a:prstGeom prst="rect">
               <a:avLst/>
@@ -14731,9 +14157,6 @@
             <a:lstStyle/>
             <a:p>
               <a:pPr algn="l" marL="0" marR="0" indent="0">
-                <a:lnSpc>
-                  <a:spcPts val="1120"/>
-                </a:lnSpc>
                 <a:spcBef>
                   <a:spcPts val="0"/>
                 </a:spcBef>
@@ -14742,7 +14165,7 @@
                 </a:spcAft>
               </a:pPr>
               <a:r>
-                <a:rPr sz="1120">
+                <a:rPr sz="1100" i="0" b="0">
                   <a:solidFill>
                     <a:srgbClr val="000000">
                       <a:alpha val="100000"/>
@@ -14758,14 +14181,14 @@
         </p:sp>
         <p:sp>
           <p:nvSpPr>
-            <p:cNvPr id="330" name="tx329"/>
-            <p:cNvSpPr/>
-            <p:nvPr/>
-          </p:nvSpPr>
-          <p:spPr>
-            <a:xfrm>
-              <a:off x="5924775" y="2368704"/>
-              <a:ext cx="280312" cy="107582"/>
+            <p:cNvPr id="317" name="tx316"/>
+            <p:cNvSpPr/>
+            <p:nvPr/>
+          </p:nvSpPr>
+          <p:spPr>
+            <a:xfrm>
+              <a:off x="5816068" y="2376782"/>
+              <a:ext cx="275325" cy="101864"/>
             </a:xfrm>
             <a:prstGeom prst="rect">
               <a:avLst/>
@@ -14777,9 +14200,6 @@
             <a:lstStyle/>
             <a:p>
               <a:pPr algn="l" marL="0" marR="0" indent="0">
-                <a:lnSpc>
-                  <a:spcPts val="1120"/>
-                </a:lnSpc>
                 <a:spcBef>
                   <a:spcPts val="0"/>
                 </a:spcBef>
@@ -14788,7 +14208,7 @@
                 </a:spcAft>
               </a:pPr>
               <a:r>
-                <a:rPr sz="1120">
+                <a:rPr sz="1100" i="0" b="0">
                   <a:solidFill>
                     <a:srgbClr val="000000">
                       <a:alpha val="100000"/>
@@ -14804,14 +14224,14 @@
         </p:sp>
         <p:sp>
           <p:nvSpPr>
-            <p:cNvPr id="331" name="tx330"/>
-            <p:cNvSpPr/>
-            <p:nvPr/>
-          </p:nvSpPr>
-          <p:spPr>
-            <a:xfrm>
-              <a:off x="5924775" y="2512704"/>
-              <a:ext cx="280312" cy="107582"/>
+            <p:cNvPr id="318" name="tx317"/>
+            <p:cNvSpPr/>
+            <p:nvPr/>
+          </p:nvSpPr>
+          <p:spPr>
+            <a:xfrm>
+              <a:off x="5816068" y="2583639"/>
+              <a:ext cx="275325" cy="101864"/>
             </a:xfrm>
             <a:prstGeom prst="rect">
               <a:avLst/>
@@ -14823,9 +14243,6 @@
             <a:lstStyle/>
             <a:p>
               <a:pPr algn="l" marL="0" marR="0" indent="0">
-                <a:lnSpc>
-                  <a:spcPts val="1120"/>
-                </a:lnSpc>
                 <a:spcBef>
                   <a:spcPts val="0"/>
                 </a:spcBef>
@@ -14834,7 +14251,7 @@
                 </a:spcAft>
               </a:pPr>
               <a:r>
-                <a:rPr sz="1120">
+                <a:rPr sz="1100" i="0" b="0">
                   <a:solidFill>
                     <a:srgbClr val="000000">
                       <a:alpha val="100000"/>
@@ -14850,14 +14267,14 @@
         </p:sp>
         <p:sp>
           <p:nvSpPr>
-            <p:cNvPr id="332" name="tx331"/>
-            <p:cNvSpPr/>
-            <p:nvPr/>
-          </p:nvSpPr>
-          <p:spPr>
-            <a:xfrm>
-              <a:off x="5924775" y="2656704"/>
-              <a:ext cx="189815" cy="107582"/>
+            <p:cNvPr id="319" name="tx318"/>
+            <p:cNvSpPr/>
+            <p:nvPr/>
+          </p:nvSpPr>
+          <p:spPr>
+            <a:xfrm>
+              <a:off x="5816068" y="2790497"/>
+              <a:ext cx="186446" cy="101864"/>
             </a:xfrm>
             <a:prstGeom prst="rect">
               <a:avLst/>
@@ -14869,9 +14286,6 @@
             <a:lstStyle/>
             <a:p>
               <a:pPr algn="l" marL="0" marR="0" indent="0">
-                <a:lnSpc>
-                  <a:spcPts val="1120"/>
-                </a:lnSpc>
                 <a:spcBef>
                   <a:spcPts val="0"/>
                 </a:spcBef>
@@ -14880,7 +14294,7 @@
                 </a:spcAft>
               </a:pPr>
               <a:r>
-                <a:rPr sz="1120">
+                <a:rPr sz="1100" i="0" b="0">
                   <a:solidFill>
                     <a:srgbClr val="000000">
                       <a:alpha val="100000"/>
@@ -14896,14 +14310,14 @@
         </p:sp>
         <p:sp>
           <p:nvSpPr>
-            <p:cNvPr id="333" name="tx332"/>
-            <p:cNvSpPr/>
-            <p:nvPr/>
-          </p:nvSpPr>
-          <p:spPr>
-            <a:xfrm>
-              <a:off x="5924775" y="2800704"/>
-              <a:ext cx="189815" cy="107582"/>
+            <p:cNvPr id="320" name="tx319"/>
+            <p:cNvSpPr/>
+            <p:nvPr/>
+          </p:nvSpPr>
+          <p:spPr>
+            <a:xfrm>
+              <a:off x="5816068" y="2997354"/>
+              <a:ext cx="186446" cy="101864"/>
             </a:xfrm>
             <a:prstGeom prst="rect">
               <a:avLst/>
@@ -14915,9 +14329,6 @@
             <a:lstStyle/>
             <a:p>
               <a:pPr algn="l" marL="0" marR="0" indent="0">
-                <a:lnSpc>
-                  <a:spcPts val="1120"/>
-                </a:lnSpc>
                 <a:spcBef>
                   <a:spcPts val="0"/>
                 </a:spcBef>
@@ -14926,7 +14337,7 @@
                 </a:spcAft>
               </a:pPr>
               <a:r>
-                <a:rPr sz="1120">
+                <a:rPr sz="1100" i="0" b="0">
                   <a:solidFill>
                     <a:srgbClr val="000000">
                       <a:alpha val="100000"/>
@@ -14942,14 +14353,14 @@
         </p:sp>
         <p:sp>
           <p:nvSpPr>
-            <p:cNvPr id="334" name="tx333"/>
-            <p:cNvSpPr/>
-            <p:nvPr/>
-          </p:nvSpPr>
-          <p:spPr>
-            <a:xfrm>
-              <a:off x="5924775" y="2944704"/>
-              <a:ext cx="189815" cy="107582"/>
+            <p:cNvPr id="321" name="tx320"/>
+            <p:cNvSpPr/>
+            <p:nvPr/>
+          </p:nvSpPr>
+          <p:spPr>
+            <a:xfrm>
+              <a:off x="5816068" y="3204212"/>
+              <a:ext cx="186446" cy="101864"/>
             </a:xfrm>
             <a:prstGeom prst="rect">
               <a:avLst/>
@@ -14961,9 +14372,6 @@
             <a:lstStyle/>
             <a:p>
               <a:pPr algn="l" marL="0" marR="0" indent="0">
-                <a:lnSpc>
-                  <a:spcPts val="1120"/>
-                </a:lnSpc>
                 <a:spcBef>
                   <a:spcPts val="0"/>
                 </a:spcBef>
@@ -14972,7 +14380,7 @@
                 </a:spcAft>
               </a:pPr>
               <a:r>
-                <a:rPr sz="1120">
+                <a:rPr sz="1100" i="0" b="0">
                   <a:solidFill>
                     <a:srgbClr val="000000">
                       <a:alpha val="100000"/>
@@ -14988,14 +14396,14 @@
         </p:sp>
         <p:sp>
           <p:nvSpPr>
-            <p:cNvPr id="335" name="tx334"/>
-            <p:cNvSpPr/>
-            <p:nvPr/>
-          </p:nvSpPr>
-          <p:spPr>
-            <a:xfrm>
-              <a:off x="5924775" y="3088704"/>
-              <a:ext cx="189815" cy="107582"/>
+            <p:cNvPr id="322" name="tx321"/>
+            <p:cNvSpPr/>
+            <p:nvPr/>
+          </p:nvSpPr>
+          <p:spPr>
+            <a:xfrm>
+              <a:off x="5816068" y="3411069"/>
+              <a:ext cx="186446" cy="101864"/>
             </a:xfrm>
             <a:prstGeom prst="rect">
               <a:avLst/>
@@ -15007,9 +14415,6 @@
             <a:lstStyle/>
             <a:p>
               <a:pPr algn="l" marL="0" marR="0" indent="0">
-                <a:lnSpc>
-                  <a:spcPts val="1120"/>
-                </a:lnSpc>
                 <a:spcBef>
                   <a:spcPts val="0"/>
                 </a:spcBef>
@@ -15018,7 +14423,7 @@
                 </a:spcAft>
               </a:pPr>
               <a:r>
-                <a:rPr sz="1120">
+                <a:rPr sz="1100" i="0" b="0">
                   <a:solidFill>
                     <a:srgbClr val="000000">
                       <a:alpha val="100000"/>
@@ -15034,14 +14439,14 @@
         </p:sp>
         <p:sp>
           <p:nvSpPr>
-            <p:cNvPr id="336" name="tx335"/>
-            <p:cNvSpPr/>
-            <p:nvPr/>
-          </p:nvSpPr>
-          <p:spPr>
-            <a:xfrm>
-              <a:off x="5924775" y="3232704"/>
-              <a:ext cx="189815" cy="107582"/>
+            <p:cNvPr id="323" name="tx322"/>
+            <p:cNvSpPr/>
+            <p:nvPr/>
+          </p:nvSpPr>
+          <p:spPr>
+            <a:xfrm>
+              <a:off x="5816068" y="3617926"/>
+              <a:ext cx="186446" cy="101864"/>
             </a:xfrm>
             <a:prstGeom prst="rect">
               <a:avLst/>
@@ -15053,9 +14458,6 @@
             <a:lstStyle/>
             <a:p>
               <a:pPr algn="l" marL="0" marR="0" indent="0">
-                <a:lnSpc>
-                  <a:spcPts val="1120"/>
-                </a:lnSpc>
                 <a:spcBef>
                   <a:spcPts val="0"/>
                 </a:spcBef>
@@ -15064,7 +14466,7 @@
                 </a:spcAft>
               </a:pPr>
               <a:r>
-                <a:rPr sz="1120">
+                <a:rPr sz="1100" i="0" b="0">
                   <a:solidFill>
                     <a:srgbClr val="000000">
                       <a:alpha val="100000"/>
@@ -15080,14 +14482,14 @@
         </p:sp>
         <p:sp>
           <p:nvSpPr>
-            <p:cNvPr id="337" name="tx336"/>
-            <p:cNvSpPr/>
-            <p:nvPr/>
-          </p:nvSpPr>
-          <p:spPr>
-            <a:xfrm>
-              <a:off x="5924775" y="3376704"/>
-              <a:ext cx="189815" cy="107582"/>
+            <p:cNvPr id="324" name="tx323"/>
+            <p:cNvSpPr/>
+            <p:nvPr/>
+          </p:nvSpPr>
+          <p:spPr>
+            <a:xfrm>
+              <a:off x="5816068" y="3824784"/>
+              <a:ext cx="186446" cy="101864"/>
             </a:xfrm>
             <a:prstGeom prst="rect">
               <a:avLst/>
@@ -15099,9 +14501,6 @@
             <a:lstStyle/>
             <a:p>
               <a:pPr algn="l" marL="0" marR="0" indent="0">
-                <a:lnSpc>
-                  <a:spcPts val="1120"/>
-                </a:lnSpc>
                 <a:spcBef>
                   <a:spcPts val="0"/>
                 </a:spcBef>
@@ -15110,7 +14509,7 @@
                 </a:spcAft>
               </a:pPr>
               <a:r>
-                <a:rPr sz="1120">
+                <a:rPr sz="1100" i="0" b="0">
                   <a:solidFill>
                     <a:srgbClr val="000000">
                       <a:alpha val="100000"/>
@@ -15126,14 +14525,14 @@
         </p:sp>
         <p:sp>
           <p:nvSpPr>
-            <p:cNvPr id="338" name="tx337"/>
-            <p:cNvSpPr/>
-            <p:nvPr/>
-          </p:nvSpPr>
-          <p:spPr>
-            <a:xfrm>
-              <a:off x="5924775" y="3520704"/>
-              <a:ext cx="189815" cy="107582"/>
+            <p:cNvPr id="325" name="tx324"/>
+            <p:cNvSpPr/>
+            <p:nvPr/>
+          </p:nvSpPr>
+          <p:spPr>
+            <a:xfrm>
+              <a:off x="5816068" y="4031641"/>
+              <a:ext cx="186446" cy="101864"/>
             </a:xfrm>
             <a:prstGeom prst="rect">
               <a:avLst/>
@@ -15145,9 +14544,6 @@
             <a:lstStyle/>
             <a:p>
               <a:pPr algn="l" marL="0" marR="0" indent="0">
-                <a:lnSpc>
-                  <a:spcPts val="1120"/>
-                </a:lnSpc>
                 <a:spcBef>
                   <a:spcPts val="0"/>
                 </a:spcBef>
@@ -15156,7 +14552,7 @@
                 </a:spcAft>
               </a:pPr>
               <a:r>
-                <a:rPr sz="1120">
+                <a:rPr sz="1100" i="0" b="0">
                   <a:solidFill>
                     <a:srgbClr val="000000">
                       <a:alpha val="100000"/>
